--- a/ppt/midterm_report.pptx
+++ b/ppt/midterm_report.pptx
@@ -5,22 +5,20 @@
     <p:sldMasterId id="2147483648" r:id="rId1"/>
   </p:sldMasterIdLst>
   <p:sldIdLst>
-    <p:sldId id="256" r:id="rId7"/>
-    <p:sldId id="257" r:id="rId8"/>
-    <p:sldId id="258" r:id="rId9"/>
-    <p:sldId id="259" r:id="rId10"/>
-    <p:sldId id="260" r:id="rId11"/>
-    <p:sldId id="261" r:id="rId12"/>
-    <p:sldId id="262" r:id="rId13"/>
-    <p:sldId id="263" r:id="rId14"/>
-    <p:sldId id="264" r:id="rId15"/>
-    <p:sldId id="265" r:id="rId16"/>
-    <p:sldId id="266" r:id="rId17"/>
-    <p:sldId id="267" r:id="rId18"/>
-    <p:sldId id="268" r:id="rId19"/>
-    <p:sldId id="269" r:id="rId20"/>
-    <p:sldId id="270" r:id="rId21"/>
-    <p:sldId id="271" r:id="rId22"/>
+    <p:sldId id="256" r:id="rId2"/>
+    <p:sldId id="257" r:id="rId3"/>
+    <p:sldId id="258" r:id="rId4"/>
+    <p:sldId id="259" r:id="rId5"/>
+    <p:sldId id="260" r:id="rId6"/>
+    <p:sldId id="261" r:id="rId7"/>
+    <p:sldId id="262" r:id="rId8"/>
+    <p:sldId id="263" r:id="rId9"/>
+    <p:sldId id="264" r:id="rId10"/>
+    <p:sldId id="267" r:id="rId11"/>
+    <p:sldId id="268" r:id="rId12"/>
+    <p:sldId id="269" r:id="rId13"/>
+    <p:sldId id="270" r:id="rId14"/>
+    <p:sldId id="271" r:id="rId15"/>
   </p:sldIdLst>
   <p:sldSz cx="9144000" cy="6858000" type="screen4x3"/>
   <p:notesSz cx="6858000" cy="9144000"/>
@@ -119,6 +117,22 @@
       </a:defRPr>
     </a:lvl9pPr>
   </p:defaultTextStyle>
+  <p:extLst>
+    <p:ext uri="{EFAFB233-063F-42B5-8137-9DF3F51BA10A}">
+      <p15:sldGuideLst xmlns:p15="http://schemas.microsoft.com/office/powerpoint/2012/main">
+        <p15:guide id="1" orient="horz" pos="2160">
+          <p15:clr>
+            <a:srgbClr val="A4A3A4"/>
+          </p15:clr>
+        </p15:guide>
+        <p15:guide id="2" pos="2880">
+          <p15:clr>
+            <a:srgbClr val="A4A3A4"/>
+          </p15:clr>
+        </p15:guide>
+      </p15:sldGuideLst>
+    </p:ext>
+  </p:extLst>
 </p:presentation>
 </file>
 
@@ -160,10 +174,9 @@
           <a:lstStyle/>
           <a:p>
             <a:r>
-              <a:rPr lang="en-US" smtClean="0"/>
+              <a:rPr lang="en-US"/>
               <a:t>Click to edit Master title style</a:t>
             </a:r>
-            <a:endParaRPr lang="en-US"/>
           </a:p>
         </p:txBody>
       </p:sp>
@@ -279,10 +292,9 @@
           </a:lstStyle>
           <a:p>
             <a:r>
-              <a:rPr lang="en-US" smtClean="0"/>
+              <a:rPr lang="en-US"/>
               <a:t>Click to edit Master subtitle style</a:t>
             </a:r>
-            <a:endParaRPr lang="en-US"/>
           </a:p>
         </p:txBody>
       </p:sp>
@@ -303,7 +315,7 @@
           <a:p>
             <a:fld id="{5BCAD085-E8A6-8845-BD4E-CB4CCA059FC4}" type="datetimeFigureOut">
               <a:rPr lang="en-US" smtClean="0"/>
-              <a:t>1/27/13</a:t>
+              <a:t>3/10/2026</a:t>
             </a:fld>
             <a:endParaRPr lang="en-US"/>
           </a:p>
@@ -397,10 +409,9 @@
           <a:lstStyle/>
           <a:p>
             <a:r>
-              <a:rPr lang="en-US" smtClean="0"/>
+              <a:rPr lang="en-US"/>
               <a:t>Click to edit Master title style</a:t>
             </a:r>
-            <a:endParaRPr lang="en-US"/>
           </a:p>
         </p:txBody>
       </p:sp>
@@ -421,38 +432,37 @@
           <a:p>
             <a:pPr lvl="0"/>
             <a:r>
-              <a:rPr lang="en-US" smtClean="0"/>
+              <a:rPr lang="en-US"/>
               <a:t>Click to edit Master text styles</a:t>
             </a:r>
           </a:p>
           <a:p>
             <a:pPr lvl="1"/>
             <a:r>
-              <a:rPr lang="en-US" smtClean="0"/>
+              <a:rPr lang="en-US"/>
               <a:t>Second level</a:t>
             </a:r>
           </a:p>
           <a:p>
             <a:pPr lvl="2"/>
             <a:r>
-              <a:rPr lang="en-US" smtClean="0"/>
+              <a:rPr lang="en-US"/>
               <a:t>Third level</a:t>
             </a:r>
           </a:p>
           <a:p>
             <a:pPr lvl="3"/>
             <a:r>
-              <a:rPr lang="en-US" smtClean="0"/>
+              <a:rPr lang="en-US"/>
               <a:t>Fourth level</a:t>
             </a:r>
           </a:p>
           <a:p>
             <a:pPr lvl="4"/>
             <a:r>
-              <a:rPr lang="en-US" smtClean="0"/>
+              <a:rPr lang="en-US"/>
               <a:t>Fifth level</a:t>
             </a:r>
-            <a:endParaRPr lang="en-US"/>
           </a:p>
         </p:txBody>
       </p:sp>
@@ -473,7 +483,7 @@
           <a:p>
             <a:fld id="{5BCAD085-E8A6-8845-BD4E-CB4CCA059FC4}" type="datetimeFigureOut">
               <a:rPr lang="en-US" smtClean="0"/>
-              <a:t>1/27/13</a:t>
+              <a:t>3/10/2026</a:t>
             </a:fld>
             <a:endParaRPr lang="en-US"/>
           </a:p>
@@ -572,10 +582,9 @@
           <a:lstStyle/>
           <a:p>
             <a:r>
-              <a:rPr lang="en-US" smtClean="0"/>
+              <a:rPr lang="en-US"/>
               <a:t>Click to edit Master title style</a:t>
             </a:r>
-            <a:endParaRPr lang="en-US"/>
           </a:p>
         </p:txBody>
       </p:sp>
@@ -601,38 +610,37 @@
           <a:p>
             <a:pPr lvl="0"/>
             <a:r>
-              <a:rPr lang="en-US" smtClean="0"/>
+              <a:rPr lang="en-US"/>
               <a:t>Click to edit Master text styles</a:t>
             </a:r>
           </a:p>
           <a:p>
             <a:pPr lvl="1"/>
             <a:r>
-              <a:rPr lang="en-US" smtClean="0"/>
+              <a:rPr lang="en-US"/>
               <a:t>Second level</a:t>
             </a:r>
           </a:p>
           <a:p>
             <a:pPr lvl="2"/>
             <a:r>
-              <a:rPr lang="en-US" smtClean="0"/>
+              <a:rPr lang="en-US"/>
               <a:t>Third level</a:t>
             </a:r>
           </a:p>
           <a:p>
             <a:pPr lvl="3"/>
             <a:r>
-              <a:rPr lang="en-US" smtClean="0"/>
+              <a:rPr lang="en-US"/>
               <a:t>Fourth level</a:t>
             </a:r>
           </a:p>
           <a:p>
             <a:pPr lvl="4"/>
             <a:r>
-              <a:rPr lang="en-US" smtClean="0"/>
+              <a:rPr lang="en-US"/>
               <a:t>Fifth level</a:t>
             </a:r>
-            <a:endParaRPr lang="en-US"/>
           </a:p>
         </p:txBody>
       </p:sp>
@@ -653,7 +661,7 @@
           <a:p>
             <a:fld id="{5BCAD085-E8A6-8845-BD4E-CB4CCA059FC4}" type="datetimeFigureOut">
               <a:rPr lang="en-US" smtClean="0"/>
-              <a:t>1/27/13</a:t>
+              <a:t>3/10/2026</a:t>
             </a:fld>
             <a:endParaRPr lang="en-US"/>
           </a:p>
@@ -747,10 +755,9 @@
           <a:lstStyle/>
           <a:p>
             <a:r>
-              <a:rPr lang="en-US" smtClean="0"/>
+              <a:rPr lang="en-US"/>
               <a:t>Click to edit Master title style</a:t>
             </a:r>
-            <a:endParaRPr lang="en-US"/>
           </a:p>
         </p:txBody>
       </p:sp>
@@ -771,38 +778,37 @@
           <a:p>
             <a:pPr lvl="0"/>
             <a:r>
-              <a:rPr lang="en-US" smtClean="0"/>
+              <a:rPr lang="en-US"/>
               <a:t>Click to edit Master text styles</a:t>
             </a:r>
           </a:p>
           <a:p>
             <a:pPr lvl="1"/>
             <a:r>
-              <a:rPr lang="en-US" smtClean="0"/>
+              <a:rPr lang="en-US"/>
               <a:t>Second level</a:t>
             </a:r>
           </a:p>
           <a:p>
             <a:pPr lvl="2"/>
             <a:r>
-              <a:rPr lang="en-US" smtClean="0"/>
+              <a:rPr lang="en-US"/>
               <a:t>Third level</a:t>
             </a:r>
           </a:p>
           <a:p>
             <a:pPr lvl="3"/>
             <a:r>
-              <a:rPr lang="en-US" smtClean="0"/>
+              <a:rPr lang="en-US"/>
               <a:t>Fourth level</a:t>
             </a:r>
           </a:p>
           <a:p>
             <a:pPr lvl="4"/>
             <a:r>
-              <a:rPr lang="en-US" smtClean="0"/>
+              <a:rPr lang="en-US"/>
               <a:t>Fifth level</a:t>
             </a:r>
-            <a:endParaRPr lang="en-US"/>
           </a:p>
         </p:txBody>
       </p:sp>
@@ -823,7 +829,7 @@
           <a:p>
             <a:fld id="{5BCAD085-E8A6-8845-BD4E-CB4CCA059FC4}" type="datetimeFigureOut">
               <a:rPr lang="en-US" smtClean="0"/>
-              <a:t>1/27/13</a:t>
+              <a:t>3/10/2026</a:t>
             </a:fld>
             <a:endParaRPr lang="en-US"/>
           </a:p>
@@ -926,10 +932,9 @@
           </a:lstStyle>
           <a:p>
             <a:r>
-              <a:rPr lang="en-US" smtClean="0"/>
+              <a:rPr lang="en-US"/>
               <a:t>Click to edit Master title style</a:t>
             </a:r>
-            <a:endParaRPr lang="en-US"/>
           </a:p>
         </p:txBody>
       </p:sp>
@@ -1046,7 +1051,7 @@
           <a:p>
             <a:pPr lvl="0"/>
             <a:r>
-              <a:rPr lang="en-US" smtClean="0"/>
+              <a:rPr lang="en-US"/>
               <a:t>Click to edit Master text styles</a:t>
             </a:r>
           </a:p>
@@ -1069,7 +1074,7 @@
           <a:p>
             <a:fld id="{5BCAD085-E8A6-8845-BD4E-CB4CCA059FC4}" type="datetimeFigureOut">
               <a:rPr lang="en-US" smtClean="0"/>
-              <a:t>1/27/13</a:t>
+              <a:t>3/10/2026</a:t>
             </a:fld>
             <a:endParaRPr lang="en-US"/>
           </a:p>
@@ -1163,10 +1168,9 @@
           <a:lstStyle/>
           <a:p>
             <a:r>
-              <a:rPr lang="en-US" smtClean="0"/>
+              <a:rPr lang="en-US"/>
               <a:t>Click to edit Master title style</a:t>
             </a:r>
-            <a:endParaRPr lang="en-US"/>
           </a:p>
         </p:txBody>
       </p:sp>
@@ -1220,38 +1224,37 @@
           <a:p>
             <a:pPr lvl="0"/>
             <a:r>
-              <a:rPr lang="en-US" smtClean="0"/>
+              <a:rPr lang="en-US"/>
               <a:t>Click to edit Master text styles</a:t>
             </a:r>
           </a:p>
           <a:p>
             <a:pPr lvl="1"/>
             <a:r>
-              <a:rPr lang="en-US" smtClean="0"/>
+              <a:rPr lang="en-US"/>
               <a:t>Second level</a:t>
             </a:r>
           </a:p>
           <a:p>
             <a:pPr lvl="2"/>
             <a:r>
-              <a:rPr lang="en-US" smtClean="0"/>
+              <a:rPr lang="en-US"/>
               <a:t>Third level</a:t>
             </a:r>
           </a:p>
           <a:p>
             <a:pPr lvl="3"/>
             <a:r>
-              <a:rPr lang="en-US" smtClean="0"/>
+              <a:rPr lang="en-US"/>
               <a:t>Fourth level</a:t>
             </a:r>
           </a:p>
           <a:p>
             <a:pPr lvl="4"/>
             <a:r>
-              <a:rPr lang="en-US" smtClean="0"/>
+              <a:rPr lang="en-US"/>
               <a:t>Fifth level</a:t>
             </a:r>
-            <a:endParaRPr lang="en-US"/>
           </a:p>
         </p:txBody>
       </p:sp>
@@ -1305,38 +1308,37 @@
           <a:p>
             <a:pPr lvl="0"/>
             <a:r>
-              <a:rPr lang="en-US" smtClean="0"/>
+              <a:rPr lang="en-US"/>
               <a:t>Click to edit Master text styles</a:t>
             </a:r>
           </a:p>
           <a:p>
             <a:pPr lvl="1"/>
             <a:r>
-              <a:rPr lang="en-US" smtClean="0"/>
+              <a:rPr lang="en-US"/>
               <a:t>Second level</a:t>
             </a:r>
           </a:p>
           <a:p>
             <a:pPr lvl="2"/>
             <a:r>
-              <a:rPr lang="en-US" smtClean="0"/>
+              <a:rPr lang="en-US"/>
               <a:t>Third level</a:t>
             </a:r>
           </a:p>
           <a:p>
             <a:pPr lvl="3"/>
             <a:r>
-              <a:rPr lang="en-US" smtClean="0"/>
+              <a:rPr lang="en-US"/>
               <a:t>Fourth level</a:t>
             </a:r>
           </a:p>
           <a:p>
             <a:pPr lvl="4"/>
             <a:r>
-              <a:rPr lang="en-US" smtClean="0"/>
+              <a:rPr lang="en-US"/>
               <a:t>Fifth level</a:t>
             </a:r>
-            <a:endParaRPr lang="en-US"/>
           </a:p>
         </p:txBody>
       </p:sp>
@@ -1357,7 +1359,7 @@
           <a:p>
             <a:fld id="{5BCAD085-E8A6-8845-BD4E-CB4CCA059FC4}" type="datetimeFigureOut">
               <a:rPr lang="en-US" smtClean="0"/>
-              <a:t>1/27/13</a:t>
+              <a:t>3/10/2026</a:t>
             </a:fld>
             <a:endParaRPr lang="en-US"/>
           </a:p>
@@ -1455,10 +1457,9 @@
           </a:lstStyle>
           <a:p>
             <a:r>
-              <a:rPr lang="en-US" smtClean="0"/>
+              <a:rPr lang="en-US"/>
               <a:t>Click to edit Master title style</a:t>
             </a:r>
-            <a:endParaRPr lang="en-US"/>
           </a:p>
         </p:txBody>
       </p:sp>
@@ -1521,7 +1522,7 @@
           <a:p>
             <a:pPr lvl="0"/>
             <a:r>
-              <a:rPr lang="en-US" smtClean="0"/>
+              <a:rPr lang="en-US"/>
               <a:t>Click to edit Master text styles</a:t>
             </a:r>
           </a:p>
@@ -1577,38 +1578,37 @@
           <a:p>
             <a:pPr lvl="0"/>
             <a:r>
-              <a:rPr lang="en-US" smtClean="0"/>
+              <a:rPr lang="en-US"/>
               <a:t>Click to edit Master text styles</a:t>
             </a:r>
           </a:p>
           <a:p>
             <a:pPr lvl="1"/>
             <a:r>
-              <a:rPr lang="en-US" smtClean="0"/>
+              <a:rPr lang="en-US"/>
               <a:t>Second level</a:t>
             </a:r>
           </a:p>
           <a:p>
             <a:pPr lvl="2"/>
             <a:r>
-              <a:rPr lang="en-US" smtClean="0"/>
+              <a:rPr lang="en-US"/>
               <a:t>Third level</a:t>
             </a:r>
           </a:p>
           <a:p>
             <a:pPr lvl="3"/>
             <a:r>
-              <a:rPr lang="en-US" smtClean="0"/>
+              <a:rPr lang="en-US"/>
               <a:t>Fourth level</a:t>
             </a:r>
           </a:p>
           <a:p>
             <a:pPr lvl="4"/>
             <a:r>
-              <a:rPr lang="en-US" smtClean="0"/>
+              <a:rPr lang="en-US"/>
               <a:t>Fifth level</a:t>
             </a:r>
-            <a:endParaRPr lang="en-US"/>
           </a:p>
         </p:txBody>
       </p:sp>
@@ -1671,7 +1671,7 @@
           <a:p>
             <a:pPr lvl="0"/>
             <a:r>
-              <a:rPr lang="en-US" smtClean="0"/>
+              <a:rPr lang="en-US"/>
               <a:t>Click to edit Master text styles</a:t>
             </a:r>
           </a:p>
@@ -1727,38 +1727,37 @@
           <a:p>
             <a:pPr lvl="0"/>
             <a:r>
-              <a:rPr lang="en-US" smtClean="0"/>
+              <a:rPr lang="en-US"/>
               <a:t>Click to edit Master text styles</a:t>
             </a:r>
           </a:p>
           <a:p>
             <a:pPr lvl="1"/>
             <a:r>
-              <a:rPr lang="en-US" smtClean="0"/>
+              <a:rPr lang="en-US"/>
               <a:t>Second level</a:t>
             </a:r>
           </a:p>
           <a:p>
             <a:pPr lvl="2"/>
             <a:r>
-              <a:rPr lang="en-US" smtClean="0"/>
+              <a:rPr lang="en-US"/>
               <a:t>Third level</a:t>
             </a:r>
           </a:p>
           <a:p>
             <a:pPr lvl="3"/>
             <a:r>
-              <a:rPr lang="en-US" smtClean="0"/>
+              <a:rPr lang="en-US"/>
               <a:t>Fourth level</a:t>
             </a:r>
           </a:p>
           <a:p>
             <a:pPr lvl="4"/>
             <a:r>
-              <a:rPr lang="en-US" smtClean="0"/>
+              <a:rPr lang="en-US"/>
               <a:t>Fifth level</a:t>
             </a:r>
-            <a:endParaRPr lang="en-US"/>
           </a:p>
         </p:txBody>
       </p:sp>
@@ -1779,7 +1778,7 @@
           <a:p>
             <a:fld id="{5BCAD085-E8A6-8845-BD4E-CB4CCA059FC4}" type="datetimeFigureOut">
               <a:rPr lang="en-US" smtClean="0"/>
-              <a:t>1/27/13</a:t>
+              <a:t>3/10/2026</a:t>
             </a:fld>
             <a:endParaRPr lang="en-US"/>
           </a:p>
@@ -1873,10 +1872,9 @@
           <a:lstStyle/>
           <a:p>
             <a:r>
-              <a:rPr lang="en-US" smtClean="0"/>
+              <a:rPr lang="en-US"/>
               <a:t>Click to edit Master title style</a:t>
             </a:r>
-            <a:endParaRPr lang="en-US"/>
           </a:p>
         </p:txBody>
       </p:sp>
@@ -1897,7 +1895,7 @@
           <a:p>
             <a:fld id="{5BCAD085-E8A6-8845-BD4E-CB4CCA059FC4}" type="datetimeFigureOut">
               <a:rPr lang="en-US" smtClean="0"/>
-              <a:t>1/27/13</a:t>
+              <a:t>3/10/2026</a:t>
             </a:fld>
             <a:endParaRPr lang="en-US"/>
           </a:p>
@@ -1992,7 +1990,7 @@
           <a:p>
             <a:fld id="{5BCAD085-E8A6-8845-BD4E-CB4CCA059FC4}" type="datetimeFigureOut">
               <a:rPr lang="en-US" smtClean="0"/>
-              <a:t>1/27/13</a:t>
+              <a:t>3/10/2026</a:t>
             </a:fld>
             <a:endParaRPr lang="en-US"/>
           </a:p>
@@ -2095,10 +2093,9 @@
           </a:lstStyle>
           <a:p>
             <a:r>
-              <a:rPr lang="en-US" smtClean="0"/>
+              <a:rPr lang="en-US"/>
               <a:t>Click to edit Master title style</a:t>
             </a:r>
-            <a:endParaRPr lang="en-US"/>
           </a:p>
         </p:txBody>
       </p:sp>
@@ -2152,38 +2149,37 @@
           <a:p>
             <a:pPr lvl="0"/>
             <a:r>
-              <a:rPr lang="en-US" smtClean="0"/>
+              <a:rPr lang="en-US"/>
               <a:t>Click to edit Master text styles</a:t>
             </a:r>
           </a:p>
           <a:p>
             <a:pPr lvl="1"/>
             <a:r>
-              <a:rPr lang="en-US" smtClean="0"/>
+              <a:rPr lang="en-US"/>
               <a:t>Second level</a:t>
             </a:r>
           </a:p>
           <a:p>
             <a:pPr lvl="2"/>
             <a:r>
-              <a:rPr lang="en-US" smtClean="0"/>
+              <a:rPr lang="en-US"/>
               <a:t>Third level</a:t>
             </a:r>
           </a:p>
           <a:p>
             <a:pPr lvl="3"/>
             <a:r>
-              <a:rPr lang="en-US" smtClean="0"/>
+              <a:rPr lang="en-US"/>
               <a:t>Fourth level</a:t>
             </a:r>
           </a:p>
           <a:p>
             <a:pPr lvl="4"/>
             <a:r>
-              <a:rPr lang="en-US" smtClean="0"/>
+              <a:rPr lang="en-US"/>
               <a:t>Fifth level</a:t>
             </a:r>
-            <a:endParaRPr lang="en-US"/>
           </a:p>
         </p:txBody>
       </p:sp>
@@ -2246,7 +2242,7 @@
           <a:p>
             <a:pPr lvl="0"/>
             <a:r>
-              <a:rPr lang="en-US" smtClean="0"/>
+              <a:rPr lang="en-US"/>
               <a:t>Click to edit Master text styles</a:t>
             </a:r>
           </a:p>
@@ -2269,7 +2265,7 @@
           <a:p>
             <a:fld id="{5BCAD085-E8A6-8845-BD4E-CB4CCA059FC4}" type="datetimeFigureOut">
               <a:rPr lang="en-US" smtClean="0"/>
-              <a:t>1/27/13</a:t>
+              <a:t>3/10/2026</a:t>
             </a:fld>
             <a:endParaRPr lang="en-US"/>
           </a:p>
@@ -2372,10 +2368,9 @@
           </a:lstStyle>
           <a:p>
             <a:r>
-              <a:rPr lang="en-US" smtClean="0"/>
+              <a:rPr lang="en-US"/>
               <a:t>Click to edit Master title style</a:t>
             </a:r>
-            <a:endParaRPr lang="en-US"/>
           </a:p>
         </p:txBody>
       </p:sp>
@@ -2499,7 +2494,7 @@
           <a:p>
             <a:pPr lvl="0"/>
             <a:r>
-              <a:rPr lang="en-US" smtClean="0"/>
+              <a:rPr lang="en-US"/>
               <a:t>Click to edit Master text styles</a:t>
             </a:r>
           </a:p>
@@ -2522,7 +2517,7 @@
           <a:p>
             <a:fld id="{5BCAD085-E8A6-8845-BD4E-CB4CCA059FC4}" type="datetimeFigureOut">
               <a:rPr lang="en-US" smtClean="0"/>
-              <a:t>1/27/13</a:t>
+              <a:t>3/10/2026</a:t>
             </a:fld>
             <a:endParaRPr lang="en-US"/>
           </a:p>
@@ -2631,10 +2626,9 @@
           <a:lstStyle/>
           <a:p>
             <a:r>
-              <a:rPr lang="en-US" smtClean="0"/>
+              <a:rPr lang="en-US"/>
               <a:t>Click to edit Master title style</a:t>
             </a:r>
-            <a:endParaRPr lang="en-US"/>
           </a:p>
         </p:txBody>
       </p:sp>
@@ -2665,38 +2659,37 @@
           <a:p>
             <a:pPr lvl="0"/>
             <a:r>
-              <a:rPr lang="en-US" smtClean="0"/>
+              <a:rPr lang="en-US"/>
               <a:t>Click to edit Master text styles</a:t>
             </a:r>
           </a:p>
           <a:p>
             <a:pPr lvl="1"/>
             <a:r>
-              <a:rPr lang="en-US" smtClean="0"/>
+              <a:rPr lang="en-US"/>
               <a:t>Second level</a:t>
             </a:r>
           </a:p>
           <a:p>
             <a:pPr lvl="2"/>
             <a:r>
-              <a:rPr lang="en-US" smtClean="0"/>
+              <a:rPr lang="en-US"/>
               <a:t>Third level</a:t>
             </a:r>
           </a:p>
           <a:p>
             <a:pPr lvl="3"/>
             <a:r>
-              <a:rPr lang="en-US" smtClean="0"/>
+              <a:rPr lang="en-US"/>
               <a:t>Fourth level</a:t>
             </a:r>
           </a:p>
           <a:p>
             <a:pPr lvl="4"/>
             <a:r>
-              <a:rPr lang="en-US" smtClean="0"/>
+              <a:rPr lang="en-US"/>
               <a:t>Fifth level</a:t>
             </a:r>
-            <a:endParaRPr lang="en-US"/>
           </a:p>
         </p:txBody>
       </p:sp>
@@ -2735,7 +2728,7 @@
           <a:p>
             <a:fld id="{5BCAD085-E8A6-8845-BD4E-CB4CCA059FC4}" type="datetimeFigureOut">
               <a:rPr lang="en-US" smtClean="0"/>
-              <a:t>1/27/13</a:t>
+              <a:t>3/10/2026</a:t>
             </a:fld>
             <a:endParaRPr lang="en-US"/>
           </a:p>
@@ -3094,7 +3087,7 @@
 </file>
 
 <file path=ppt/slides/slide1.xml><?xml version="1.0" encoding="utf-8"?>
-<p:sld xmlns:a="http://schemas.openxmlformats.org/drawingml/2006/main" xmlns:p="http://schemas.openxmlformats.org/presentationml/2006/main" xmlns:r="http://schemas.openxmlformats.org/officeDocument/2006/relationships">
+<p:sld xmlns:a="http://schemas.openxmlformats.org/drawingml/2006/main" xmlns:r="http://schemas.openxmlformats.org/officeDocument/2006/relationships" xmlns:p="http://schemas.openxmlformats.org/presentationml/2006/main">
   <p:cSld>
     <p:bg>
       <p:bgPr>
@@ -3110,7 +3103,14 @@
         <p:cNvGrpSpPr/>
         <p:nvPr/>
       </p:nvGrpSpPr>
-      <p:grpSpPr/>
+      <p:grpSpPr>
+        <a:xfrm>
+          <a:off x="0" y="0"/>
+          <a:ext cx="0" cy="0"/>
+          <a:chOff x="0" y="0"/>
+          <a:chExt cx="0" cy="0"/>
+        </a:xfrm>
+      </p:grpSpPr>
       <p:sp>
         <p:nvSpPr>
           <p:cNvPr id="2" name="Title 1"/>
@@ -3154,7 +3154,7 @@
           <a:lstStyle/>
           <a:p>
             <a:r>
-              <a:rPr sz="2200">
+              <a:rPr sz="2200" dirty="0" err="1">
                 <a:solidFill>
                   <a:srgbClr val="9DB3CF"/>
                 </a:solidFill>
@@ -3162,16 +3162,94 @@
               </a:rPr>
               <a:t>期中成果報告</a:t>
             </a:r>
-          </a:p>
-          <a:p>
-            <a:r>
-              <a:rPr sz="2200">
+            <a:endParaRPr sz="2200" dirty="0">
+              <a:solidFill>
+                <a:srgbClr val="9DB3CF"/>
+              </a:solidFill>
+              <a:latin typeface="Noto Sans TC"/>
+            </a:endParaRPr>
+          </a:p>
+          <a:p>
+            <a:r>
+              <a:rPr sz="2200" dirty="0" err="1">
                 <a:solidFill>
                   <a:srgbClr val="9DB3CF"/>
                 </a:solidFill>
                 <a:latin typeface="Noto Sans TC"/>
               </a:rPr>
-              <a:t>班級：__________  姓名：__________  日期：2026/03</a:t>
+              <a:t>班級</a:t>
+            </a:r>
+            <a:r>
+              <a:rPr sz="2200" dirty="0">
+                <a:solidFill>
+                  <a:srgbClr val="9DB3CF"/>
+                </a:solidFill>
+                <a:latin typeface="Noto Sans TC"/>
+              </a:rPr>
+              <a:t>：</a:t>
+            </a:r>
+            <a:r>
+              <a:rPr lang="zh-TW" altLang="en-US" sz="2200" dirty="0">
+                <a:solidFill>
+                  <a:srgbClr val="9DB3CF"/>
+                </a:solidFill>
+                <a:latin typeface="Noto Sans TC"/>
+              </a:rPr>
+              <a:t>資工三甲</a:t>
+            </a:r>
+            <a:r>
+              <a:rPr lang="en-US" altLang="zh-TW" sz="2200" dirty="0">
+                <a:solidFill>
+                  <a:srgbClr val="9DB3CF"/>
+                </a:solidFill>
+                <a:latin typeface="Noto Sans TC"/>
+              </a:rPr>
+              <a:t>	</a:t>
+            </a:r>
+            <a:r>
+              <a:rPr sz="2200" dirty="0">
+                <a:solidFill>
+                  <a:srgbClr val="9DB3CF"/>
+                </a:solidFill>
+                <a:latin typeface="Noto Sans TC"/>
+              </a:rPr>
+              <a:t> </a:t>
+            </a:r>
+            <a:r>
+              <a:rPr sz="2200" dirty="0" err="1">
+                <a:solidFill>
+                  <a:srgbClr val="9DB3CF"/>
+                </a:solidFill>
+                <a:latin typeface="Noto Sans TC"/>
+              </a:rPr>
+              <a:t>姓名</a:t>
+            </a:r>
+            <a:r>
+              <a:rPr sz="2200" dirty="0">
+                <a:solidFill>
+                  <a:srgbClr val="9DB3CF"/>
+                </a:solidFill>
+                <a:latin typeface="Noto Sans TC"/>
+              </a:rPr>
+              <a:t>：</a:t>
+            </a:r>
+            <a:r>
+              <a:rPr lang="zh-TW" altLang="en-US" sz="2200" dirty="0">
+                <a:solidFill>
+                  <a:srgbClr val="9DB3CF"/>
+                </a:solidFill>
+                <a:latin typeface="Noto Sans TC"/>
+              </a:rPr>
+              <a:t>許哲瑋 李彥辰 黃靖凱</a:t>
+            </a:r>
+            <a:r>
+              <a:rPr sz="2200" dirty="0">
+                <a:solidFill>
+                  <a:srgbClr val="9DB3CF"/>
+                </a:solidFill>
+                <a:latin typeface="Noto Sans TC"/>
+              </a:rPr>
+              <a:t>  日期：2026/03</a:t>
             </a:r>
           </a:p>
         </p:txBody>
@@ -3216,6 +3294,7 @@
           <a:lstStyle/>
           <a:p>
             <a:pPr algn="ctr"/>
+            <a:endParaRPr/>
           </a:p>
         </p:txBody>
       </p:sp>
@@ -3259,6 +3338,7 @@
           <a:lstStyle/>
           <a:p>
             <a:pPr algn="ctr"/>
+            <a:endParaRPr/>
           </a:p>
         </p:txBody>
       </p:sp>
@@ -3302,6 +3382,7 @@
           <a:lstStyle/>
           <a:p>
             <a:pPr algn="ctr"/>
+            <a:endParaRPr/>
           </a:p>
         </p:txBody>
       </p:sp>
@@ -3385,8 +3466,8 @@
         </p:nvSpPr>
         <p:spPr>
           <a:xfrm>
-            <a:off x="640080" y="4160520"/>
-            <a:ext cx="10972800" cy="1554480"/>
+            <a:off x="685800" y="678782"/>
+            <a:ext cx="8179455" cy="1647223"/>
           </a:xfrm>
           <a:prstGeom prst="roundRect">
             <a:avLst/>
@@ -3477,7 +3558,7 @@
 </file>
 
 <file path=ppt/slides/slide10.xml><?xml version="1.0" encoding="utf-8"?>
-<p:sld xmlns:a="http://schemas.openxmlformats.org/drawingml/2006/main" xmlns:p="http://schemas.openxmlformats.org/presentationml/2006/main" xmlns:r="http://schemas.openxmlformats.org/officeDocument/2006/relationships">
+<p:sld xmlns:a="http://schemas.openxmlformats.org/drawingml/2006/main" xmlns:r="http://schemas.openxmlformats.org/officeDocument/2006/relationships" xmlns:p="http://schemas.openxmlformats.org/presentationml/2006/main">
   <p:cSld>
     <p:bg>
       <p:bgPr>
@@ -3493,7 +3574,14 @@
         <p:cNvGrpSpPr/>
         <p:nvPr/>
       </p:nvGrpSpPr>
-      <p:grpSpPr/>
+      <p:grpSpPr>
+        <a:xfrm>
+          <a:off x="0" y="0"/>
+          <a:ext cx="0" cy="0"/>
+          <a:chOff x="0" y="0"/>
+          <a:chExt cx="0" cy="0"/>
+        </a:xfrm>
+      </p:grpSpPr>
       <p:sp>
         <p:nvSpPr>
           <p:cNvPr id="2" name="Title 1"/>
@@ -3516,7 +3604,7 @@
                 </a:solidFill>
                 <a:latin typeface="Space Grotesk"/>
               </a:rPr>
-              <a:t>節點 Demo 2 — Transformer</a:t>
+              <a:t>技術選型</a:t>
             </a:r>
           </a:p>
         </p:txBody>
@@ -3561,6 +3649,7 @@
           <a:lstStyle/>
           <a:p>
             <a:pPr algn="ctr"/>
+            <a:endParaRPr/>
           </a:p>
         </p:txBody>
       </p:sp>
@@ -3604,6 +3693,7 @@
           <a:lstStyle/>
           <a:p>
             <a:pPr algn="ctr"/>
+            <a:endParaRPr/>
           </a:p>
         </p:txBody>
       </p:sp>
@@ -3647,6 +3737,7 @@
           <a:lstStyle/>
           <a:p>
             <a:pPr algn="ctr"/>
+            <a:endParaRPr/>
           </a:p>
         </p:txBody>
       </p:sp>
@@ -3681,7 +3772,7 @@
               </a:defRPr>
             </a:pPr>
             <a:r>
-              <a:t>節點 Demo 2 — Transformer</a:t>
+              <a:t>技術選型</a:t>
             </a:r>
           </a:p>
         </p:txBody>
@@ -3731,7 +3822,7 @@
         <p:spPr>
           <a:xfrm>
             <a:off x="640080" y="1600200"/>
-            <a:ext cx="6400800" cy="4480560"/>
+            <a:ext cx="3440307" cy="3640394"/>
           </a:xfrm>
           <a:prstGeom prst="roundRect">
             <a:avLst/>
@@ -3764,43 +3855,20 @@
           <a:lstStyle/>
           <a:p>
             <a:pPr algn="ctr"/>
-          </a:p>
-        </p:txBody>
-      </p:sp>
-      <p:pic>
-        <p:nvPicPr>
-          <p:cNvPr id="9" name="Picture 8" descr="demo-transformer.png"/>
-          <p:cNvPicPr>
-            <a:picLocks noChangeAspect="1"/>
-          </p:cNvPicPr>
-          <p:nvPr/>
-        </p:nvPicPr>
-        <p:blipFill>
-          <a:blip r:embed="rId2"/>
-          <a:stretch>
-            <a:fillRect/>
-          </a:stretch>
-        </p:blipFill>
-        <p:spPr>
-          <a:xfrm>
-            <a:off x="868680" y="1847088"/>
-            <a:ext cx="5943600" cy="3977639"/>
-          </a:xfrm>
-          <a:prstGeom prst="rect">
-            <a:avLst/>
-          </a:prstGeom>
-        </p:spPr>
-      </p:pic>
-      <p:sp>
-        <p:nvSpPr>
-          <p:cNvPr id="10" name="Rounded Rectangle 9"/>
+            <a:endParaRPr/>
+          </a:p>
+        </p:txBody>
+      </p:sp>
+      <p:sp>
+        <p:nvSpPr>
+          <p:cNvPr id="9" name="Rounded Rectangle 8"/>
           <p:cNvSpPr/>
           <p:nvPr/>
         </p:nvSpPr>
         <p:spPr>
           <a:xfrm>
-            <a:off x="7223760" y="1600200"/>
-            <a:ext cx="4343400" cy="4480560"/>
+            <a:off x="4452538" y="1600200"/>
+            <a:ext cx="3440307" cy="3640394"/>
           </a:xfrm>
           <a:prstGeom prst="roundRect">
             <a:avLst/>
@@ -3833,6 +3901,82 @@
           <a:lstStyle/>
           <a:p>
             <a:pPr algn="ctr"/>
+            <a:endParaRPr/>
+          </a:p>
+        </p:txBody>
+      </p:sp>
+      <p:sp>
+        <p:nvSpPr>
+          <p:cNvPr id="10" name="TextBox 9"/>
+          <p:cNvSpPr txBox="1"/>
+          <p:nvPr/>
+        </p:nvSpPr>
+        <p:spPr>
+          <a:xfrm>
+            <a:off x="914400" y="2514918"/>
+            <a:ext cx="3165987" cy="1246495"/>
+          </a:xfrm>
+          <a:prstGeom prst="rect">
+            <a:avLst/>
+          </a:prstGeom>
+          <a:noFill/>
+        </p:spPr>
+        <p:txBody>
+          <a:bodyPr wrap="square">
+            <a:spAutoFit/>
+          </a:bodyPr>
+          <a:lstStyle/>
+          <a:p>
+            <a:pPr>
+              <a:defRPr sz="2400" b="1">
+                <a:solidFill>
+                  <a:srgbClr val="79F0C6"/>
+                </a:solidFill>
+                <a:latin typeface="Noto Sans TC"/>
+              </a:defRPr>
+            </a:pPr>
+            <a:r>
+              <a:t>前端與部署</a:t>
+            </a:r>
+          </a:p>
+          <a:p>
+            <a:pPr>
+              <a:defRPr sz="1700">
+                <a:solidFill>
+                  <a:srgbClr val="ECF4FF"/>
+                </a:solidFill>
+                <a:latin typeface="Noto Sans TC"/>
+              </a:defRPr>
+            </a:pPr>
+            <a:r>
+              <a:t>• HTML / CSS / JavaScript</a:t>
+            </a:r>
+          </a:p>
+          <a:p>
+            <a:pPr>
+              <a:defRPr sz="1700">
+                <a:solidFill>
+                  <a:srgbClr val="ECF4FF"/>
+                </a:solidFill>
+                <a:latin typeface="Noto Sans TC"/>
+              </a:defRPr>
+            </a:pPr>
+            <a:r>
+              <a:t>• SVG 地圖互動</a:t>
+            </a:r>
+          </a:p>
+          <a:p>
+            <a:pPr>
+              <a:defRPr sz="1700">
+                <a:solidFill>
+                  <a:srgbClr val="ECF4FF"/>
+                </a:solidFill>
+                <a:latin typeface="Noto Sans TC"/>
+              </a:defRPr>
+            </a:pPr>
+            <a:r>
+              <a:t>• GitHub Pages 靜態部署</a:t>
+            </a:r>
           </a:p>
         </p:txBody>
       </p:sp>
@@ -3844,8 +3988,119 @@
         </p:nvSpPr>
         <p:spPr>
           <a:xfrm>
-            <a:off x="7498079" y="1874519"/>
-            <a:ext cx="3840480" cy="3977639"/>
+            <a:off x="4703753" y="2514920"/>
+            <a:ext cx="3440307" cy="1246495"/>
+          </a:xfrm>
+          <a:prstGeom prst="rect">
+            <a:avLst/>
+          </a:prstGeom>
+          <a:noFill/>
+        </p:spPr>
+        <p:txBody>
+          <a:bodyPr wrap="square">
+            <a:spAutoFit/>
+          </a:bodyPr>
+          <a:lstStyle/>
+          <a:p>
+            <a:pPr>
+              <a:defRPr sz="2400" b="1">
+                <a:solidFill>
+                  <a:srgbClr val="79F0C6"/>
+                </a:solidFill>
+                <a:latin typeface="Noto Sans TC"/>
+              </a:defRPr>
+            </a:pPr>
+            <a:r>
+              <a:rPr dirty="0" err="1"/>
+              <a:t>內容系統</a:t>
+            </a:r>
+            <a:endParaRPr dirty="0"/>
+          </a:p>
+          <a:p>
+            <a:pPr>
+              <a:defRPr sz="1700">
+                <a:solidFill>
+                  <a:srgbClr val="ECF4FF"/>
+                </a:solidFill>
+                <a:latin typeface="Noto Sans TC"/>
+              </a:defRPr>
+            </a:pPr>
+            <a:r>
+              <a:rPr dirty="0"/>
+              <a:t>• </a:t>
+            </a:r>
+            <a:r>
+              <a:rPr dirty="0" err="1"/>
+              <a:t>NotebookLM</a:t>
+            </a:r>
+            <a:r>
+              <a:rPr dirty="0"/>
+              <a:t> </a:t>
+            </a:r>
+            <a:r>
+              <a:rPr dirty="0" err="1"/>
+              <a:t>作為內容後台</a:t>
+            </a:r>
+            <a:endParaRPr dirty="0"/>
+          </a:p>
+          <a:p>
+            <a:pPr>
+              <a:defRPr sz="1700">
+                <a:solidFill>
+                  <a:srgbClr val="ECF4FF"/>
+                </a:solidFill>
+                <a:latin typeface="Noto Sans TC"/>
+              </a:defRPr>
+            </a:pPr>
+            <a:r>
+              <a:rPr dirty="0"/>
+              <a:t>• </a:t>
+            </a:r>
+            <a:r>
+              <a:rPr dirty="0" err="1"/>
+              <a:t>匯出</a:t>
+            </a:r>
+            <a:r>
+              <a:rPr dirty="0"/>
+              <a:t> JSON </a:t>
+            </a:r>
+            <a:r>
+              <a:rPr dirty="0" err="1"/>
+              <a:t>半自動同步</a:t>
+            </a:r>
+            <a:endParaRPr dirty="0"/>
+          </a:p>
+          <a:p>
+            <a:pPr>
+              <a:defRPr sz="1700">
+                <a:solidFill>
+                  <a:srgbClr val="ECF4FF"/>
+                </a:solidFill>
+                <a:latin typeface="Noto Sans TC"/>
+              </a:defRPr>
+            </a:pPr>
+            <a:r>
+              <a:rPr dirty="0"/>
+              <a:t>• </a:t>
+            </a:r>
+            <a:r>
+              <a:rPr dirty="0" err="1"/>
+              <a:t>節點結構與內容層分離</a:t>
+            </a:r>
+            <a:endParaRPr dirty="0"/>
+          </a:p>
+        </p:txBody>
+      </p:sp>
+      <p:sp>
+        <p:nvSpPr>
+          <p:cNvPr id="12" name="TextBox 11"/>
+          <p:cNvSpPr txBox="1"/>
+          <p:nvPr/>
+        </p:nvSpPr>
+        <p:spPr>
+          <a:xfrm>
+            <a:off x="11155680" y="6473952"/>
+            <a:ext cx="731520" cy="219456"/>
           </a:xfrm>
           <a:prstGeom prst="rect">
             <a:avLst/>
@@ -3858,81 +4113,6 @@
           </a:bodyPr>
           <a:lstStyle/>
           <a:p>
-            <a:pPr>
-              <a:defRPr sz="1600">
-                <a:solidFill>
-                  <a:srgbClr val="ECF4FF"/>
-                </a:solidFill>
-                <a:latin typeface="Noto Sans TC"/>
-              </a:defRPr>
-            </a:pPr>
-            <a:r>
-              <a:t>• 年份：2017，類別：模型架構</a:t>
-            </a:r>
-          </a:p>
-          <a:p>
-            <a:pPr>
-              <a:defRPr sz="1600">
-                <a:solidFill>
-                  <a:srgbClr val="ECF4FF"/>
-                </a:solidFill>
-                <a:latin typeface="Noto Sans TC"/>
-              </a:defRPr>
-            </a:pPr>
-            <a:r>
-              <a:t>• 定位：大型語言模型的核心架構</a:t>
-            </a:r>
-          </a:p>
-          <a:p>
-            <a:pPr>
-              <a:defRPr sz="1600">
-                <a:solidFill>
-                  <a:srgbClr val="ECF4FF"/>
-                </a:solidFill>
-                <a:latin typeface="Noto Sans TC"/>
-              </a:defRPr>
-            </a:pPr>
-            <a:r>
-              <a:t>• 可展示與 BERT / GPT-3 的技術關聯</a:t>
-            </a:r>
-          </a:p>
-          <a:p>
-            <a:pPr>
-              <a:defRPr sz="1600">
-                <a:solidFill>
-                  <a:srgbClr val="ECF4FF"/>
-                </a:solidFill>
-                <a:latin typeface="Noto Sans TC"/>
-              </a:defRPr>
-            </a:pPr>
-            <a:r>
-              <a:t>• 規劃補齊 NotebookLM 摘要與影片</a:t>
-            </a:r>
-          </a:p>
-        </p:txBody>
-      </p:sp>
-      <p:sp>
-        <p:nvSpPr>
-          <p:cNvPr id="12" name="TextBox 11"/>
-          <p:cNvSpPr txBox="1"/>
-          <p:nvPr/>
-        </p:nvSpPr>
-        <p:spPr>
-          <a:xfrm>
-            <a:off x="11155680" y="6473952"/>
-            <a:ext cx="731520" cy="219456"/>
-          </a:xfrm>
-          <a:prstGeom prst="rect">
-            <a:avLst/>
-          </a:prstGeom>
-          <a:noFill/>
-        </p:spPr>
-        <p:txBody>
-          <a:bodyPr wrap="none">
-            <a:spAutoFit/>
-          </a:bodyPr>
-          <a:lstStyle/>
-          <a:p>
             <a:pPr algn="r">
               <a:defRPr sz="1000">
                 <a:solidFill>
@@ -3942,7 +4122,7 @@
               </a:defRPr>
             </a:pPr>
             <a:r>
-              <a:t>10</a:t>
+              <a:t>12</a:t>
             </a:r>
           </a:p>
         </p:txBody>
@@ -3956,7 +4136,7 @@
 </file>
 
 <file path=ppt/slides/slide11.xml><?xml version="1.0" encoding="utf-8"?>
-<p:sld xmlns:a="http://schemas.openxmlformats.org/drawingml/2006/main" xmlns:p="http://schemas.openxmlformats.org/presentationml/2006/main" xmlns:r="http://schemas.openxmlformats.org/officeDocument/2006/relationships">
+<p:sld xmlns:a="http://schemas.openxmlformats.org/drawingml/2006/main" xmlns:r="http://schemas.openxmlformats.org/officeDocument/2006/relationships" xmlns:p="http://schemas.openxmlformats.org/presentationml/2006/main">
   <p:cSld>
     <p:bg>
       <p:bgPr>
@@ -3972,7 +4152,14 @@
         <p:cNvGrpSpPr/>
         <p:nvPr/>
       </p:nvGrpSpPr>
-      <p:grpSpPr/>
+      <p:grpSpPr>
+        <a:xfrm>
+          <a:off x="0" y="0"/>
+          <a:ext cx="0" cy="0"/>
+          <a:chOff x="0" y="0"/>
+          <a:chExt cx="0" cy="0"/>
+        </a:xfrm>
+      </p:grpSpPr>
       <p:sp>
         <p:nvSpPr>
           <p:cNvPr id="2" name="Title 1"/>
@@ -3995,21 +4182,40 @@
                 </a:solidFill>
                 <a:latin typeface="Space Grotesk"/>
               </a:rPr>
-              <a:t>節點 Demo 3 — ChatGPT</a:t>
-            </a:r>
-          </a:p>
-        </p:txBody>
-      </p:sp>
-      <p:sp>
-        <p:nvSpPr>
-          <p:cNvPr id="3" name="Rectangle 2"/>
+              <a:t>期中完成清單</a:t>
+            </a:r>
+          </a:p>
+        </p:txBody>
+      </p:sp>
+      <p:sp>
+        <p:nvSpPr>
+          <p:cNvPr id="3" name="Content Placeholder 2"/>
+          <p:cNvSpPr>
+            <a:spLocks noGrp="1"/>
+          </p:cNvSpPr>
+          <p:nvPr>
+            <p:ph idx="1"/>
+          </p:nvPr>
+        </p:nvSpPr>
+        <p:spPr/>
+        <p:txBody>
+          <a:bodyPr/>
+          <a:lstStyle/>
+          <a:p>
+            <a:endParaRPr/>
+          </a:p>
+        </p:txBody>
+      </p:sp>
+      <p:sp>
+        <p:nvSpPr>
+          <p:cNvPr id="4" name="Rectangle 3"/>
           <p:cNvSpPr/>
           <p:nvPr/>
         </p:nvSpPr>
         <p:spPr>
           <a:xfrm>
             <a:off x="0" y="0"/>
-            <a:ext cx="12188952" cy="502920"/>
+            <a:ext cx="9144000" cy="502920"/>
           </a:xfrm>
           <a:prstGeom prst="rect">
             <a:avLst/>
@@ -4040,19 +4246,20 @@
           <a:lstStyle/>
           <a:p>
             <a:pPr algn="ctr"/>
-          </a:p>
-        </p:txBody>
-      </p:sp>
-      <p:sp>
-        <p:nvSpPr>
-          <p:cNvPr id="4" name="Rectangle 3"/>
+            <a:endParaRPr/>
+          </a:p>
+        </p:txBody>
+      </p:sp>
+      <p:sp>
+        <p:nvSpPr>
+          <p:cNvPr id="5" name="Rectangle 4"/>
           <p:cNvSpPr/>
           <p:nvPr/>
         </p:nvSpPr>
         <p:spPr>
           <a:xfrm>
             <a:off x="0" y="429768"/>
-            <a:ext cx="12188952" cy="73152"/>
+            <a:ext cx="9144000" cy="73152"/>
           </a:xfrm>
           <a:prstGeom prst="rect">
             <a:avLst/>
@@ -4083,12 +4290,13 @@
           <a:lstStyle/>
           <a:p>
             <a:pPr algn="ctr"/>
-          </a:p>
-        </p:txBody>
-      </p:sp>
-      <p:sp>
-        <p:nvSpPr>
-          <p:cNvPr id="5" name="Rectangle 4"/>
+            <a:endParaRPr/>
+          </a:p>
+        </p:txBody>
+      </p:sp>
+      <p:sp>
+        <p:nvSpPr>
+          <p:cNvPr id="6" name="Rectangle 5"/>
           <p:cNvSpPr/>
           <p:nvPr/>
         </p:nvSpPr>
@@ -4126,12 +4334,13 @@
           <a:lstStyle/>
           <a:p>
             <a:pPr algn="ctr"/>
-          </a:p>
-        </p:txBody>
-      </p:sp>
-      <p:sp>
-        <p:nvSpPr>
-          <p:cNvPr id="6" name="TextBox 5"/>
+            <a:endParaRPr/>
+          </a:p>
+        </p:txBody>
+      </p:sp>
+      <p:sp>
+        <p:nvSpPr>
+          <p:cNvPr id="7" name="TextBox 6"/>
           <p:cNvSpPr txBox="1"/>
           <p:nvPr/>
         </p:nvSpPr>
@@ -4160,20 +4369,20 @@
               </a:defRPr>
             </a:pPr>
             <a:r>
-              <a:t>節點 Demo 3 — ChatGPT</a:t>
-            </a:r>
-          </a:p>
-        </p:txBody>
-      </p:sp>
-      <p:sp>
-        <p:nvSpPr>
-          <p:cNvPr id="7" name="TextBox 6"/>
+              <a:t>期中完成清單</a:t>
+            </a:r>
+          </a:p>
+        </p:txBody>
+      </p:sp>
+      <p:sp>
+        <p:nvSpPr>
+          <p:cNvPr id="8" name="TextBox 7"/>
           <p:cNvSpPr txBox="1"/>
           <p:nvPr/>
         </p:nvSpPr>
         <p:spPr>
           <a:xfrm>
-            <a:off x="9326880" y="73152"/>
+            <a:off x="6606540" y="132588"/>
             <a:ext cx="2377440" cy="274320"/>
           </a:xfrm>
           <a:prstGeom prst="rect">
@@ -4203,14 +4412,14 @@
       </p:sp>
       <p:sp>
         <p:nvSpPr>
-          <p:cNvPr id="8" name="Rounded Rectangle 7"/>
+          <p:cNvPr id="9" name="Rounded Rectangle 8"/>
           <p:cNvSpPr/>
           <p:nvPr/>
         </p:nvSpPr>
         <p:spPr>
           <a:xfrm>
-            <a:off x="640080" y="1600200"/>
-            <a:ext cx="6400800" cy="4480560"/>
+            <a:off x="685800" y="1737360"/>
+            <a:ext cx="7772400" cy="4251642"/>
           </a:xfrm>
           <a:prstGeom prst="roundRect">
             <a:avLst/>
@@ -4243,75 +4452,82 @@
           <a:lstStyle/>
           <a:p>
             <a:pPr algn="ctr"/>
-          </a:p>
-        </p:txBody>
-      </p:sp>
-      <p:pic>
-        <p:nvPicPr>
-          <p:cNvPr id="9" name="Picture 8" descr="demo-chatgpt.png"/>
-          <p:cNvPicPr>
-            <a:picLocks noChangeAspect="1"/>
-          </p:cNvPicPr>
-          <p:nvPr/>
-        </p:nvPicPr>
-        <p:blipFill>
-          <a:blip r:embed="rId2"/>
-          <a:stretch>
-            <a:fillRect/>
-          </a:stretch>
-        </p:blipFill>
-        <p:spPr>
-          <a:xfrm>
-            <a:off x="868680" y="1847088"/>
-            <a:ext cx="5943600" cy="3977639"/>
-          </a:xfrm>
-          <a:prstGeom prst="rect">
-            <a:avLst/>
-          </a:prstGeom>
-        </p:spPr>
-      </p:pic>
-      <p:sp>
-        <p:nvSpPr>
-          <p:cNvPr id="10" name="Rounded Rectangle 9"/>
-          <p:cNvSpPr/>
-          <p:nvPr/>
-        </p:nvSpPr>
-        <p:spPr>
-          <a:xfrm>
-            <a:off x="7223760" y="1600200"/>
-            <a:ext cx="4343400" cy="4480560"/>
-          </a:xfrm>
-          <a:prstGeom prst="roundRect">
-            <a:avLst/>
-          </a:prstGeom>
-          <a:solidFill>
-            <a:srgbClr val="0D223D"/>
-          </a:solidFill>
-          <a:ln w="12700">
-            <a:solidFill>
-              <a:srgbClr val="79F0C6"/>
-            </a:solidFill>
-          </a:ln>
-        </p:spPr>
-        <p:style>
-          <a:lnRef idx="1">
-            <a:schemeClr val="accent1"/>
-          </a:lnRef>
-          <a:fillRef idx="3">
-            <a:schemeClr val="accent1"/>
-          </a:fillRef>
-          <a:effectRef idx="2">
-            <a:schemeClr val="accent1"/>
-          </a:effectRef>
-          <a:fontRef idx="minor">
-            <a:schemeClr val="lt1"/>
-          </a:fontRef>
-        </p:style>
-        <p:txBody>
-          <a:bodyPr rtlCol="0" anchor="ctr"/>
-          <a:lstStyle/>
-          <a:p>
-            <a:pPr algn="ctr"/>
+            <a:endParaRPr/>
+          </a:p>
+        </p:txBody>
+      </p:sp>
+      <p:sp>
+        <p:nvSpPr>
+          <p:cNvPr id="10" name="TextBox 9"/>
+          <p:cNvSpPr txBox="1"/>
+          <p:nvPr/>
+        </p:nvSpPr>
+        <p:spPr>
+          <a:xfrm>
+            <a:off x="960120" y="1828800"/>
+            <a:ext cx="7498080" cy="1200329"/>
+          </a:xfrm>
+          <a:prstGeom prst="rect">
+            <a:avLst/>
+          </a:prstGeom>
+          <a:noFill/>
+        </p:spPr>
+        <p:txBody>
+          <a:bodyPr wrap="square">
+            <a:spAutoFit/>
+          </a:bodyPr>
+          <a:lstStyle/>
+          <a:p>
+            <a:pPr>
+              <a:defRPr sz="1800">
+                <a:solidFill>
+                  <a:srgbClr val="ECF4FF"/>
+                </a:solidFill>
+                <a:latin typeface="Noto Sans TC"/>
+              </a:defRPr>
+            </a:pPr>
+            <a:r>
+              <a:t>• 完成四頁網站：Home / Map / Topics / About</a:t>
+            </a:r>
+          </a:p>
+          <a:p>
+            <a:pPr>
+              <a:defRPr sz="1800">
+                <a:solidFill>
+                  <a:srgbClr val="ECF4FF"/>
+                </a:solidFill>
+                <a:latin typeface="Noto Sans TC"/>
+              </a:defRPr>
+            </a:pPr>
+            <a:r>
+              <a:t>• 完成 22 節點資料與地圖互動邏輯</a:t>
+            </a:r>
+          </a:p>
+          <a:p>
+            <a:pPr>
+              <a:defRPr sz="1800">
+                <a:solidFill>
+                  <a:srgbClr val="ECF4FF"/>
+                </a:solidFill>
+                <a:latin typeface="Noto Sans TC"/>
+              </a:defRPr>
+            </a:pPr>
+            <a:r>
+              <a:t>• 完成年代篩選、縮放拖曳、測驗互動</a:t>
+            </a:r>
+          </a:p>
+          <a:p>
+            <a:pPr>
+              <a:defRPr sz="1800">
+                <a:solidFill>
+                  <a:srgbClr val="ECF4FF"/>
+                </a:solidFill>
+                <a:latin typeface="Noto Sans TC"/>
+              </a:defRPr>
+            </a:pPr>
+            <a:r>
+              <a:t>• 完成 NotebookLM 內容層整合架構</a:t>
+            </a:r>
           </a:p>
         </p:txBody>
       </p:sp>
@@ -4323,8 +4539,8 @@
         </p:nvSpPr>
         <p:spPr>
           <a:xfrm>
-            <a:off x="7498079" y="1874519"/>
-            <a:ext cx="3840480" cy="3977639"/>
+            <a:off x="11155680" y="6473952"/>
+            <a:ext cx="731520" cy="219456"/>
           </a:xfrm>
           <a:prstGeom prst="rect">
             <a:avLst/>
@@ -4337,81 +4553,6 @@
           </a:bodyPr>
           <a:lstStyle/>
           <a:p>
-            <a:pPr>
-              <a:defRPr sz="1600">
-                <a:solidFill>
-                  <a:srgbClr val="ECF4FF"/>
-                </a:solidFill>
-                <a:latin typeface="Noto Sans TC"/>
-              </a:defRPr>
-            </a:pPr>
-            <a:r>
-              <a:t>• 年份：2022，類別：應用突破</a:t>
-            </a:r>
-          </a:p>
-          <a:p>
-            <a:pPr>
-              <a:defRPr sz="1600">
-                <a:solidFill>
-                  <a:srgbClr val="ECF4FF"/>
-                </a:solidFill>
-                <a:latin typeface="Noto Sans TC"/>
-              </a:defRPr>
-            </a:pPr>
-            <a:r>
-              <a:t>• 重點：AI 大眾化的重要里程碑</a:t>
-            </a:r>
-          </a:p>
-          <a:p>
-            <a:pPr>
-              <a:defRPr sz="1600">
-                <a:solidFill>
-                  <a:srgbClr val="ECF4FF"/>
-                </a:solidFill>
-                <a:latin typeface="Noto Sans TC"/>
-              </a:defRPr>
-            </a:pPr>
-            <a:r>
-              <a:t>• 可結合來源出處做可查證展示</a:t>
-            </a:r>
-          </a:p>
-          <a:p>
-            <a:pPr>
-              <a:defRPr sz="1600">
-                <a:solidFill>
-                  <a:srgbClr val="ECF4FF"/>
-                </a:solidFill>
-                <a:latin typeface="Noto Sans TC"/>
-              </a:defRPr>
-            </a:pPr>
-            <a:r>
-              <a:t>• 與 Multimodal 節點串接未來趨勢</a:t>
-            </a:r>
-          </a:p>
-        </p:txBody>
-      </p:sp>
-      <p:sp>
-        <p:nvSpPr>
-          <p:cNvPr id="12" name="TextBox 11"/>
-          <p:cNvSpPr txBox="1"/>
-          <p:nvPr/>
-        </p:nvSpPr>
-        <p:spPr>
-          <a:xfrm>
-            <a:off x="11155680" y="6473952"/>
-            <a:ext cx="731520" cy="219456"/>
-          </a:xfrm>
-          <a:prstGeom prst="rect">
-            <a:avLst/>
-          </a:prstGeom>
-          <a:noFill/>
-        </p:spPr>
-        <p:txBody>
-          <a:bodyPr wrap="none">
-            <a:spAutoFit/>
-          </a:bodyPr>
-          <a:lstStyle/>
-          <a:p>
             <a:pPr algn="r">
               <a:defRPr sz="1000">
                 <a:solidFill>
@@ -4421,7 +4562,7 @@
               </a:defRPr>
             </a:pPr>
             <a:r>
-              <a:t>11</a:t>
+              <a:t>13</a:t>
             </a:r>
           </a:p>
         </p:txBody>
@@ -4435,7 +4576,7 @@
 </file>
 
 <file path=ppt/slides/slide12.xml><?xml version="1.0" encoding="utf-8"?>
-<p:sld xmlns:a="http://schemas.openxmlformats.org/drawingml/2006/main" xmlns:p="http://schemas.openxmlformats.org/presentationml/2006/main" xmlns:r="http://schemas.openxmlformats.org/officeDocument/2006/relationships">
+<p:sld xmlns:a="http://schemas.openxmlformats.org/drawingml/2006/main" xmlns:r="http://schemas.openxmlformats.org/officeDocument/2006/relationships" xmlns:p="http://schemas.openxmlformats.org/presentationml/2006/main">
   <p:cSld>
     <p:bg>
       <p:bgPr>
@@ -4451,7 +4592,14 @@
         <p:cNvGrpSpPr/>
         <p:nvPr/>
       </p:nvGrpSpPr>
-      <p:grpSpPr/>
+      <p:grpSpPr>
+        <a:xfrm>
+          <a:off x="0" y="0"/>
+          <a:ext cx="0" cy="0"/>
+          <a:chOff x="0" y="0"/>
+          <a:chExt cx="0" cy="0"/>
+        </a:xfrm>
+      </p:grpSpPr>
       <p:sp>
         <p:nvSpPr>
           <p:cNvPr id="2" name="Title 1"/>
@@ -4474,21 +4622,40 @@
                 </a:solidFill>
                 <a:latin typeface="Space Grotesk"/>
               </a:rPr>
-              <a:t>技術選型</a:t>
-            </a:r>
-          </a:p>
-        </p:txBody>
-      </p:sp>
-      <p:sp>
-        <p:nvSpPr>
-          <p:cNvPr id="3" name="Rectangle 2"/>
+              <a:t>期末計畫</a:t>
+            </a:r>
+          </a:p>
+        </p:txBody>
+      </p:sp>
+      <p:sp>
+        <p:nvSpPr>
+          <p:cNvPr id="3" name="Content Placeholder 2"/>
+          <p:cNvSpPr>
+            <a:spLocks noGrp="1"/>
+          </p:cNvSpPr>
+          <p:nvPr>
+            <p:ph idx="1"/>
+          </p:nvPr>
+        </p:nvSpPr>
+        <p:spPr/>
+        <p:txBody>
+          <a:bodyPr/>
+          <a:lstStyle/>
+          <a:p>
+            <a:endParaRPr/>
+          </a:p>
+        </p:txBody>
+      </p:sp>
+      <p:sp>
+        <p:nvSpPr>
+          <p:cNvPr id="4" name="Rectangle 3"/>
           <p:cNvSpPr/>
           <p:nvPr/>
         </p:nvSpPr>
         <p:spPr>
           <a:xfrm>
             <a:off x="0" y="0"/>
-            <a:ext cx="12188952" cy="502920"/>
+            <a:ext cx="9144000" cy="45719"/>
           </a:xfrm>
           <a:prstGeom prst="rect">
             <a:avLst/>
@@ -4519,19 +4686,20 @@
           <a:lstStyle/>
           <a:p>
             <a:pPr algn="ctr"/>
-          </a:p>
-        </p:txBody>
-      </p:sp>
-      <p:sp>
-        <p:nvSpPr>
-          <p:cNvPr id="4" name="Rectangle 3"/>
+            <a:endParaRPr/>
+          </a:p>
+        </p:txBody>
+      </p:sp>
+      <p:sp>
+        <p:nvSpPr>
+          <p:cNvPr id="5" name="Rectangle 4"/>
           <p:cNvSpPr/>
           <p:nvPr/>
         </p:nvSpPr>
         <p:spPr>
           <a:xfrm>
             <a:off x="0" y="429768"/>
-            <a:ext cx="12188952" cy="73152"/>
+            <a:ext cx="9144000" cy="45719"/>
           </a:xfrm>
           <a:prstGeom prst="rect">
             <a:avLst/>
@@ -4562,12 +4730,13 @@
           <a:lstStyle/>
           <a:p>
             <a:pPr algn="ctr"/>
-          </a:p>
-        </p:txBody>
-      </p:sp>
-      <p:sp>
-        <p:nvSpPr>
-          <p:cNvPr id="5" name="Rectangle 4"/>
+            <a:endParaRPr/>
+          </a:p>
+        </p:txBody>
+      </p:sp>
+      <p:sp>
+        <p:nvSpPr>
+          <p:cNvPr id="6" name="Rectangle 5"/>
           <p:cNvSpPr/>
           <p:nvPr/>
         </p:nvSpPr>
@@ -4605,12 +4774,13 @@
           <a:lstStyle/>
           <a:p>
             <a:pPr algn="ctr"/>
-          </a:p>
-        </p:txBody>
-      </p:sp>
-      <p:sp>
-        <p:nvSpPr>
-          <p:cNvPr id="6" name="TextBox 5"/>
+            <a:endParaRPr/>
+          </a:p>
+        </p:txBody>
+      </p:sp>
+      <p:sp>
+        <p:nvSpPr>
+          <p:cNvPr id="7" name="TextBox 6"/>
           <p:cNvSpPr txBox="1"/>
           <p:nvPr/>
         </p:nvSpPr>
@@ -4639,20 +4809,20 @@
               </a:defRPr>
             </a:pPr>
             <a:r>
-              <a:t>技術選型</a:t>
-            </a:r>
-          </a:p>
-        </p:txBody>
-      </p:sp>
-      <p:sp>
-        <p:nvSpPr>
-          <p:cNvPr id="7" name="TextBox 6"/>
+              <a:t>期末計畫</a:t>
+            </a:r>
+          </a:p>
+        </p:txBody>
+      </p:sp>
+      <p:sp>
+        <p:nvSpPr>
+          <p:cNvPr id="8" name="TextBox 7"/>
           <p:cNvSpPr txBox="1"/>
           <p:nvPr/>
         </p:nvSpPr>
         <p:spPr>
           <a:xfrm>
-            <a:off x="9326880" y="73152"/>
+            <a:off x="6675120" y="64008"/>
             <a:ext cx="2377440" cy="274320"/>
           </a:xfrm>
           <a:prstGeom prst="rect">
@@ -4682,14 +4852,14 @@
       </p:sp>
       <p:sp>
         <p:nvSpPr>
-          <p:cNvPr id="8" name="Rounded Rectangle 7"/>
+          <p:cNvPr id="9" name="Rounded Rectangle 8"/>
           <p:cNvSpPr/>
           <p:nvPr/>
         </p:nvSpPr>
         <p:spPr>
           <a:xfrm>
-            <a:off x="640080" y="1600200"/>
-            <a:ext cx="5440680" cy="4480560"/>
+            <a:off x="685800" y="1554480"/>
+            <a:ext cx="7651955" cy="4525963"/>
           </a:xfrm>
           <a:prstGeom prst="roundRect">
             <a:avLst/>
@@ -4722,51 +4892,7 @@
           <a:lstStyle/>
           <a:p>
             <a:pPr algn="ctr"/>
-          </a:p>
-        </p:txBody>
-      </p:sp>
-      <p:sp>
-        <p:nvSpPr>
-          <p:cNvPr id="9" name="Rounded Rectangle 8"/>
-          <p:cNvSpPr/>
-          <p:nvPr/>
-        </p:nvSpPr>
-        <p:spPr>
-          <a:xfrm>
-            <a:off x="6144768" y="1600200"/>
-            <a:ext cx="5440680" cy="4480560"/>
-          </a:xfrm>
-          <a:prstGeom prst="roundRect">
-            <a:avLst/>
-          </a:prstGeom>
-          <a:solidFill>
-            <a:srgbClr val="0D223D"/>
-          </a:solidFill>
-          <a:ln w="12700">
-            <a:solidFill>
-              <a:srgbClr val="79F0C6"/>
-            </a:solidFill>
-          </a:ln>
-        </p:spPr>
-        <p:style>
-          <a:lnRef idx="1">
-            <a:schemeClr val="accent1"/>
-          </a:lnRef>
-          <a:fillRef idx="3">
-            <a:schemeClr val="accent1"/>
-          </a:fillRef>
-          <a:effectRef idx="2">
-            <a:schemeClr val="accent1"/>
-          </a:effectRef>
-          <a:fontRef idx="minor">
-            <a:schemeClr val="lt1"/>
-          </a:fontRef>
-        </p:style>
-        <p:txBody>
-          <a:bodyPr rtlCol="0" anchor="ctr"/>
-          <a:lstStyle/>
-          <a:p>
-            <a:pPr algn="ctr"/>
+            <a:endParaRPr/>
           </a:p>
         </p:txBody>
       </p:sp>
@@ -4778,8 +4904,83 @@
         </p:nvSpPr>
         <p:spPr>
           <a:xfrm>
-            <a:off x="548640" y="1371600"/>
-            <a:ext cx="5303520" cy="4846320"/>
+            <a:off x="960120" y="1828800"/>
+            <a:ext cx="9580061" cy="1200329"/>
+          </a:xfrm>
+          <a:prstGeom prst="rect">
+            <a:avLst/>
+          </a:prstGeom>
+          <a:noFill/>
+        </p:spPr>
+        <p:txBody>
+          <a:bodyPr wrap="square">
+            <a:spAutoFit/>
+          </a:bodyPr>
+          <a:lstStyle/>
+          <a:p>
+            <a:pPr>
+              <a:defRPr sz="1800">
+                <a:solidFill>
+                  <a:srgbClr val="ECF4FF"/>
+                </a:solidFill>
+                <a:latin typeface="Noto Sans TC"/>
+              </a:defRPr>
+            </a:pPr>
+            <a:r>
+              <a:t>• 補齊 22 節點 NotebookLM 摘要 / 影片 / 來源</a:t>
+            </a:r>
+          </a:p>
+          <a:p>
+            <a:pPr>
+              <a:defRPr sz="1800">
+                <a:solidFill>
+                  <a:srgbClr val="ECF4FF"/>
+                </a:solidFill>
+                <a:latin typeface="Noto Sans TC"/>
+              </a:defRPr>
+            </a:pPr>
+            <a:r>
+              <a:t>• 完成 RWD 細節與手機互動優化</a:t>
+            </a:r>
+          </a:p>
+          <a:p>
+            <a:pPr>
+              <a:defRPr sz="1800">
+                <a:solidFill>
+                  <a:srgbClr val="ECF4FF"/>
+                </a:solidFill>
+                <a:latin typeface="Noto Sans TC"/>
+              </a:defRPr>
+            </a:pPr>
+            <a:r>
+              <a:t>• 加入搜尋與學習路徑導覽功能</a:t>
+            </a:r>
+          </a:p>
+          <a:p>
+            <a:pPr>
+              <a:defRPr sz="1800">
+                <a:solidFill>
+                  <a:srgbClr val="ECF4FF"/>
+                </a:solidFill>
+                <a:latin typeface="Noto Sans TC"/>
+              </a:defRPr>
+            </a:pPr>
+            <a:r>
+              <a:t>• 進行使用者測試與修正迭代</a:t>
+            </a:r>
+          </a:p>
+        </p:txBody>
+      </p:sp>
+      <p:sp>
+        <p:nvSpPr>
+          <p:cNvPr id="11" name="TextBox 10"/>
+          <p:cNvSpPr txBox="1"/>
+          <p:nvPr/>
+        </p:nvSpPr>
+        <p:spPr>
+          <a:xfrm>
+            <a:off x="11155680" y="6473952"/>
+            <a:ext cx="731520" cy="219456"/>
           </a:xfrm>
           <a:prstGeom prst="rect">
             <a:avLst/>
@@ -4792,156 +4993,6 @@
           </a:bodyPr>
           <a:lstStyle/>
           <a:p>
-            <a:pPr>
-              <a:defRPr b="1" sz="2400">
-                <a:solidFill>
-                  <a:srgbClr val="79F0C6"/>
-                </a:solidFill>
-                <a:latin typeface="Noto Sans TC"/>
-              </a:defRPr>
-            </a:pPr>
-            <a:r>
-              <a:t>前端與部署</a:t>
-            </a:r>
-          </a:p>
-          <a:p>
-            <a:pPr>
-              <a:defRPr sz="1700">
-                <a:solidFill>
-                  <a:srgbClr val="ECF4FF"/>
-                </a:solidFill>
-                <a:latin typeface="Noto Sans TC"/>
-              </a:defRPr>
-            </a:pPr>
-            <a:r>
-              <a:t>• HTML / CSS / JavaScript</a:t>
-            </a:r>
-          </a:p>
-          <a:p>
-            <a:pPr>
-              <a:defRPr sz="1700">
-                <a:solidFill>
-                  <a:srgbClr val="ECF4FF"/>
-                </a:solidFill>
-                <a:latin typeface="Noto Sans TC"/>
-              </a:defRPr>
-            </a:pPr>
-            <a:r>
-              <a:t>• SVG 地圖互動</a:t>
-            </a:r>
-          </a:p>
-          <a:p>
-            <a:pPr>
-              <a:defRPr sz="1700">
-                <a:solidFill>
-                  <a:srgbClr val="ECF4FF"/>
-                </a:solidFill>
-                <a:latin typeface="Noto Sans TC"/>
-              </a:defRPr>
-            </a:pPr>
-            <a:r>
-              <a:t>• GitHub Pages 靜態部署</a:t>
-            </a:r>
-          </a:p>
-        </p:txBody>
-      </p:sp>
-      <p:sp>
-        <p:nvSpPr>
-          <p:cNvPr id="11" name="TextBox 10"/>
-          <p:cNvSpPr txBox="1"/>
-          <p:nvPr/>
-        </p:nvSpPr>
-        <p:spPr>
-          <a:xfrm>
-            <a:off x="6217920" y="1371600"/>
-            <a:ext cx="5303520" cy="4846320"/>
-          </a:xfrm>
-          <a:prstGeom prst="rect">
-            <a:avLst/>
-          </a:prstGeom>
-          <a:noFill/>
-        </p:spPr>
-        <p:txBody>
-          <a:bodyPr wrap="none">
-            <a:spAutoFit/>
-          </a:bodyPr>
-          <a:lstStyle/>
-          <a:p>
-            <a:pPr>
-              <a:defRPr b="1" sz="2400">
-                <a:solidFill>
-                  <a:srgbClr val="79F0C6"/>
-                </a:solidFill>
-                <a:latin typeface="Noto Sans TC"/>
-              </a:defRPr>
-            </a:pPr>
-            <a:r>
-              <a:t>內容系統</a:t>
-            </a:r>
-          </a:p>
-          <a:p>
-            <a:pPr>
-              <a:defRPr sz="1700">
-                <a:solidFill>
-                  <a:srgbClr val="ECF4FF"/>
-                </a:solidFill>
-                <a:latin typeface="Noto Sans TC"/>
-              </a:defRPr>
-            </a:pPr>
-            <a:r>
-              <a:t>• NotebookLM 作為內容後台</a:t>
-            </a:r>
-          </a:p>
-          <a:p>
-            <a:pPr>
-              <a:defRPr sz="1700">
-                <a:solidFill>
-                  <a:srgbClr val="ECF4FF"/>
-                </a:solidFill>
-                <a:latin typeface="Noto Sans TC"/>
-              </a:defRPr>
-            </a:pPr>
-            <a:r>
-              <a:t>• 匯出 JSON 半自動同步</a:t>
-            </a:r>
-          </a:p>
-          <a:p>
-            <a:pPr>
-              <a:defRPr sz="1700">
-                <a:solidFill>
-                  <a:srgbClr val="ECF4FF"/>
-                </a:solidFill>
-                <a:latin typeface="Noto Sans TC"/>
-              </a:defRPr>
-            </a:pPr>
-            <a:r>
-              <a:t>• 節點結構與內容層分離</a:t>
-            </a:r>
-          </a:p>
-        </p:txBody>
-      </p:sp>
-      <p:sp>
-        <p:nvSpPr>
-          <p:cNvPr id="12" name="TextBox 11"/>
-          <p:cNvSpPr txBox="1"/>
-          <p:nvPr/>
-        </p:nvSpPr>
-        <p:spPr>
-          <a:xfrm>
-            <a:off x="11155680" y="6473952"/>
-            <a:ext cx="731520" cy="219456"/>
-          </a:xfrm>
-          <a:prstGeom prst="rect">
-            <a:avLst/>
-          </a:prstGeom>
-          <a:noFill/>
-        </p:spPr>
-        <p:txBody>
-          <a:bodyPr wrap="none">
-            <a:spAutoFit/>
-          </a:bodyPr>
-          <a:lstStyle/>
-          <a:p>
             <a:pPr algn="r">
               <a:defRPr sz="1000">
                 <a:solidFill>
@@ -4951,7 +5002,7 @@
               </a:defRPr>
             </a:pPr>
             <a:r>
-              <a:t>12</a:t>
+              <a:t>14</a:t>
             </a:r>
           </a:p>
         </p:txBody>
@@ -4965,7 +5016,7 @@
 </file>
 
 <file path=ppt/slides/slide13.xml><?xml version="1.0" encoding="utf-8"?>
-<p:sld xmlns:a="http://schemas.openxmlformats.org/drawingml/2006/main" xmlns:p="http://schemas.openxmlformats.org/presentationml/2006/main" xmlns:r="http://schemas.openxmlformats.org/officeDocument/2006/relationships">
+<p:sld xmlns:a="http://schemas.openxmlformats.org/drawingml/2006/main" xmlns:r="http://schemas.openxmlformats.org/officeDocument/2006/relationships" xmlns:p="http://schemas.openxmlformats.org/presentationml/2006/main">
   <p:cSld>
     <p:bg>
       <p:bgPr>
@@ -4981,7 +5032,14 @@
         <p:cNvGrpSpPr/>
         <p:nvPr/>
       </p:nvGrpSpPr>
-      <p:grpSpPr/>
+      <p:grpSpPr>
+        <a:xfrm>
+          <a:off x="0" y="0"/>
+          <a:ext cx="0" cy="0"/>
+          <a:chOff x="0" y="0"/>
+          <a:chExt cx="0" cy="0"/>
+        </a:xfrm>
+      </p:grpSpPr>
       <p:sp>
         <p:nvSpPr>
           <p:cNvPr id="2" name="Title 1"/>
@@ -5004,7 +5062,7 @@
                 </a:solidFill>
                 <a:latin typeface="Space Grotesk"/>
               </a:rPr>
-              <a:t>期中完成清單</a:t>
+              <a:t>反思與挑戰</a:t>
             </a:r>
           </a:p>
         </p:txBody>
@@ -5023,7 +5081,9 @@
         <p:txBody>
           <a:bodyPr/>
           <a:lstStyle/>
-          <a:p/>
+          <a:p>
+            <a:endParaRPr/>
+          </a:p>
         </p:txBody>
       </p:sp>
       <p:sp>
@@ -5033,9 +5093,9 @@
           <p:nvPr/>
         </p:nvSpPr>
         <p:spPr>
-          <a:xfrm>
-            <a:off x="0" y="0"/>
-            <a:ext cx="12188952" cy="502920"/>
+          <a:xfrm flipV="1">
+            <a:off x="0" y="-251460"/>
+            <a:ext cx="9144000" cy="251460"/>
           </a:xfrm>
           <a:prstGeom prst="rect">
             <a:avLst/>
@@ -5066,6 +5126,7 @@
           <a:lstStyle/>
           <a:p>
             <a:pPr algn="ctr"/>
+            <a:endParaRPr/>
           </a:p>
         </p:txBody>
       </p:sp>
@@ -5076,9 +5137,9 @@
           <p:nvPr/>
         </p:nvSpPr>
         <p:spPr>
-          <a:xfrm>
-            <a:off x="0" y="429768"/>
-            <a:ext cx="12188952" cy="73152"/>
+          <a:xfrm flipV="1">
+            <a:off x="0" y="384049"/>
+            <a:ext cx="9144000" cy="45719"/>
           </a:xfrm>
           <a:prstGeom prst="rect">
             <a:avLst/>
@@ -5109,6 +5170,7 @@
           <a:lstStyle/>
           <a:p>
             <a:pPr algn="ctr"/>
+            <a:endParaRPr/>
           </a:p>
         </p:txBody>
       </p:sp>
@@ -5152,6 +5214,7 @@
           <a:lstStyle/>
           <a:p>
             <a:pPr algn="ctr"/>
+            <a:endParaRPr/>
           </a:p>
         </p:txBody>
       </p:sp>
@@ -5186,7 +5249,7 @@
               </a:defRPr>
             </a:pPr>
             <a:r>
-              <a:t>期中完成清單</a:t>
+              <a:t>反思與挑戰</a:t>
             </a:r>
           </a:p>
         </p:txBody>
@@ -5199,7 +5262,7 @@
         </p:nvSpPr>
         <p:spPr>
           <a:xfrm>
-            <a:off x="9326880" y="73152"/>
+            <a:off x="6377940" y="64326"/>
             <a:ext cx="2377440" cy="274320"/>
           </a:xfrm>
           <a:prstGeom prst="rect">
@@ -5222,6 +5285,7 @@
               </a:defRPr>
             </a:pPr>
             <a:r>
+              <a:rPr dirty="0"/>
               <a:t>AI Explorer</a:t>
             </a:r>
           </a:p>
@@ -5235,8 +5299,8 @@
         </p:nvSpPr>
         <p:spPr>
           <a:xfrm>
-            <a:off x="685800" y="1554480"/>
-            <a:ext cx="10881360" cy="4526280"/>
+            <a:off x="685800" y="1600200"/>
+            <a:ext cx="7863840" cy="4525963"/>
           </a:xfrm>
           <a:prstGeom prst="roundRect">
             <a:avLst/>
@@ -5269,6 +5333,7 @@
           <a:lstStyle/>
           <a:p>
             <a:pPr algn="ctr"/>
+            <a:endParaRPr/>
           </a:p>
         </p:txBody>
       </p:sp>
@@ -5281,7 +5346,82 @@
         <p:spPr>
           <a:xfrm>
             <a:off x="960120" y="1828800"/>
-            <a:ext cx="10241280" cy="4023360"/>
+            <a:ext cx="7338306" cy="1200329"/>
+          </a:xfrm>
+          <a:prstGeom prst="rect">
+            <a:avLst/>
+          </a:prstGeom>
+          <a:noFill/>
+        </p:spPr>
+        <p:txBody>
+          <a:bodyPr wrap="square">
+            <a:spAutoFit/>
+          </a:bodyPr>
+          <a:lstStyle/>
+          <a:p>
+            <a:pPr>
+              <a:defRPr sz="1800">
+                <a:solidFill>
+                  <a:srgbClr val="ECF4FF"/>
+                </a:solidFill>
+                <a:latin typeface="Noto Sans TC"/>
+              </a:defRPr>
+            </a:pPr>
+            <a:r>
+              <a:t>• 如何在白話與準確性間取得平衡</a:t>
+            </a:r>
+          </a:p>
+          <a:p>
+            <a:pPr>
+              <a:defRPr sz="1800">
+                <a:solidFill>
+                  <a:srgbClr val="ECF4FF"/>
+                </a:solidFill>
+                <a:latin typeface="Noto Sans TC"/>
+              </a:defRPr>
+            </a:pPr>
+            <a:r>
+              <a:t>• 如何維持多來源內容的一致更新</a:t>
+            </a:r>
+          </a:p>
+          <a:p>
+            <a:pPr>
+              <a:defRPr sz="1800">
+                <a:solidFill>
+                  <a:srgbClr val="ECF4FF"/>
+                </a:solidFill>
+                <a:latin typeface="Noto Sans TC"/>
+              </a:defRPr>
+            </a:pPr>
+            <a:r>
+              <a:t>• 如何提升地圖互動流暢度與可讀性</a:t>
+            </a:r>
+          </a:p>
+          <a:p>
+            <a:pPr>
+              <a:defRPr sz="1800">
+                <a:solidFill>
+                  <a:srgbClr val="ECF4FF"/>
+                </a:solidFill>
+                <a:latin typeface="Noto Sans TC"/>
+              </a:defRPr>
+            </a:pPr>
+            <a:r>
+              <a:t>• 下一步：建立固定同步與檢查流程</a:t>
+            </a:r>
+          </a:p>
+        </p:txBody>
+      </p:sp>
+      <p:sp>
+        <p:nvSpPr>
+          <p:cNvPr id="11" name="TextBox 10"/>
+          <p:cNvSpPr txBox="1"/>
+          <p:nvPr/>
+        </p:nvSpPr>
+        <p:spPr>
+          <a:xfrm>
+            <a:off x="11155680" y="6473952"/>
+            <a:ext cx="731520" cy="219456"/>
           </a:xfrm>
           <a:prstGeom prst="rect">
             <a:avLst/>
@@ -5294,81 +5434,6 @@
           </a:bodyPr>
           <a:lstStyle/>
           <a:p>
-            <a:pPr>
-              <a:defRPr sz="1800">
-                <a:solidFill>
-                  <a:srgbClr val="ECF4FF"/>
-                </a:solidFill>
-                <a:latin typeface="Noto Sans TC"/>
-              </a:defRPr>
-            </a:pPr>
-            <a:r>
-              <a:t>• 完成四頁網站：Home / Map / Topics / About</a:t>
-            </a:r>
-          </a:p>
-          <a:p>
-            <a:pPr>
-              <a:defRPr sz="1800">
-                <a:solidFill>
-                  <a:srgbClr val="ECF4FF"/>
-                </a:solidFill>
-                <a:latin typeface="Noto Sans TC"/>
-              </a:defRPr>
-            </a:pPr>
-            <a:r>
-              <a:t>• 完成 22 節點資料與地圖互動邏輯</a:t>
-            </a:r>
-          </a:p>
-          <a:p>
-            <a:pPr>
-              <a:defRPr sz="1800">
-                <a:solidFill>
-                  <a:srgbClr val="ECF4FF"/>
-                </a:solidFill>
-                <a:latin typeface="Noto Sans TC"/>
-              </a:defRPr>
-            </a:pPr>
-            <a:r>
-              <a:t>• 完成年代篩選、縮放拖曳、測驗互動</a:t>
-            </a:r>
-          </a:p>
-          <a:p>
-            <a:pPr>
-              <a:defRPr sz="1800">
-                <a:solidFill>
-                  <a:srgbClr val="ECF4FF"/>
-                </a:solidFill>
-                <a:latin typeface="Noto Sans TC"/>
-              </a:defRPr>
-            </a:pPr>
-            <a:r>
-              <a:t>• 完成 NotebookLM 內容層整合架構</a:t>
-            </a:r>
-          </a:p>
-        </p:txBody>
-      </p:sp>
-      <p:sp>
-        <p:nvSpPr>
-          <p:cNvPr id="11" name="TextBox 10"/>
-          <p:cNvSpPr txBox="1"/>
-          <p:nvPr/>
-        </p:nvSpPr>
-        <p:spPr>
-          <a:xfrm>
-            <a:off x="11155680" y="6473952"/>
-            <a:ext cx="731520" cy="219456"/>
-          </a:xfrm>
-          <a:prstGeom prst="rect">
-            <a:avLst/>
-          </a:prstGeom>
-          <a:noFill/>
-        </p:spPr>
-        <p:txBody>
-          <a:bodyPr wrap="none">
-            <a:spAutoFit/>
-          </a:bodyPr>
-          <a:lstStyle/>
-          <a:p>
             <a:pPr algn="r">
               <a:defRPr sz="1000">
                 <a:solidFill>
@@ -5378,7 +5443,7 @@
               </a:defRPr>
             </a:pPr>
             <a:r>
-              <a:t>13</a:t>
+              <a:t>15</a:t>
             </a:r>
           </a:p>
         </p:txBody>
@@ -5392,7 +5457,7 @@
 </file>
 
 <file path=ppt/slides/slide14.xml><?xml version="1.0" encoding="utf-8"?>
-<p:sld xmlns:a="http://schemas.openxmlformats.org/drawingml/2006/main" xmlns:p="http://schemas.openxmlformats.org/presentationml/2006/main" xmlns:r="http://schemas.openxmlformats.org/officeDocument/2006/relationships">
+<p:sld xmlns:a="http://schemas.openxmlformats.org/drawingml/2006/main" xmlns:r="http://schemas.openxmlformats.org/officeDocument/2006/relationships" xmlns:p="http://schemas.openxmlformats.org/presentationml/2006/main">
   <p:cSld>
     <p:bg>
       <p:bgPr>
@@ -5408,7 +5473,14 @@
         <p:cNvGrpSpPr/>
         <p:nvPr/>
       </p:nvGrpSpPr>
-      <p:grpSpPr/>
+      <p:grpSpPr>
+        <a:xfrm>
+          <a:off x="0" y="0"/>
+          <a:ext cx="0" cy="0"/>
+          <a:chOff x="0" y="0"/>
+          <a:chExt cx="0" cy="0"/>
+        </a:xfrm>
+      </p:grpSpPr>
       <p:sp>
         <p:nvSpPr>
           <p:cNvPr id="2" name="Title 1"/>
@@ -5431,7 +5503,7 @@
                 </a:solidFill>
                 <a:latin typeface="Space Grotesk"/>
               </a:rPr>
-              <a:t>期末計畫</a:t>
+              <a:t>Q&amp;A</a:t>
             </a:r>
           </a:p>
         </p:txBody>
@@ -5450,7 +5522,9 @@
         <p:txBody>
           <a:bodyPr/>
           <a:lstStyle/>
-          <a:p/>
+          <a:p>
+            <a:endParaRPr/>
+          </a:p>
         </p:txBody>
       </p:sp>
       <p:sp>
@@ -5461,8 +5535,8 @@
         </p:nvSpPr>
         <p:spPr>
           <a:xfrm>
-            <a:off x="0" y="0"/>
-            <a:ext cx="12188952" cy="502920"/>
+            <a:off x="0" y="-1"/>
+            <a:ext cx="9144000" cy="580103"/>
           </a:xfrm>
           <a:prstGeom prst="rect">
             <a:avLst/>
@@ -5493,6 +5567,7 @@
           <a:lstStyle/>
           <a:p>
             <a:pPr algn="ctr"/>
+            <a:endParaRPr/>
           </a:p>
         </p:txBody>
       </p:sp>
@@ -5504,8 +5579,8 @@
         </p:nvSpPr>
         <p:spPr>
           <a:xfrm>
-            <a:off x="0" y="429768"/>
-            <a:ext cx="12188952" cy="73152"/>
+            <a:off x="0" y="429767"/>
+            <a:ext cx="9144000" cy="84379"/>
           </a:xfrm>
           <a:prstGeom prst="rect">
             <a:avLst/>
@@ -5536,6 +5611,7 @@
           <a:lstStyle/>
           <a:p>
             <a:pPr algn="ctr"/>
+            <a:endParaRPr/>
           </a:p>
         </p:txBody>
       </p:sp>
@@ -5579,6 +5655,7 @@
           <a:lstStyle/>
           <a:p>
             <a:pPr algn="ctr"/>
+            <a:endParaRPr/>
           </a:p>
         </p:txBody>
       </p:sp>
@@ -5613,7 +5690,7 @@
               </a:defRPr>
             </a:pPr>
             <a:r>
-              <a:t>期末計畫</a:t>
+              <a:t>Q&amp;A</a:t>
             </a:r>
           </a:p>
         </p:txBody>
@@ -5626,7 +5703,7 @@
         </p:nvSpPr>
         <p:spPr>
           <a:xfrm>
-            <a:off x="9326880" y="73152"/>
+            <a:off x="6309360" y="83985"/>
             <a:ext cx="2377440" cy="274320"/>
           </a:xfrm>
           <a:prstGeom prst="rect">
@@ -5649,6 +5726,7 @@
               </a:defRPr>
             </a:pPr>
             <a:r>
+              <a:rPr dirty="0"/>
               <a:t>AI Explorer</a:t>
             </a:r>
           </a:p>
@@ -5662,8 +5740,8 @@
         </p:nvSpPr>
         <p:spPr>
           <a:xfrm>
-            <a:off x="685800" y="1554480"/>
-            <a:ext cx="10881360" cy="4526280"/>
+            <a:off x="685800" y="1619124"/>
+            <a:ext cx="7760110" cy="4571683"/>
           </a:xfrm>
           <a:prstGeom prst="roundRect">
             <a:avLst/>
@@ -5696,6 +5774,7 @@
           <a:lstStyle/>
           <a:p>
             <a:pPr algn="ctr"/>
+            <a:endParaRPr/>
           </a:p>
         </p:txBody>
       </p:sp>
@@ -5708,7 +5787,69 @@
         <p:spPr>
           <a:xfrm>
             <a:off x="960120" y="1828800"/>
-            <a:ext cx="10241280" cy="4023360"/>
+            <a:ext cx="7760110" cy="923330"/>
+          </a:xfrm>
+          <a:prstGeom prst="rect">
+            <a:avLst/>
+          </a:prstGeom>
+          <a:noFill/>
+        </p:spPr>
+        <p:txBody>
+          <a:bodyPr wrap="square">
+            <a:spAutoFit/>
+          </a:bodyPr>
+          <a:lstStyle/>
+          <a:p>
+            <a:pPr>
+              <a:defRPr sz="1800">
+                <a:solidFill>
+                  <a:srgbClr val="ECF4FF"/>
+                </a:solidFill>
+                <a:latin typeface="Noto Sans TC"/>
+              </a:defRPr>
+            </a:pPr>
+            <a:r>
+              <a:t>• 感謝聆聽</a:t>
+            </a:r>
+          </a:p>
+          <a:p>
+            <a:pPr>
+              <a:defRPr sz="1800">
+                <a:solidFill>
+                  <a:srgbClr val="ECF4FF"/>
+                </a:solidFill>
+                <a:latin typeface="Noto Sans TC"/>
+              </a:defRPr>
+            </a:pPr>
+            <a:r>
+              <a:t>• 歡迎提問與建議</a:t>
+            </a:r>
+          </a:p>
+          <a:p>
+            <a:pPr>
+              <a:defRPr sz="1800">
+                <a:solidFill>
+                  <a:srgbClr val="ECF4FF"/>
+                </a:solidFill>
+                <a:latin typeface="Noto Sans TC"/>
+              </a:defRPr>
+            </a:pPr>
+            <a:r>
+              <a:t>• AI Explorer 將持續迭代為更完整的學習平台</a:t>
+            </a:r>
+          </a:p>
+        </p:txBody>
+      </p:sp>
+      <p:sp>
+        <p:nvSpPr>
+          <p:cNvPr id="11" name="TextBox 10"/>
+          <p:cNvSpPr txBox="1"/>
+          <p:nvPr/>
+        </p:nvSpPr>
+        <p:spPr>
+          <a:xfrm>
+            <a:off x="11155680" y="6473952"/>
+            <a:ext cx="731520" cy="219456"/>
           </a:xfrm>
           <a:prstGeom prst="rect">
             <a:avLst/>
@@ -5721,81 +5862,6 @@
           </a:bodyPr>
           <a:lstStyle/>
           <a:p>
-            <a:pPr>
-              <a:defRPr sz="1800">
-                <a:solidFill>
-                  <a:srgbClr val="ECF4FF"/>
-                </a:solidFill>
-                <a:latin typeface="Noto Sans TC"/>
-              </a:defRPr>
-            </a:pPr>
-            <a:r>
-              <a:t>• 補齊 22 節點 NotebookLM 摘要 / 影片 / 來源</a:t>
-            </a:r>
-          </a:p>
-          <a:p>
-            <a:pPr>
-              <a:defRPr sz="1800">
-                <a:solidFill>
-                  <a:srgbClr val="ECF4FF"/>
-                </a:solidFill>
-                <a:latin typeface="Noto Sans TC"/>
-              </a:defRPr>
-            </a:pPr>
-            <a:r>
-              <a:t>• 完成 RWD 細節與手機互動優化</a:t>
-            </a:r>
-          </a:p>
-          <a:p>
-            <a:pPr>
-              <a:defRPr sz="1800">
-                <a:solidFill>
-                  <a:srgbClr val="ECF4FF"/>
-                </a:solidFill>
-                <a:latin typeface="Noto Sans TC"/>
-              </a:defRPr>
-            </a:pPr>
-            <a:r>
-              <a:t>• 加入搜尋與學習路徑導覽功能</a:t>
-            </a:r>
-          </a:p>
-          <a:p>
-            <a:pPr>
-              <a:defRPr sz="1800">
-                <a:solidFill>
-                  <a:srgbClr val="ECF4FF"/>
-                </a:solidFill>
-                <a:latin typeface="Noto Sans TC"/>
-              </a:defRPr>
-            </a:pPr>
-            <a:r>
-              <a:t>• 進行使用者測試與修正迭代</a:t>
-            </a:r>
-          </a:p>
-        </p:txBody>
-      </p:sp>
-      <p:sp>
-        <p:nvSpPr>
-          <p:cNvPr id="11" name="TextBox 10"/>
-          <p:cNvSpPr txBox="1"/>
-          <p:nvPr/>
-        </p:nvSpPr>
-        <p:spPr>
-          <a:xfrm>
-            <a:off x="11155680" y="6473952"/>
-            <a:ext cx="731520" cy="219456"/>
-          </a:xfrm>
-          <a:prstGeom prst="rect">
-            <a:avLst/>
-          </a:prstGeom>
-          <a:noFill/>
-        </p:spPr>
-        <p:txBody>
-          <a:bodyPr wrap="none">
-            <a:spAutoFit/>
-          </a:bodyPr>
-          <a:lstStyle/>
-          <a:p>
             <a:pPr algn="r">
               <a:defRPr sz="1000">
                 <a:solidFill>
@@ -5805,7 +5871,7 @@
               </a:defRPr>
             </a:pPr>
             <a:r>
-              <a:t>14</a:t>
+              <a:t>16</a:t>
             </a:r>
           </a:p>
         </p:txBody>
@@ -5818,8 +5884,8 @@
 </p:sld>
 </file>
 
-<file path=ppt/slides/slide15.xml><?xml version="1.0" encoding="utf-8"?>
-<p:sld xmlns:a="http://schemas.openxmlformats.org/drawingml/2006/main" xmlns:p="http://schemas.openxmlformats.org/presentationml/2006/main" xmlns:r="http://schemas.openxmlformats.org/officeDocument/2006/relationships">
+<file path=ppt/slides/slide2.xml><?xml version="1.0" encoding="utf-8"?>
+<p:sld xmlns:a="http://schemas.openxmlformats.org/drawingml/2006/main" xmlns:r="http://schemas.openxmlformats.org/officeDocument/2006/relationships" xmlns:p="http://schemas.openxmlformats.org/presentationml/2006/main">
   <p:cSld>
     <p:bg>
       <p:bgPr>
@@ -5835,7 +5901,14 @@
         <p:cNvGrpSpPr/>
         <p:nvPr/>
       </p:nvGrpSpPr>
-      <p:grpSpPr/>
+      <p:grpSpPr>
+        <a:xfrm>
+          <a:off x="0" y="0"/>
+          <a:ext cx="0" cy="0"/>
+          <a:chOff x="0" y="0"/>
+          <a:chExt cx="0" cy="0"/>
+        </a:xfrm>
+      </p:grpSpPr>
       <p:sp>
         <p:nvSpPr>
           <p:cNvPr id="2" name="Title 1"/>
@@ -5858,7 +5931,7 @@
                 </a:solidFill>
                 <a:latin typeface="Space Grotesk"/>
               </a:rPr>
-              <a:t>反思與挑戰</a:t>
+              <a:t>目錄</a:t>
             </a:r>
           </a:p>
         </p:txBody>
@@ -5873,11 +5946,18 @@
             <p:ph idx="1"/>
           </p:nvPr>
         </p:nvSpPr>
-        <p:spPr/>
+        <p:spPr>
+          <a:xfrm>
+            <a:off x="457200" y="1417638"/>
+            <a:ext cx="8229600" cy="4708525"/>
+          </a:xfrm>
+        </p:spPr>
         <p:txBody>
           <a:bodyPr/>
           <a:lstStyle/>
-          <a:p/>
+          <a:p>
+            <a:endParaRPr/>
+          </a:p>
         </p:txBody>
       </p:sp>
       <p:sp>
@@ -5889,7 +5969,7 @@
         <p:spPr>
           <a:xfrm>
             <a:off x="0" y="0"/>
-            <a:ext cx="12188952" cy="502920"/>
+            <a:ext cx="9144000" cy="502920"/>
           </a:xfrm>
           <a:prstGeom prst="rect">
             <a:avLst/>
@@ -5920,6 +6000,7 @@
           <a:lstStyle/>
           <a:p>
             <a:pPr algn="ctr"/>
+            <a:endParaRPr/>
           </a:p>
         </p:txBody>
       </p:sp>
@@ -5932,7 +6013,7 @@
         <p:spPr>
           <a:xfrm>
             <a:off x="0" y="429768"/>
-            <a:ext cx="12188952" cy="73152"/>
+            <a:ext cx="9144000" cy="73152"/>
           </a:xfrm>
           <a:prstGeom prst="rect">
             <a:avLst/>
@@ -5963,6 +6044,7 @@
           <a:lstStyle/>
           <a:p>
             <a:pPr algn="ctr"/>
+            <a:endParaRPr/>
           </a:p>
         </p:txBody>
       </p:sp>
@@ -6006,6 +6088,7 @@
           <a:lstStyle/>
           <a:p>
             <a:pPr algn="ctr"/>
+            <a:endParaRPr/>
           </a:p>
         </p:txBody>
       </p:sp>
@@ -6040,7 +6123,7 @@
               </a:defRPr>
             </a:pPr>
             <a:r>
-              <a:t>反思與挑戰</a:t>
+              <a:t>目錄</a:t>
             </a:r>
           </a:p>
         </p:txBody>
@@ -6053,7 +6136,7 @@
         </p:nvSpPr>
         <p:spPr>
           <a:xfrm>
-            <a:off x="9326880" y="73152"/>
+            <a:off x="6469380" y="73152"/>
             <a:ext cx="2377440" cy="274320"/>
           </a:xfrm>
           <a:prstGeom prst="rect">
@@ -6076,6 +6159,7 @@
               </a:defRPr>
             </a:pPr>
             <a:r>
+              <a:rPr dirty="0"/>
               <a:t>AI Explorer</a:t>
             </a:r>
           </a:p>
@@ -6090,7 +6174,7 @@
         <p:spPr>
           <a:xfrm>
             <a:off x="685800" y="1554480"/>
-            <a:ext cx="10881360" cy="4526280"/>
+            <a:ext cx="7760110" cy="4526280"/>
           </a:xfrm>
           <a:prstGeom prst="roundRect">
             <a:avLst/>
@@ -6123,6 +6207,7 @@
           <a:lstStyle/>
           <a:p>
             <a:pPr algn="ctr"/>
+            <a:endParaRPr/>
           </a:p>
         </p:txBody>
       </p:sp>
@@ -6134,8 +6219,96 @@
         </p:nvSpPr>
         <p:spPr>
           <a:xfrm>
-            <a:off x="960120" y="1828800"/>
-            <a:ext cx="10241280" cy="4023360"/>
+            <a:off x="960120" y="1828799"/>
+            <a:ext cx="7589520" cy="1477328"/>
+          </a:xfrm>
+          <a:prstGeom prst="rect">
+            <a:avLst/>
+          </a:prstGeom>
+          <a:noFill/>
+        </p:spPr>
+        <p:txBody>
+          <a:bodyPr wrap="square">
+            <a:spAutoFit/>
+          </a:bodyPr>
+          <a:lstStyle/>
+          <a:p>
+            <a:pPr>
+              <a:defRPr sz="1800">
+                <a:solidFill>
+                  <a:srgbClr val="ECF4FF"/>
+                </a:solidFill>
+                <a:latin typeface="Noto Sans TC"/>
+              </a:defRPr>
+            </a:pPr>
+            <a:r>
+              <a:t>• 1. 問題與解決方案</a:t>
+            </a:r>
+          </a:p>
+          <a:p>
+            <a:pPr>
+              <a:defRPr sz="1800">
+                <a:solidFill>
+                  <a:srgbClr val="ECF4FF"/>
+                </a:solidFill>
+                <a:latin typeface="Noto Sans TC"/>
+              </a:defRPr>
+            </a:pPr>
+            <a:r>
+              <a:t>• 2. 網站架構與地圖設計</a:t>
+            </a:r>
+          </a:p>
+          <a:p>
+            <a:pPr>
+              <a:defRPr sz="1800">
+                <a:solidFill>
+                  <a:srgbClr val="ECF4FF"/>
+                </a:solidFill>
+                <a:latin typeface="Noto Sans TC"/>
+              </a:defRPr>
+            </a:pPr>
+            <a:r>
+              <a:t>• 3. 節點 Demo 與技術選型</a:t>
+            </a:r>
+          </a:p>
+          <a:p>
+            <a:pPr>
+              <a:defRPr sz="1800">
+                <a:solidFill>
+                  <a:srgbClr val="ECF4FF"/>
+                </a:solidFill>
+                <a:latin typeface="Noto Sans TC"/>
+              </a:defRPr>
+            </a:pPr>
+            <a:r>
+              <a:t>• 4. 期中完成項目與期末規劃</a:t>
+            </a:r>
+          </a:p>
+          <a:p>
+            <a:pPr>
+              <a:defRPr sz="1800">
+                <a:solidFill>
+                  <a:srgbClr val="ECF4FF"/>
+                </a:solidFill>
+                <a:latin typeface="Noto Sans TC"/>
+              </a:defRPr>
+            </a:pPr>
+            <a:r>
+              <a:t>• 5. 反思與 Q&amp;A</a:t>
+            </a:r>
+          </a:p>
+        </p:txBody>
+      </p:sp>
+      <p:sp>
+        <p:nvSpPr>
+          <p:cNvPr id="11" name="TextBox 10"/>
+          <p:cNvSpPr txBox="1"/>
+          <p:nvPr/>
+        </p:nvSpPr>
+        <p:spPr>
+          <a:xfrm>
+            <a:off x="11155680" y="6473952"/>
+            <a:ext cx="731520" cy="219456"/>
           </a:xfrm>
           <a:prstGeom prst="rect">
             <a:avLst/>
@@ -6148,81 +6321,6 @@
           </a:bodyPr>
           <a:lstStyle/>
           <a:p>
-            <a:pPr>
-              <a:defRPr sz="1800">
-                <a:solidFill>
-                  <a:srgbClr val="ECF4FF"/>
-                </a:solidFill>
-                <a:latin typeface="Noto Sans TC"/>
-              </a:defRPr>
-            </a:pPr>
-            <a:r>
-              <a:t>• 如何在白話與準確性間取得平衡</a:t>
-            </a:r>
-          </a:p>
-          <a:p>
-            <a:pPr>
-              <a:defRPr sz="1800">
-                <a:solidFill>
-                  <a:srgbClr val="ECF4FF"/>
-                </a:solidFill>
-                <a:latin typeface="Noto Sans TC"/>
-              </a:defRPr>
-            </a:pPr>
-            <a:r>
-              <a:t>• 如何維持多來源內容的一致更新</a:t>
-            </a:r>
-          </a:p>
-          <a:p>
-            <a:pPr>
-              <a:defRPr sz="1800">
-                <a:solidFill>
-                  <a:srgbClr val="ECF4FF"/>
-                </a:solidFill>
-                <a:latin typeface="Noto Sans TC"/>
-              </a:defRPr>
-            </a:pPr>
-            <a:r>
-              <a:t>• 如何提升地圖互動流暢度與可讀性</a:t>
-            </a:r>
-          </a:p>
-          <a:p>
-            <a:pPr>
-              <a:defRPr sz="1800">
-                <a:solidFill>
-                  <a:srgbClr val="ECF4FF"/>
-                </a:solidFill>
-                <a:latin typeface="Noto Sans TC"/>
-              </a:defRPr>
-            </a:pPr>
-            <a:r>
-              <a:t>• 下一步：建立固定同步與檢查流程</a:t>
-            </a:r>
-          </a:p>
-        </p:txBody>
-      </p:sp>
-      <p:sp>
-        <p:nvSpPr>
-          <p:cNvPr id="11" name="TextBox 10"/>
-          <p:cNvSpPr txBox="1"/>
-          <p:nvPr/>
-        </p:nvSpPr>
-        <p:spPr>
-          <a:xfrm>
-            <a:off x="11155680" y="6473952"/>
-            <a:ext cx="731520" cy="219456"/>
-          </a:xfrm>
-          <a:prstGeom prst="rect">
-            <a:avLst/>
-          </a:prstGeom>
-          <a:noFill/>
-        </p:spPr>
-        <p:txBody>
-          <a:bodyPr wrap="none">
-            <a:spAutoFit/>
-          </a:bodyPr>
-          <a:lstStyle/>
-          <a:p>
             <a:pPr algn="r">
               <a:defRPr sz="1000">
                 <a:solidFill>
@@ -6232,7 +6330,7 @@
               </a:defRPr>
             </a:pPr>
             <a:r>
-              <a:t>15</a:t>
+              <a:t>2</a:t>
             </a:r>
           </a:p>
         </p:txBody>
@@ -6245,8 +6343,8 @@
 </p:sld>
 </file>
 
-<file path=ppt/slides/slide16.xml><?xml version="1.0" encoding="utf-8"?>
-<p:sld xmlns:a="http://schemas.openxmlformats.org/drawingml/2006/main" xmlns:p="http://schemas.openxmlformats.org/presentationml/2006/main" xmlns:r="http://schemas.openxmlformats.org/officeDocument/2006/relationships">
+<file path=ppt/slides/slide3.xml><?xml version="1.0" encoding="utf-8"?>
+<p:sld xmlns:a="http://schemas.openxmlformats.org/drawingml/2006/main" xmlns:r="http://schemas.openxmlformats.org/officeDocument/2006/relationships" xmlns:p="http://schemas.openxmlformats.org/presentationml/2006/main">
   <p:cSld>
     <p:bg>
       <p:bgPr>
@@ -6262,7 +6360,14 @@
         <p:cNvGrpSpPr/>
         <p:nvPr/>
       </p:nvGrpSpPr>
-      <p:grpSpPr/>
+      <p:grpSpPr>
+        <a:xfrm>
+          <a:off x="0" y="0"/>
+          <a:ext cx="0" cy="0"/>
+          <a:chOff x="0" y="0"/>
+          <a:chExt cx="0" cy="0"/>
+        </a:xfrm>
+      </p:grpSpPr>
       <p:sp>
         <p:nvSpPr>
           <p:cNvPr id="2" name="Title 1"/>
@@ -6285,38 +6390,21 @@
                 </a:solidFill>
                 <a:latin typeface="Space Grotesk"/>
               </a:rPr>
-              <a:t>Q&amp;A</a:t>
-            </a:r>
-          </a:p>
-        </p:txBody>
-      </p:sp>
-      <p:sp>
-        <p:nvSpPr>
-          <p:cNvPr id="3" name="Content Placeholder 2"/>
-          <p:cNvSpPr>
-            <a:spLocks noGrp="1"/>
-          </p:cNvSpPr>
-          <p:nvPr>
-            <p:ph idx="1"/>
-          </p:nvPr>
-        </p:nvSpPr>
-        <p:spPr/>
-        <p:txBody>
-          <a:bodyPr/>
-          <a:lstStyle/>
-          <a:p/>
-        </p:txBody>
-      </p:sp>
-      <p:sp>
-        <p:nvSpPr>
-          <p:cNvPr id="4" name="Rectangle 3"/>
+              <a:t>問題：AI 很難懂？</a:t>
+            </a:r>
+          </a:p>
+        </p:txBody>
+      </p:sp>
+      <p:sp>
+        <p:nvSpPr>
+          <p:cNvPr id="3" name="Rectangle 2"/>
           <p:cNvSpPr/>
           <p:nvPr/>
         </p:nvSpPr>
         <p:spPr>
           <a:xfrm>
             <a:off x="0" y="0"/>
-            <a:ext cx="12188952" cy="502920"/>
+            <a:ext cx="9144000" cy="502920"/>
           </a:xfrm>
           <a:prstGeom prst="rect">
             <a:avLst/>
@@ -6347,19 +6435,20 @@
           <a:lstStyle/>
           <a:p>
             <a:pPr algn="ctr"/>
-          </a:p>
-        </p:txBody>
-      </p:sp>
-      <p:sp>
-        <p:nvSpPr>
-          <p:cNvPr id="5" name="Rectangle 4"/>
+            <a:endParaRPr/>
+          </a:p>
+        </p:txBody>
+      </p:sp>
+      <p:sp>
+        <p:nvSpPr>
+          <p:cNvPr id="4" name="Rectangle 3"/>
           <p:cNvSpPr/>
           <p:nvPr/>
         </p:nvSpPr>
         <p:spPr>
           <a:xfrm>
             <a:off x="0" y="429768"/>
-            <a:ext cx="12188952" cy="73152"/>
+            <a:ext cx="9144000" cy="114300"/>
           </a:xfrm>
           <a:prstGeom prst="rect">
             <a:avLst/>
@@ -6390,12 +6479,13 @@
           <a:lstStyle/>
           <a:p>
             <a:pPr algn="ctr"/>
-          </a:p>
-        </p:txBody>
-      </p:sp>
-      <p:sp>
-        <p:nvSpPr>
-          <p:cNvPr id="6" name="Rectangle 5"/>
+            <a:endParaRPr/>
+          </a:p>
+        </p:txBody>
+      </p:sp>
+      <p:sp>
+        <p:nvSpPr>
+          <p:cNvPr id="5" name="Rectangle 4"/>
           <p:cNvSpPr/>
           <p:nvPr/>
         </p:nvSpPr>
@@ -6433,12 +6523,13 @@
           <a:lstStyle/>
           <a:p>
             <a:pPr algn="ctr"/>
-          </a:p>
-        </p:txBody>
-      </p:sp>
-      <p:sp>
-        <p:nvSpPr>
-          <p:cNvPr id="7" name="TextBox 6"/>
+            <a:endParaRPr/>
+          </a:p>
+        </p:txBody>
+      </p:sp>
+      <p:sp>
+        <p:nvSpPr>
+          <p:cNvPr id="6" name="TextBox 5"/>
           <p:cNvSpPr txBox="1"/>
           <p:nvPr/>
         </p:nvSpPr>
@@ -6467,20 +6558,20 @@
               </a:defRPr>
             </a:pPr>
             <a:r>
-              <a:t>Q&amp;A</a:t>
-            </a:r>
-          </a:p>
-        </p:txBody>
-      </p:sp>
-      <p:sp>
-        <p:nvSpPr>
-          <p:cNvPr id="8" name="TextBox 7"/>
+              <a:t>問題：AI 很難懂？</a:t>
+            </a:r>
+          </a:p>
+        </p:txBody>
+      </p:sp>
+      <p:sp>
+        <p:nvSpPr>
+          <p:cNvPr id="7" name="TextBox 6"/>
           <p:cNvSpPr txBox="1"/>
           <p:nvPr/>
         </p:nvSpPr>
         <p:spPr>
           <a:xfrm>
-            <a:off x="9326880" y="73152"/>
+            <a:off x="6263640" y="114300"/>
             <a:ext cx="2377440" cy="274320"/>
           </a:xfrm>
           <a:prstGeom prst="rect">
@@ -6510,14 +6601,14 @@
       </p:sp>
       <p:sp>
         <p:nvSpPr>
-          <p:cNvPr id="9" name="Rounded Rectangle 8"/>
+          <p:cNvPr id="8" name="Rounded Rectangle 7"/>
           <p:cNvSpPr/>
           <p:nvPr/>
         </p:nvSpPr>
         <p:spPr>
           <a:xfrm>
-            <a:off x="685800" y="1554480"/>
-            <a:ext cx="10881360" cy="4526280"/>
+            <a:off x="801329" y="1319194"/>
+            <a:ext cx="3135507" cy="4338484"/>
           </a:xfrm>
           <a:prstGeom prst="roundRect">
             <a:avLst/>
@@ -6550,6 +6641,53 @@
           <a:lstStyle/>
           <a:p>
             <a:pPr algn="ctr"/>
+            <a:endParaRPr/>
+          </a:p>
+        </p:txBody>
+      </p:sp>
+      <p:sp>
+        <p:nvSpPr>
+          <p:cNvPr id="9" name="Rounded Rectangle 8"/>
+          <p:cNvSpPr/>
+          <p:nvPr/>
+        </p:nvSpPr>
+        <p:spPr>
+          <a:xfrm>
+            <a:off x="5334000" y="1319194"/>
+            <a:ext cx="3135507" cy="4338484"/>
+          </a:xfrm>
+          <a:prstGeom prst="roundRect">
+            <a:avLst/>
+          </a:prstGeom>
+          <a:solidFill>
+            <a:srgbClr val="0D223D"/>
+          </a:solidFill>
+          <a:ln w="12700">
+            <a:solidFill>
+              <a:srgbClr val="79F0C6"/>
+            </a:solidFill>
+          </a:ln>
+        </p:spPr>
+        <p:style>
+          <a:lnRef idx="1">
+            <a:schemeClr val="accent1"/>
+          </a:lnRef>
+          <a:fillRef idx="3">
+            <a:schemeClr val="accent1"/>
+          </a:fillRef>
+          <a:effectRef idx="2">
+            <a:schemeClr val="accent1"/>
+          </a:effectRef>
+          <a:fontRef idx="minor">
+            <a:schemeClr val="lt1"/>
+          </a:fontRef>
+        </p:style>
+        <p:txBody>
+          <a:bodyPr rtlCol="0" anchor="ctr"/>
+          <a:lstStyle/>
+          <a:p>
+            <a:pPr algn="ctr"/>
+            <a:endParaRPr/>
           </a:p>
         </p:txBody>
       </p:sp>
@@ -6561,8 +6699,103 @@
         </p:nvSpPr>
         <p:spPr>
           <a:xfrm>
-            <a:off x="960120" y="1828800"/>
-            <a:ext cx="10241280" cy="4023360"/>
+            <a:off x="1036321" y="1417638"/>
+            <a:ext cx="4328160" cy="1246495"/>
+          </a:xfrm>
+          <a:prstGeom prst="rect">
+            <a:avLst/>
+          </a:prstGeom>
+          <a:noFill/>
+        </p:spPr>
+        <p:txBody>
+          <a:bodyPr wrap="square">
+            <a:spAutoFit/>
+          </a:bodyPr>
+          <a:lstStyle/>
+          <a:p>
+            <a:pPr>
+              <a:defRPr sz="2400" b="1">
+                <a:solidFill>
+                  <a:srgbClr val="79F0C6"/>
+                </a:solidFill>
+                <a:latin typeface="Noto Sans TC"/>
+              </a:defRPr>
+            </a:pPr>
+            <a:r>
+              <a:rPr dirty="0" err="1"/>
+              <a:t>痛點</a:t>
+            </a:r>
+            <a:endParaRPr dirty="0"/>
+          </a:p>
+          <a:p>
+            <a:pPr>
+              <a:defRPr sz="1700">
+                <a:solidFill>
+                  <a:srgbClr val="ECF4FF"/>
+                </a:solidFill>
+                <a:latin typeface="Noto Sans TC"/>
+              </a:defRPr>
+            </a:pPr>
+            <a:r>
+              <a:rPr dirty="0"/>
+              <a:t>• </a:t>
+            </a:r>
+            <a:r>
+              <a:rPr dirty="0" err="1"/>
+              <a:t>概念抽象、術語多</a:t>
+            </a:r>
+            <a:endParaRPr dirty="0"/>
+          </a:p>
+          <a:p>
+            <a:pPr>
+              <a:defRPr sz="1700">
+                <a:solidFill>
+                  <a:srgbClr val="ECF4FF"/>
+                </a:solidFill>
+                <a:latin typeface="Noto Sans TC"/>
+              </a:defRPr>
+            </a:pPr>
+            <a:r>
+              <a:rPr dirty="0"/>
+              <a:t>• </a:t>
+            </a:r>
+            <a:r>
+              <a:rPr dirty="0" err="1"/>
+              <a:t>缺乏歷史脈絡</a:t>
+            </a:r>
+            <a:endParaRPr dirty="0"/>
+          </a:p>
+          <a:p>
+            <a:pPr>
+              <a:defRPr sz="1700">
+                <a:solidFill>
+                  <a:srgbClr val="ECF4FF"/>
+                </a:solidFill>
+                <a:latin typeface="Noto Sans TC"/>
+              </a:defRPr>
+            </a:pPr>
+            <a:r>
+              <a:rPr dirty="0"/>
+              <a:t>• </a:t>
+            </a:r>
+            <a:r>
+              <a:rPr dirty="0" err="1"/>
+              <a:t>一般使用者難以快速入門</a:t>
+            </a:r>
+            <a:endParaRPr dirty="0"/>
+          </a:p>
+        </p:txBody>
+      </p:sp>
+      <p:sp>
+        <p:nvSpPr>
+          <p:cNvPr id="11" name="TextBox 10"/>
+          <p:cNvSpPr txBox="1"/>
+          <p:nvPr/>
+        </p:nvSpPr>
+        <p:spPr>
+          <a:xfrm>
+            <a:off x="5943600" y="1371600"/>
+            <a:ext cx="5303520" cy="4846320"/>
           </a:xfrm>
           <a:prstGeom prst="rect">
             <a:avLst/>
@@ -6576,7 +6809,20 @@
           <a:lstStyle/>
           <a:p>
             <a:pPr>
-              <a:defRPr sz="1800">
+              <a:defRPr sz="2400" b="1">
+                <a:solidFill>
+                  <a:srgbClr val="79F0C6"/>
+                </a:solidFill>
+                <a:latin typeface="Noto Sans TC"/>
+              </a:defRPr>
+            </a:pPr>
+            <a:r>
+              <a:t>需要的體驗</a:t>
+            </a:r>
+          </a:p>
+          <a:p>
+            <a:pPr>
+              <a:defRPr sz="1700">
                 <a:solidFill>
                   <a:srgbClr val="ECF4FF"/>
                 </a:solidFill>
@@ -6584,12 +6830,12 @@
               </a:defRPr>
             </a:pPr>
             <a:r>
-              <a:t>• 感謝聆聽</a:t>
+              <a:t>• 可視化呈現演進</a:t>
             </a:r>
           </a:p>
           <a:p>
             <a:pPr>
-              <a:defRPr sz="1800">
+              <a:defRPr sz="1700">
                 <a:solidFill>
                   <a:srgbClr val="ECF4FF"/>
                 </a:solidFill>
@@ -6597,12 +6843,12 @@
               </a:defRPr>
             </a:pPr>
             <a:r>
-              <a:t>• 歡迎提問與建議</a:t>
+              <a:t>• 點擊式互動學習</a:t>
             </a:r>
           </a:p>
           <a:p>
             <a:pPr>
-              <a:defRPr sz="1800">
+              <a:defRPr sz="1700">
                 <a:solidFill>
                   <a:srgbClr val="ECF4FF"/>
                 </a:solidFill>
@@ -6610,14 +6856,14 @@
               </a:defRPr>
             </a:pPr>
             <a:r>
-              <a:t>• AI Explorer 將持續迭代為更完整的學習平台</a:t>
-            </a:r>
-          </a:p>
-        </p:txBody>
-      </p:sp>
-      <p:sp>
-        <p:nvSpPr>
-          <p:cNvPr id="11" name="TextBox 10"/>
+              <a:t>• 白話解釋 + 真實來源</a:t>
+            </a:r>
+          </a:p>
+        </p:txBody>
+      </p:sp>
+      <p:sp>
+        <p:nvSpPr>
+          <p:cNvPr id="12" name="TextBox 11"/>
           <p:cNvSpPr txBox="1"/>
           <p:nvPr/>
         </p:nvSpPr>
@@ -6646,7 +6892,7 @@
               </a:defRPr>
             </a:pPr>
             <a:r>
-              <a:t>16</a:t>
+              <a:t>3</a:t>
             </a:r>
           </a:p>
         </p:txBody>
@@ -6659,8 +6905,8 @@
 </p:sld>
 </file>
 
-<file path=ppt/slides/slide2.xml><?xml version="1.0" encoding="utf-8"?>
-<p:sld xmlns:a="http://schemas.openxmlformats.org/drawingml/2006/main" xmlns:p="http://schemas.openxmlformats.org/presentationml/2006/main" xmlns:r="http://schemas.openxmlformats.org/officeDocument/2006/relationships">
+<file path=ppt/slides/slide4.xml><?xml version="1.0" encoding="utf-8"?>
+<p:sld xmlns:a="http://schemas.openxmlformats.org/drawingml/2006/main" xmlns:r="http://schemas.openxmlformats.org/officeDocument/2006/relationships" xmlns:p="http://schemas.openxmlformats.org/presentationml/2006/main">
   <p:cSld>
     <p:bg>
       <p:bgPr>
@@ -6676,7 +6922,14 @@
         <p:cNvGrpSpPr/>
         <p:nvPr/>
       </p:nvGrpSpPr>
-      <p:grpSpPr/>
+      <p:grpSpPr>
+        <a:xfrm>
+          <a:off x="0" y="0"/>
+          <a:ext cx="0" cy="0"/>
+          <a:chOff x="0" y="0"/>
+          <a:chExt cx="0" cy="0"/>
+        </a:xfrm>
+      </p:grpSpPr>
       <p:sp>
         <p:nvSpPr>
           <p:cNvPr id="2" name="Title 1"/>
@@ -6699,7 +6952,7 @@
                 </a:solidFill>
                 <a:latin typeface="Space Grotesk"/>
               </a:rPr>
-              <a:t>目錄</a:t>
+              <a:t>解決方案：AI 地圖</a:t>
             </a:r>
           </a:p>
         </p:txBody>
@@ -6718,7 +6971,9 @@
         <p:txBody>
           <a:bodyPr/>
           <a:lstStyle/>
-          <a:p/>
+          <a:p>
+            <a:endParaRPr/>
+          </a:p>
         </p:txBody>
       </p:sp>
       <p:sp>
@@ -6730,7 +6985,7 @@
         <p:spPr>
           <a:xfrm>
             <a:off x="0" y="0"/>
-            <a:ext cx="12188952" cy="502920"/>
+            <a:ext cx="9144000" cy="429768"/>
           </a:xfrm>
           <a:prstGeom prst="rect">
             <a:avLst/>
@@ -6761,6 +7016,7 @@
           <a:lstStyle/>
           <a:p>
             <a:pPr algn="ctr"/>
+            <a:endParaRPr/>
           </a:p>
         </p:txBody>
       </p:sp>
@@ -6773,7 +7029,7 @@
         <p:spPr>
           <a:xfrm>
             <a:off x="0" y="429768"/>
-            <a:ext cx="12188952" cy="73152"/>
+            <a:ext cx="9144000" cy="136842"/>
           </a:xfrm>
           <a:prstGeom prst="rect">
             <a:avLst/>
@@ -6804,6 +7060,7 @@
           <a:lstStyle/>
           <a:p>
             <a:pPr algn="ctr"/>
+            <a:endParaRPr/>
           </a:p>
         </p:txBody>
       </p:sp>
@@ -6847,6 +7104,7 @@
           <a:lstStyle/>
           <a:p>
             <a:pPr algn="ctr"/>
+            <a:endParaRPr/>
           </a:p>
         </p:txBody>
       </p:sp>
@@ -6881,7 +7139,7 @@
               </a:defRPr>
             </a:pPr>
             <a:r>
-              <a:t>目錄</a:t>
+              <a:t>解決方案：AI 地圖</a:t>
             </a:r>
           </a:p>
         </p:txBody>
@@ -6894,7 +7152,7 @@
         </p:nvSpPr>
         <p:spPr>
           <a:xfrm>
-            <a:off x="9326880" y="73152"/>
+            <a:off x="6469380" y="103534"/>
             <a:ext cx="2377440" cy="274320"/>
           </a:xfrm>
           <a:prstGeom prst="rect">
@@ -6917,6 +7175,7 @@
               </a:defRPr>
             </a:pPr>
             <a:r>
+              <a:rPr dirty="0"/>
               <a:t>AI Explorer</a:t>
             </a:r>
           </a:p>
@@ -6931,7 +7190,7 @@
         <p:spPr>
           <a:xfrm>
             <a:off x="685800" y="1554480"/>
-            <a:ext cx="10881360" cy="4526280"/>
+            <a:ext cx="7863840" cy="4525963"/>
           </a:xfrm>
           <a:prstGeom prst="roundRect">
             <a:avLst/>
@@ -6964,6 +7223,7 @@
           <a:lstStyle/>
           <a:p>
             <a:pPr algn="ctr"/>
+            <a:endParaRPr/>
           </a:p>
         </p:txBody>
       </p:sp>
@@ -6976,7 +7236,69 @@
         <p:spPr>
           <a:xfrm>
             <a:off x="960120" y="1828800"/>
-            <a:ext cx="10241280" cy="4023360"/>
+            <a:ext cx="7886700" cy="923330"/>
+          </a:xfrm>
+          <a:prstGeom prst="rect">
+            <a:avLst/>
+          </a:prstGeom>
+          <a:noFill/>
+        </p:spPr>
+        <p:txBody>
+          <a:bodyPr wrap="square">
+            <a:spAutoFit/>
+          </a:bodyPr>
+          <a:lstStyle/>
+          <a:p>
+            <a:pPr>
+              <a:defRPr sz="1800">
+                <a:solidFill>
+                  <a:srgbClr val="ECF4FF"/>
+                </a:solidFill>
+                <a:latin typeface="Noto Sans TC"/>
+              </a:defRPr>
+            </a:pPr>
+            <a:r>
+              <a:t>• 核心概念：把 AI 發展做成可點擊科技樹</a:t>
+            </a:r>
+          </a:p>
+          <a:p>
+            <a:pPr>
+              <a:defRPr sz="1800">
+                <a:solidFill>
+                  <a:srgbClr val="ECF4FF"/>
+                </a:solidFill>
+                <a:latin typeface="Noto Sans TC"/>
+              </a:defRPr>
+            </a:pPr>
+            <a:r>
+              <a:t>• 學習流程：點節點 -&gt; 看摘要 -&gt; 看影片 -&gt; 查來源 -&gt; 做測驗</a:t>
+            </a:r>
+          </a:p>
+          <a:p>
+            <a:pPr>
+              <a:defRPr sz="1800">
+                <a:solidFill>
+                  <a:srgbClr val="ECF4FF"/>
+                </a:solidFill>
+                <a:latin typeface="Noto Sans TC"/>
+              </a:defRPr>
+            </a:pPr>
+            <a:r>
+              <a:t>• 目標：讓非資訊背景也能建立完整脈絡</a:t>
+            </a:r>
+          </a:p>
+        </p:txBody>
+      </p:sp>
+      <p:sp>
+        <p:nvSpPr>
+          <p:cNvPr id="11" name="TextBox 10"/>
+          <p:cNvSpPr txBox="1"/>
+          <p:nvPr/>
+        </p:nvSpPr>
+        <p:spPr>
+          <a:xfrm>
+            <a:off x="11155680" y="6473952"/>
+            <a:ext cx="731520" cy="219456"/>
           </a:xfrm>
           <a:prstGeom prst="rect">
             <a:avLst/>
@@ -6989,94 +7311,6 @@
           </a:bodyPr>
           <a:lstStyle/>
           <a:p>
-            <a:pPr>
-              <a:defRPr sz="1800">
-                <a:solidFill>
-                  <a:srgbClr val="ECF4FF"/>
-                </a:solidFill>
-                <a:latin typeface="Noto Sans TC"/>
-              </a:defRPr>
-            </a:pPr>
-            <a:r>
-              <a:t>• 1. 問題與解決方案</a:t>
-            </a:r>
-          </a:p>
-          <a:p>
-            <a:pPr>
-              <a:defRPr sz="1800">
-                <a:solidFill>
-                  <a:srgbClr val="ECF4FF"/>
-                </a:solidFill>
-                <a:latin typeface="Noto Sans TC"/>
-              </a:defRPr>
-            </a:pPr>
-            <a:r>
-              <a:t>• 2. 網站架構與地圖設計</a:t>
-            </a:r>
-          </a:p>
-          <a:p>
-            <a:pPr>
-              <a:defRPr sz="1800">
-                <a:solidFill>
-                  <a:srgbClr val="ECF4FF"/>
-                </a:solidFill>
-                <a:latin typeface="Noto Sans TC"/>
-              </a:defRPr>
-            </a:pPr>
-            <a:r>
-              <a:t>• 3. 節點 Demo 與技術選型</a:t>
-            </a:r>
-          </a:p>
-          <a:p>
-            <a:pPr>
-              <a:defRPr sz="1800">
-                <a:solidFill>
-                  <a:srgbClr val="ECF4FF"/>
-                </a:solidFill>
-                <a:latin typeface="Noto Sans TC"/>
-              </a:defRPr>
-            </a:pPr>
-            <a:r>
-              <a:t>• 4. 期中完成項目與期末規劃</a:t>
-            </a:r>
-          </a:p>
-          <a:p>
-            <a:pPr>
-              <a:defRPr sz="1800">
-                <a:solidFill>
-                  <a:srgbClr val="ECF4FF"/>
-                </a:solidFill>
-                <a:latin typeface="Noto Sans TC"/>
-              </a:defRPr>
-            </a:pPr>
-            <a:r>
-              <a:t>• 5. 反思與 Q&amp;A</a:t>
-            </a:r>
-          </a:p>
-        </p:txBody>
-      </p:sp>
-      <p:sp>
-        <p:nvSpPr>
-          <p:cNvPr id="11" name="TextBox 10"/>
-          <p:cNvSpPr txBox="1"/>
-          <p:nvPr/>
-        </p:nvSpPr>
-        <p:spPr>
-          <a:xfrm>
-            <a:off x="11155680" y="6473952"/>
-            <a:ext cx="731520" cy="219456"/>
-          </a:xfrm>
-          <a:prstGeom prst="rect">
-            <a:avLst/>
-          </a:prstGeom>
-          <a:noFill/>
-        </p:spPr>
-        <p:txBody>
-          <a:bodyPr wrap="none">
-            <a:spAutoFit/>
-          </a:bodyPr>
-          <a:lstStyle/>
-          <a:p>
             <a:pPr algn="r">
               <a:defRPr sz="1000">
                 <a:solidFill>
@@ -7086,7 +7320,7 @@
               </a:defRPr>
             </a:pPr>
             <a:r>
-              <a:t>2</a:t>
+              <a:t>4</a:t>
             </a:r>
           </a:p>
         </p:txBody>
@@ -7099,8 +7333,8 @@
 </p:sld>
 </file>
 
-<file path=ppt/slides/slide3.xml><?xml version="1.0" encoding="utf-8"?>
-<p:sld xmlns:a="http://schemas.openxmlformats.org/drawingml/2006/main" xmlns:p="http://schemas.openxmlformats.org/presentationml/2006/main" xmlns:r="http://schemas.openxmlformats.org/officeDocument/2006/relationships">
+<file path=ppt/slides/slide5.xml><?xml version="1.0" encoding="utf-8"?>
+<p:sld xmlns:a="http://schemas.openxmlformats.org/drawingml/2006/main" xmlns:r="http://schemas.openxmlformats.org/officeDocument/2006/relationships" xmlns:p="http://schemas.openxmlformats.org/presentationml/2006/main">
   <p:cSld>
     <p:bg>
       <p:bgPr>
@@ -7116,7 +7350,14 @@
         <p:cNvGrpSpPr/>
         <p:nvPr/>
       </p:nvGrpSpPr>
-      <p:grpSpPr/>
+      <p:grpSpPr>
+        <a:xfrm>
+          <a:off x="0" y="0"/>
+          <a:ext cx="0" cy="0"/>
+          <a:chOff x="0" y="0"/>
+          <a:chExt cx="0" cy="0"/>
+        </a:xfrm>
+      </p:grpSpPr>
       <p:sp>
         <p:nvSpPr>
           <p:cNvPr id="2" name="Title 1"/>
@@ -7127,33 +7368,63 @@
             <p:ph type="title"/>
           </p:nvPr>
         </p:nvSpPr>
-        <p:spPr/>
+        <p:spPr>
+          <a:xfrm>
+            <a:off x="307258" y="471575"/>
+            <a:ext cx="8229600" cy="1143000"/>
+          </a:xfrm>
+        </p:spPr>
         <p:txBody>
           <a:bodyPr/>
           <a:lstStyle/>
           <a:p>
             <a:r>
-              <a:rPr sz="3200" b="1">
+              <a:rPr sz="3200" b="1" dirty="0" err="1">
                 <a:solidFill>
                   <a:srgbClr val="ECF4FF"/>
                 </a:solidFill>
                 <a:latin typeface="Space Grotesk"/>
               </a:rPr>
-              <a:t>問題：AI 很難懂？</a:t>
-            </a:r>
-          </a:p>
-        </p:txBody>
-      </p:sp>
-      <p:sp>
-        <p:nvSpPr>
-          <p:cNvPr id="3" name="Rectangle 2"/>
+              <a:t>目標受眾</a:t>
+            </a:r>
+            <a:endParaRPr sz="3200" b="1" dirty="0">
+              <a:solidFill>
+                <a:srgbClr val="ECF4FF"/>
+              </a:solidFill>
+              <a:latin typeface="Space Grotesk"/>
+            </a:endParaRPr>
+          </a:p>
+        </p:txBody>
+      </p:sp>
+      <p:sp>
+        <p:nvSpPr>
+          <p:cNvPr id="3" name="Content Placeholder 2"/>
+          <p:cNvSpPr>
+            <a:spLocks noGrp="1"/>
+          </p:cNvSpPr>
+          <p:nvPr>
+            <p:ph idx="1"/>
+          </p:nvPr>
+        </p:nvSpPr>
+        <p:spPr/>
+        <p:txBody>
+          <a:bodyPr/>
+          <a:lstStyle/>
+          <a:p>
+            <a:endParaRPr/>
+          </a:p>
+        </p:txBody>
+      </p:sp>
+      <p:sp>
+        <p:nvSpPr>
+          <p:cNvPr id="4" name="Rectangle 3"/>
           <p:cNvSpPr/>
           <p:nvPr/>
         </p:nvSpPr>
         <p:spPr>
           <a:xfrm>
             <a:off x="0" y="0"/>
-            <a:ext cx="12188952" cy="502920"/>
+            <a:ext cx="9144000" cy="502920"/>
           </a:xfrm>
           <a:prstGeom prst="rect">
             <a:avLst/>
@@ -7184,19 +7455,20 @@
           <a:lstStyle/>
           <a:p>
             <a:pPr algn="ctr"/>
-          </a:p>
-        </p:txBody>
-      </p:sp>
-      <p:sp>
-        <p:nvSpPr>
-          <p:cNvPr id="4" name="Rectangle 3"/>
+            <a:endParaRPr/>
+          </a:p>
+        </p:txBody>
+      </p:sp>
+      <p:sp>
+        <p:nvSpPr>
+          <p:cNvPr id="5" name="Rectangle 4"/>
           <p:cNvSpPr/>
           <p:nvPr/>
         </p:nvSpPr>
         <p:spPr>
           <a:xfrm>
             <a:off x="0" y="429768"/>
-            <a:ext cx="12188952" cy="73152"/>
+            <a:ext cx="9144000" cy="73152"/>
           </a:xfrm>
           <a:prstGeom prst="rect">
             <a:avLst/>
@@ -7227,12 +7499,13 @@
           <a:lstStyle/>
           <a:p>
             <a:pPr algn="ctr"/>
-          </a:p>
-        </p:txBody>
-      </p:sp>
-      <p:sp>
-        <p:nvSpPr>
-          <p:cNvPr id="5" name="Rectangle 4"/>
+            <a:endParaRPr/>
+          </a:p>
+        </p:txBody>
+      </p:sp>
+      <p:sp>
+        <p:nvSpPr>
+          <p:cNvPr id="6" name="Rectangle 5"/>
           <p:cNvSpPr/>
           <p:nvPr/>
         </p:nvSpPr>
@@ -7270,12 +7543,13 @@
           <a:lstStyle/>
           <a:p>
             <a:pPr algn="ctr"/>
-          </a:p>
-        </p:txBody>
-      </p:sp>
-      <p:sp>
-        <p:nvSpPr>
-          <p:cNvPr id="6" name="TextBox 5"/>
+            <a:endParaRPr/>
+          </a:p>
+        </p:txBody>
+      </p:sp>
+      <p:sp>
+        <p:nvSpPr>
+          <p:cNvPr id="7" name="TextBox 6"/>
           <p:cNvSpPr txBox="1"/>
           <p:nvPr/>
         </p:nvSpPr>
@@ -7304,20 +7578,20 @@
               </a:defRPr>
             </a:pPr>
             <a:r>
-              <a:t>問題：AI 很難懂？</a:t>
-            </a:r>
-          </a:p>
-        </p:txBody>
-      </p:sp>
-      <p:sp>
-        <p:nvSpPr>
-          <p:cNvPr id="7" name="TextBox 6"/>
+              <a:t>目標受眾</a:t>
+            </a:r>
+          </a:p>
+        </p:txBody>
+      </p:sp>
+      <p:sp>
+        <p:nvSpPr>
+          <p:cNvPr id="8" name="TextBox 7"/>
           <p:cNvSpPr txBox="1"/>
           <p:nvPr/>
         </p:nvSpPr>
         <p:spPr>
           <a:xfrm>
-            <a:off x="9326880" y="73152"/>
+            <a:off x="6309360" y="92076"/>
             <a:ext cx="2377440" cy="274320"/>
           </a:xfrm>
           <a:prstGeom prst="rect">
@@ -7340,6 +7614,7 @@
               </a:defRPr>
             </a:pPr>
             <a:r>
+              <a:rPr dirty="0"/>
               <a:t>AI Explorer</a:t>
             </a:r>
           </a:p>
@@ -7347,14 +7622,14 @@
       </p:sp>
       <p:sp>
         <p:nvSpPr>
-          <p:cNvPr id="8" name="Rounded Rectangle 7"/>
+          <p:cNvPr id="9" name="Rounded Rectangle 8"/>
           <p:cNvSpPr/>
           <p:nvPr/>
         </p:nvSpPr>
         <p:spPr>
           <a:xfrm>
-            <a:off x="640080" y="1600200"/>
-            <a:ext cx="5440680" cy="4480560"/>
+            <a:off x="685800" y="1554480"/>
+            <a:ext cx="7769942" cy="4525963"/>
           </a:xfrm>
           <a:prstGeom prst="roundRect">
             <a:avLst/>
@@ -7387,51 +7662,7 @@
           <a:lstStyle/>
           <a:p>
             <a:pPr algn="ctr"/>
-          </a:p>
-        </p:txBody>
-      </p:sp>
-      <p:sp>
-        <p:nvSpPr>
-          <p:cNvPr id="9" name="Rounded Rectangle 8"/>
-          <p:cNvSpPr/>
-          <p:nvPr/>
-        </p:nvSpPr>
-        <p:spPr>
-          <a:xfrm>
-            <a:off x="6144768" y="1600200"/>
-            <a:ext cx="5440680" cy="4480560"/>
-          </a:xfrm>
-          <a:prstGeom prst="roundRect">
-            <a:avLst/>
-          </a:prstGeom>
-          <a:solidFill>
-            <a:srgbClr val="0D223D"/>
-          </a:solidFill>
-          <a:ln w="12700">
-            <a:solidFill>
-              <a:srgbClr val="79F0C6"/>
-            </a:solidFill>
-          </a:ln>
-        </p:spPr>
-        <p:style>
-          <a:lnRef idx="1">
-            <a:schemeClr val="accent1"/>
-          </a:lnRef>
-          <a:fillRef idx="3">
-            <a:schemeClr val="accent1"/>
-          </a:fillRef>
-          <a:effectRef idx="2">
-            <a:schemeClr val="accent1"/>
-          </a:effectRef>
-          <a:fontRef idx="minor">
-            <a:schemeClr val="lt1"/>
-          </a:fontRef>
-        </p:style>
-        <p:txBody>
-          <a:bodyPr rtlCol="0" anchor="ctr"/>
-          <a:lstStyle/>
-          <a:p>
-            <a:pPr algn="ctr"/>
+            <a:endParaRPr/>
           </a:p>
         </p:txBody>
       </p:sp>
@@ -7443,8 +7674,70 @@
         </p:nvSpPr>
         <p:spPr>
           <a:xfrm>
-            <a:off x="548640" y="1371600"/>
-            <a:ext cx="5303520" cy="4846320"/>
+            <a:off x="960120" y="1828800"/>
+            <a:ext cx="8183880" cy="923330"/>
+          </a:xfrm>
+          <a:prstGeom prst="rect">
+            <a:avLst/>
+          </a:prstGeom>
+          <a:noFill/>
+        </p:spPr>
+        <p:txBody>
+          <a:bodyPr wrap="square">
+            <a:spAutoFit/>
+          </a:bodyPr>
+          <a:lstStyle/>
+          <a:p>
+            <a:pPr>
+              <a:defRPr sz="1800">
+                <a:solidFill>
+                  <a:srgbClr val="ECF4FF"/>
+                </a:solidFill>
+                <a:latin typeface="Noto Sans TC"/>
+              </a:defRPr>
+            </a:pPr>
+            <a:r>
+              <a:t>• 完全不懂 AI 的一般使用者（同學、家人、非資訊背景）</a:t>
+            </a:r>
+          </a:p>
+          <a:p>
+            <a:pPr>
+              <a:defRPr sz="1800">
+                <a:solidFill>
+                  <a:srgbClr val="ECF4FF"/>
+                </a:solidFill>
+                <a:latin typeface="Noto Sans TC"/>
+              </a:defRPr>
+            </a:pPr>
+            <a:r>
+              <a:t>• 需要快速理解 AI 發展脈絡的報告觀眾</a:t>
+            </a:r>
+          </a:p>
+          <a:p>
+            <a:pPr>
+              <a:defRPr sz="1800">
+                <a:solidFill>
+                  <a:srgbClr val="ECF4FF"/>
+                </a:solidFill>
+                <a:latin typeface="Noto Sans TC"/>
+              </a:defRPr>
+            </a:pPr>
+            <a:r>
+              <a:t>• 想用互動方式學習而非只看長文的人</a:t>
+            </a:r>
+          </a:p>
+        </p:txBody>
+      </p:sp>
+      <p:sp>
+        <p:nvSpPr>
+          <p:cNvPr id="11" name="TextBox 10"/>
+          <p:cNvSpPr txBox="1"/>
+          <p:nvPr/>
+        </p:nvSpPr>
+        <p:spPr>
+          <a:xfrm>
+            <a:off x="11155680" y="6473952"/>
+            <a:ext cx="731520" cy="219456"/>
           </a:xfrm>
           <a:prstGeom prst="rect">
             <a:avLst/>
@@ -7457,156 +7750,6 @@
           </a:bodyPr>
           <a:lstStyle/>
           <a:p>
-            <a:pPr>
-              <a:defRPr b="1" sz="2400">
-                <a:solidFill>
-                  <a:srgbClr val="79F0C6"/>
-                </a:solidFill>
-                <a:latin typeface="Noto Sans TC"/>
-              </a:defRPr>
-            </a:pPr>
-            <a:r>
-              <a:t>痛點</a:t>
-            </a:r>
-          </a:p>
-          <a:p>
-            <a:pPr>
-              <a:defRPr sz="1700">
-                <a:solidFill>
-                  <a:srgbClr val="ECF4FF"/>
-                </a:solidFill>
-                <a:latin typeface="Noto Sans TC"/>
-              </a:defRPr>
-            </a:pPr>
-            <a:r>
-              <a:t>• 概念抽象、術語多</a:t>
-            </a:r>
-          </a:p>
-          <a:p>
-            <a:pPr>
-              <a:defRPr sz="1700">
-                <a:solidFill>
-                  <a:srgbClr val="ECF4FF"/>
-                </a:solidFill>
-                <a:latin typeface="Noto Sans TC"/>
-              </a:defRPr>
-            </a:pPr>
-            <a:r>
-              <a:t>• 缺乏歷史脈絡</a:t>
-            </a:r>
-          </a:p>
-          <a:p>
-            <a:pPr>
-              <a:defRPr sz="1700">
-                <a:solidFill>
-                  <a:srgbClr val="ECF4FF"/>
-                </a:solidFill>
-                <a:latin typeface="Noto Sans TC"/>
-              </a:defRPr>
-            </a:pPr>
-            <a:r>
-              <a:t>• 一般使用者難以快速入門</a:t>
-            </a:r>
-          </a:p>
-        </p:txBody>
-      </p:sp>
-      <p:sp>
-        <p:nvSpPr>
-          <p:cNvPr id="11" name="TextBox 10"/>
-          <p:cNvSpPr txBox="1"/>
-          <p:nvPr/>
-        </p:nvSpPr>
-        <p:spPr>
-          <a:xfrm>
-            <a:off x="6217920" y="1371600"/>
-            <a:ext cx="5303520" cy="4846320"/>
-          </a:xfrm>
-          <a:prstGeom prst="rect">
-            <a:avLst/>
-          </a:prstGeom>
-          <a:noFill/>
-        </p:spPr>
-        <p:txBody>
-          <a:bodyPr wrap="none">
-            <a:spAutoFit/>
-          </a:bodyPr>
-          <a:lstStyle/>
-          <a:p>
-            <a:pPr>
-              <a:defRPr b="1" sz="2400">
-                <a:solidFill>
-                  <a:srgbClr val="79F0C6"/>
-                </a:solidFill>
-                <a:latin typeface="Noto Sans TC"/>
-              </a:defRPr>
-            </a:pPr>
-            <a:r>
-              <a:t>需要的體驗</a:t>
-            </a:r>
-          </a:p>
-          <a:p>
-            <a:pPr>
-              <a:defRPr sz="1700">
-                <a:solidFill>
-                  <a:srgbClr val="ECF4FF"/>
-                </a:solidFill>
-                <a:latin typeface="Noto Sans TC"/>
-              </a:defRPr>
-            </a:pPr>
-            <a:r>
-              <a:t>• 可視化呈現演進</a:t>
-            </a:r>
-          </a:p>
-          <a:p>
-            <a:pPr>
-              <a:defRPr sz="1700">
-                <a:solidFill>
-                  <a:srgbClr val="ECF4FF"/>
-                </a:solidFill>
-                <a:latin typeface="Noto Sans TC"/>
-              </a:defRPr>
-            </a:pPr>
-            <a:r>
-              <a:t>• 點擊式互動學習</a:t>
-            </a:r>
-          </a:p>
-          <a:p>
-            <a:pPr>
-              <a:defRPr sz="1700">
-                <a:solidFill>
-                  <a:srgbClr val="ECF4FF"/>
-                </a:solidFill>
-                <a:latin typeface="Noto Sans TC"/>
-              </a:defRPr>
-            </a:pPr>
-            <a:r>
-              <a:t>• 白話解釋 + 真實來源</a:t>
-            </a:r>
-          </a:p>
-        </p:txBody>
-      </p:sp>
-      <p:sp>
-        <p:nvSpPr>
-          <p:cNvPr id="12" name="TextBox 11"/>
-          <p:cNvSpPr txBox="1"/>
-          <p:nvPr/>
-        </p:nvSpPr>
-        <p:spPr>
-          <a:xfrm>
-            <a:off x="11155680" y="6473952"/>
-            <a:ext cx="731520" cy="219456"/>
-          </a:xfrm>
-          <a:prstGeom prst="rect">
-            <a:avLst/>
-          </a:prstGeom>
-          <a:noFill/>
-        </p:spPr>
-        <p:txBody>
-          <a:bodyPr wrap="none">
-            <a:spAutoFit/>
-          </a:bodyPr>
-          <a:lstStyle/>
-          <a:p>
             <a:pPr algn="r">
               <a:defRPr sz="1000">
                 <a:solidFill>
@@ -7616,7 +7759,7 @@
               </a:defRPr>
             </a:pPr>
             <a:r>
-              <a:t>3</a:t>
+              <a:t>5</a:t>
             </a:r>
           </a:p>
         </p:txBody>
@@ -7629,8 +7772,8 @@
 </p:sld>
 </file>
 
-<file path=ppt/slides/slide4.xml><?xml version="1.0" encoding="utf-8"?>
-<p:sld xmlns:a="http://schemas.openxmlformats.org/drawingml/2006/main" xmlns:p="http://schemas.openxmlformats.org/presentationml/2006/main" xmlns:r="http://schemas.openxmlformats.org/officeDocument/2006/relationships">
+<file path=ppt/slides/slide6.xml><?xml version="1.0" encoding="utf-8"?>
+<p:sld xmlns:a="http://schemas.openxmlformats.org/drawingml/2006/main" xmlns:r="http://schemas.openxmlformats.org/officeDocument/2006/relationships" xmlns:p="http://schemas.openxmlformats.org/presentationml/2006/main">
   <p:cSld>
     <p:bg>
       <p:bgPr>
@@ -7646,7 +7789,14 @@
         <p:cNvGrpSpPr/>
         <p:nvPr/>
       </p:nvGrpSpPr>
-      <p:grpSpPr/>
+      <p:grpSpPr>
+        <a:xfrm>
+          <a:off x="0" y="0"/>
+          <a:ext cx="0" cy="0"/>
+          <a:chOff x="0" y="0"/>
+          <a:chExt cx="0" cy="0"/>
+        </a:xfrm>
+      </p:grpSpPr>
       <p:sp>
         <p:nvSpPr>
           <p:cNvPr id="2" name="Title 1"/>
@@ -7669,7 +7819,7 @@
                 </a:solidFill>
                 <a:latin typeface="Space Grotesk"/>
               </a:rPr>
-              <a:t>解決方案：AI 地圖</a:t>
+              <a:t>網站架構（Site Map）</a:t>
             </a:r>
           </a:p>
         </p:txBody>
@@ -7688,7 +7838,9 @@
         <p:txBody>
           <a:bodyPr/>
           <a:lstStyle/>
-          <a:p/>
+          <a:p>
+            <a:endParaRPr/>
+          </a:p>
         </p:txBody>
       </p:sp>
       <p:sp>
@@ -7700,7 +7852,7 @@
         <p:spPr>
           <a:xfrm>
             <a:off x="0" y="0"/>
-            <a:ext cx="12188952" cy="502920"/>
+            <a:ext cx="9144000" cy="429768"/>
           </a:xfrm>
           <a:prstGeom prst="rect">
             <a:avLst/>
@@ -7731,6 +7883,7 @@
           <a:lstStyle/>
           <a:p>
             <a:pPr algn="ctr"/>
+            <a:endParaRPr/>
           </a:p>
         </p:txBody>
       </p:sp>
@@ -7743,7 +7896,7 @@
         <p:spPr>
           <a:xfrm>
             <a:off x="0" y="429768"/>
-            <a:ext cx="12188952" cy="73152"/>
+            <a:ext cx="9144000" cy="62512"/>
           </a:xfrm>
           <a:prstGeom prst="rect">
             <a:avLst/>
@@ -7774,6 +7927,7 @@
           <a:lstStyle/>
           <a:p>
             <a:pPr algn="ctr"/>
+            <a:endParaRPr/>
           </a:p>
         </p:txBody>
       </p:sp>
@@ -7817,6 +7971,7 @@
           <a:lstStyle/>
           <a:p>
             <a:pPr algn="ctr"/>
+            <a:endParaRPr/>
           </a:p>
         </p:txBody>
       </p:sp>
@@ -7851,7 +8006,7 @@
               </a:defRPr>
             </a:pPr>
             <a:r>
-              <a:t>解決方案：AI 地圖</a:t>
+              <a:t>網站架構（Site Map）</a:t>
             </a:r>
           </a:p>
         </p:txBody>
@@ -7864,7 +8019,7 @@
         </p:nvSpPr>
         <p:spPr>
           <a:xfrm>
-            <a:off x="9326880" y="73152"/>
+            <a:off x="6537960" y="98591"/>
             <a:ext cx="2377440" cy="274320"/>
           </a:xfrm>
           <a:prstGeom prst="rect">
@@ -7887,6 +8042,7 @@
               </a:defRPr>
             </a:pPr>
             <a:r>
+              <a:rPr dirty="0"/>
               <a:t>AI Explorer</a:t>
             </a:r>
           </a:p>
@@ -7900,8 +8056,8 @@
         </p:nvSpPr>
         <p:spPr>
           <a:xfrm>
-            <a:off x="685800" y="1554480"/>
-            <a:ext cx="10881360" cy="4526280"/>
+            <a:off x="457200" y="1600199"/>
+            <a:ext cx="8229600" cy="4525963"/>
           </a:xfrm>
           <a:prstGeom prst="roundRect">
             <a:avLst/>
@@ -7934,6 +8090,7 @@
           <a:lstStyle/>
           <a:p>
             <a:pPr algn="ctr"/>
+            <a:endParaRPr/>
           </a:p>
         </p:txBody>
       </p:sp>
@@ -7946,7 +8103,82 @@
         <p:spPr>
           <a:xfrm>
             <a:off x="960120" y="1828800"/>
-            <a:ext cx="10241280" cy="4023360"/>
+            <a:ext cx="7726680" cy="1200329"/>
+          </a:xfrm>
+          <a:prstGeom prst="rect">
+            <a:avLst/>
+          </a:prstGeom>
+          <a:noFill/>
+        </p:spPr>
+        <p:txBody>
+          <a:bodyPr wrap="square">
+            <a:spAutoFit/>
+          </a:bodyPr>
+          <a:lstStyle/>
+          <a:p>
+            <a:pPr>
+              <a:defRPr sz="1800">
+                <a:solidFill>
+                  <a:srgbClr val="ECF4FF"/>
+                </a:solidFill>
+                <a:latin typeface="Noto Sans TC"/>
+              </a:defRPr>
+            </a:pPr>
+            <a:r>
+              <a:t>• Home：專案入口與 CTA</a:t>
+            </a:r>
+          </a:p>
+          <a:p>
+            <a:pPr>
+              <a:defRPr sz="1800">
+                <a:solidFill>
+                  <a:srgbClr val="ECF4FF"/>
+                </a:solidFill>
+                <a:latin typeface="Noto Sans TC"/>
+              </a:defRPr>
+            </a:pPr>
+            <a:r>
+              <a:t>• Map：互動 AI 地圖核心頁（左地圖右面板）</a:t>
+            </a:r>
+          </a:p>
+          <a:p>
+            <a:pPr>
+              <a:defRPr sz="1800">
+                <a:solidFill>
+                  <a:srgbClr val="ECF4FF"/>
+                </a:solidFill>
+                <a:latin typeface="Noto Sans TC"/>
+              </a:defRPr>
+            </a:pPr>
+            <a:r>
+              <a:t>• Topics：22 節點主題索引</a:t>
+            </a:r>
+          </a:p>
+          <a:p>
+            <a:pPr>
+              <a:defRPr sz="1800">
+                <a:solidFill>
+                  <a:srgbClr val="ECF4FF"/>
+                </a:solidFill>
+                <a:latin typeface="Noto Sans TC"/>
+              </a:defRPr>
+            </a:pPr>
+            <a:r>
+              <a:t>• About：專案與資料來源說明</a:t>
+            </a:r>
+          </a:p>
+        </p:txBody>
+      </p:sp>
+      <p:sp>
+        <p:nvSpPr>
+          <p:cNvPr id="11" name="TextBox 10"/>
+          <p:cNvSpPr txBox="1"/>
+          <p:nvPr/>
+        </p:nvSpPr>
+        <p:spPr>
+          <a:xfrm>
+            <a:off x="11155680" y="6473952"/>
+            <a:ext cx="731520" cy="219456"/>
           </a:xfrm>
           <a:prstGeom prst="rect">
             <a:avLst/>
@@ -7959,68 +8191,6 @@
           </a:bodyPr>
           <a:lstStyle/>
           <a:p>
-            <a:pPr>
-              <a:defRPr sz="1800">
-                <a:solidFill>
-                  <a:srgbClr val="ECF4FF"/>
-                </a:solidFill>
-                <a:latin typeface="Noto Sans TC"/>
-              </a:defRPr>
-            </a:pPr>
-            <a:r>
-              <a:t>• 核心概念：把 AI 發展做成可點擊科技樹</a:t>
-            </a:r>
-          </a:p>
-          <a:p>
-            <a:pPr>
-              <a:defRPr sz="1800">
-                <a:solidFill>
-                  <a:srgbClr val="ECF4FF"/>
-                </a:solidFill>
-                <a:latin typeface="Noto Sans TC"/>
-              </a:defRPr>
-            </a:pPr>
-            <a:r>
-              <a:t>• 學習流程：點節點 -&gt; 看摘要 -&gt; 看影片 -&gt; 查來源 -&gt; 做測驗</a:t>
-            </a:r>
-          </a:p>
-          <a:p>
-            <a:pPr>
-              <a:defRPr sz="1800">
-                <a:solidFill>
-                  <a:srgbClr val="ECF4FF"/>
-                </a:solidFill>
-                <a:latin typeface="Noto Sans TC"/>
-              </a:defRPr>
-            </a:pPr>
-            <a:r>
-              <a:t>• 目標：讓非資訊背景也能建立完整脈絡</a:t>
-            </a:r>
-          </a:p>
-        </p:txBody>
-      </p:sp>
-      <p:sp>
-        <p:nvSpPr>
-          <p:cNvPr id="11" name="TextBox 10"/>
-          <p:cNvSpPr txBox="1"/>
-          <p:nvPr/>
-        </p:nvSpPr>
-        <p:spPr>
-          <a:xfrm>
-            <a:off x="11155680" y="6473952"/>
-            <a:ext cx="731520" cy="219456"/>
-          </a:xfrm>
-          <a:prstGeom prst="rect">
-            <a:avLst/>
-          </a:prstGeom>
-          <a:noFill/>
-        </p:spPr>
-        <p:txBody>
-          <a:bodyPr wrap="none">
-            <a:spAutoFit/>
-          </a:bodyPr>
-          <a:lstStyle/>
-          <a:p>
             <a:pPr algn="r">
               <a:defRPr sz="1000">
                 <a:solidFill>
@@ -8030,7 +8200,7 @@
               </a:defRPr>
             </a:pPr>
             <a:r>
-              <a:t>4</a:t>
+              <a:t>6</a:t>
             </a:r>
           </a:p>
         </p:txBody>
@@ -8043,8 +8213,8 @@
 </p:sld>
 </file>
 
-<file path=ppt/slides/slide5.xml><?xml version="1.0" encoding="utf-8"?>
-<p:sld xmlns:a="http://schemas.openxmlformats.org/drawingml/2006/main" xmlns:p="http://schemas.openxmlformats.org/presentationml/2006/main" xmlns:r="http://schemas.openxmlformats.org/officeDocument/2006/relationships">
+<file path=ppt/slides/slide7.xml><?xml version="1.0" encoding="utf-8"?>
+<p:sld xmlns:a="http://schemas.openxmlformats.org/drawingml/2006/main" xmlns:r="http://schemas.openxmlformats.org/officeDocument/2006/relationships" xmlns:p="http://schemas.openxmlformats.org/presentationml/2006/main">
   <p:cSld>
     <p:bg>
       <p:bgPr>
@@ -8060,7 +8230,14 @@
         <p:cNvGrpSpPr/>
         <p:nvPr/>
       </p:nvGrpSpPr>
-      <p:grpSpPr/>
+      <p:grpSpPr>
+        <a:xfrm>
+          <a:off x="0" y="0"/>
+          <a:ext cx="0" cy="0"/>
+          <a:chOff x="0" y="0"/>
+          <a:chExt cx="0" cy="0"/>
+        </a:xfrm>
+      </p:grpSpPr>
       <p:sp>
         <p:nvSpPr>
           <p:cNvPr id="2" name="Title 1"/>
@@ -8083,7 +8260,7 @@
                 </a:solidFill>
                 <a:latin typeface="Space Grotesk"/>
               </a:rPr>
-              <a:t>目標受眾</a:t>
+              <a:t>AI 地圖設計概念</a:t>
             </a:r>
           </a:p>
         </p:txBody>
@@ -8102,7 +8279,9 @@
         <p:txBody>
           <a:bodyPr/>
           <a:lstStyle/>
-          <a:p/>
+          <a:p>
+            <a:endParaRPr/>
+          </a:p>
         </p:txBody>
       </p:sp>
       <p:sp>
@@ -8114,7 +8293,7 @@
         <p:spPr>
           <a:xfrm>
             <a:off x="0" y="0"/>
-            <a:ext cx="12188952" cy="502920"/>
+            <a:ext cx="9144000" cy="502920"/>
           </a:xfrm>
           <a:prstGeom prst="rect">
             <a:avLst/>
@@ -8145,6 +8324,7 @@
           <a:lstStyle/>
           <a:p>
             <a:pPr algn="ctr"/>
+            <a:endParaRPr/>
           </a:p>
         </p:txBody>
       </p:sp>
@@ -8157,7 +8337,7 @@
         <p:spPr>
           <a:xfrm>
             <a:off x="0" y="429768"/>
-            <a:ext cx="12188952" cy="73152"/>
+            <a:ext cx="9144000" cy="73152"/>
           </a:xfrm>
           <a:prstGeom prst="rect">
             <a:avLst/>
@@ -8188,6 +8368,7 @@
           <a:lstStyle/>
           <a:p>
             <a:pPr algn="ctr"/>
+            <a:endParaRPr/>
           </a:p>
         </p:txBody>
       </p:sp>
@@ -8231,6 +8412,7 @@
           <a:lstStyle/>
           <a:p>
             <a:pPr algn="ctr"/>
+            <a:endParaRPr/>
           </a:p>
         </p:txBody>
       </p:sp>
@@ -8265,7 +8447,7 @@
               </a:defRPr>
             </a:pPr>
             <a:r>
-              <a:t>目標受眾</a:t>
+              <a:t>AI 地圖設計概念</a:t>
             </a:r>
           </a:p>
         </p:txBody>
@@ -8278,7 +8460,7 @@
         </p:nvSpPr>
         <p:spPr>
           <a:xfrm>
-            <a:off x="9326880" y="73152"/>
+            <a:off x="6217920" y="104222"/>
             <a:ext cx="2377440" cy="274320"/>
           </a:xfrm>
           <a:prstGeom prst="rect">
@@ -8315,7 +8497,7 @@
         <p:spPr>
           <a:xfrm>
             <a:off x="685800" y="1554480"/>
-            <a:ext cx="10881360" cy="4526280"/>
+            <a:ext cx="8001000" cy="4384204"/>
           </a:xfrm>
           <a:prstGeom prst="roundRect">
             <a:avLst/>
@@ -8348,6 +8530,7 @@
           <a:lstStyle/>
           <a:p>
             <a:pPr algn="ctr"/>
+            <a:endParaRPr/>
           </a:p>
         </p:txBody>
       </p:sp>
@@ -8360,7 +8543,82 @@
         <p:spPr>
           <a:xfrm>
             <a:off x="960120" y="1828800"/>
-            <a:ext cx="10241280" cy="4023360"/>
+            <a:ext cx="7498080" cy="1200329"/>
+          </a:xfrm>
+          <a:prstGeom prst="rect">
+            <a:avLst/>
+          </a:prstGeom>
+          <a:noFill/>
+        </p:spPr>
+        <p:txBody>
+          <a:bodyPr wrap="square">
+            <a:spAutoFit/>
+          </a:bodyPr>
+          <a:lstStyle/>
+          <a:p>
+            <a:pPr>
+              <a:defRPr sz="1800">
+                <a:solidFill>
+                  <a:srgbClr val="ECF4FF"/>
+                </a:solidFill>
+                <a:latin typeface="Noto Sans TC"/>
+              </a:defRPr>
+            </a:pPr>
+            <a:r>
+              <a:t>• 橫軸：時間（1950 -&gt; 2023）</a:t>
+            </a:r>
+          </a:p>
+          <a:p>
+            <a:pPr>
+              <a:defRPr sz="1800">
+                <a:solidFill>
+                  <a:srgbClr val="ECF4FF"/>
+                </a:solidFill>
+                <a:latin typeface="Noto Sans TC"/>
+              </a:defRPr>
+            </a:pPr>
+            <a:r>
+              <a:t>• 縱向：技術類別（理論、模型、訓練、突破、寒冬）</a:t>
+            </a:r>
+          </a:p>
+          <a:p>
+            <a:pPr>
+              <a:defRPr sz="1800">
+                <a:solidFill>
+                  <a:srgbClr val="ECF4FF"/>
+                </a:solidFill>
+                <a:latin typeface="Noto Sans TC"/>
+              </a:defRPr>
+            </a:pPr>
+            <a:r>
+              <a:t>• 節點連線：表示技術影響關係</a:t>
+            </a:r>
+          </a:p>
+          <a:p>
+            <a:pPr>
+              <a:defRPr sz="1800">
+                <a:solidFill>
+                  <a:srgbClr val="ECF4FF"/>
+                </a:solidFill>
+                <a:latin typeface="Noto Sans TC"/>
+              </a:defRPr>
+            </a:pPr>
+            <a:r>
+              <a:t>• 互動：點擊、縮放、拖曳、年代篩選</a:t>
+            </a:r>
+          </a:p>
+        </p:txBody>
+      </p:sp>
+      <p:sp>
+        <p:nvSpPr>
+          <p:cNvPr id="11" name="TextBox 10"/>
+          <p:cNvSpPr txBox="1"/>
+          <p:nvPr/>
+        </p:nvSpPr>
+        <p:spPr>
+          <a:xfrm>
+            <a:off x="11155680" y="6473952"/>
+            <a:ext cx="731520" cy="219456"/>
           </a:xfrm>
           <a:prstGeom prst="rect">
             <a:avLst/>
@@ -8373,68 +8631,6 @@
           </a:bodyPr>
           <a:lstStyle/>
           <a:p>
-            <a:pPr>
-              <a:defRPr sz="1800">
-                <a:solidFill>
-                  <a:srgbClr val="ECF4FF"/>
-                </a:solidFill>
-                <a:latin typeface="Noto Sans TC"/>
-              </a:defRPr>
-            </a:pPr>
-            <a:r>
-              <a:t>• 完全不懂 AI 的一般使用者（同學、家人、非資訊背景）</a:t>
-            </a:r>
-          </a:p>
-          <a:p>
-            <a:pPr>
-              <a:defRPr sz="1800">
-                <a:solidFill>
-                  <a:srgbClr val="ECF4FF"/>
-                </a:solidFill>
-                <a:latin typeface="Noto Sans TC"/>
-              </a:defRPr>
-            </a:pPr>
-            <a:r>
-              <a:t>• 需要快速理解 AI 發展脈絡的報告觀眾</a:t>
-            </a:r>
-          </a:p>
-          <a:p>
-            <a:pPr>
-              <a:defRPr sz="1800">
-                <a:solidFill>
-                  <a:srgbClr val="ECF4FF"/>
-                </a:solidFill>
-                <a:latin typeface="Noto Sans TC"/>
-              </a:defRPr>
-            </a:pPr>
-            <a:r>
-              <a:t>• 想用互動方式學習而非只看長文的人</a:t>
-            </a:r>
-          </a:p>
-        </p:txBody>
-      </p:sp>
-      <p:sp>
-        <p:nvSpPr>
-          <p:cNvPr id="11" name="TextBox 10"/>
-          <p:cNvSpPr txBox="1"/>
-          <p:nvPr/>
-        </p:nvSpPr>
-        <p:spPr>
-          <a:xfrm>
-            <a:off x="11155680" y="6473952"/>
-            <a:ext cx="731520" cy="219456"/>
-          </a:xfrm>
-          <a:prstGeom prst="rect">
-            <a:avLst/>
-          </a:prstGeom>
-          <a:noFill/>
-        </p:spPr>
-        <p:txBody>
-          <a:bodyPr wrap="none">
-            <a:spAutoFit/>
-          </a:bodyPr>
-          <a:lstStyle/>
-          <a:p>
             <a:pPr algn="r">
               <a:defRPr sz="1000">
                 <a:solidFill>
@@ -8444,7 +8640,7 @@
               </a:defRPr>
             </a:pPr>
             <a:r>
-              <a:t>5</a:t>
+              <a:t>7</a:t>
             </a:r>
           </a:p>
         </p:txBody>
@@ -8457,8 +8653,8 @@
 </p:sld>
 </file>
 
-<file path=ppt/slides/slide6.xml><?xml version="1.0" encoding="utf-8"?>
-<p:sld xmlns:a="http://schemas.openxmlformats.org/drawingml/2006/main" xmlns:p="http://schemas.openxmlformats.org/presentationml/2006/main" xmlns:r="http://schemas.openxmlformats.org/officeDocument/2006/relationships">
+<file path=ppt/slides/slide8.xml><?xml version="1.0" encoding="utf-8"?>
+<p:sld xmlns:a="http://schemas.openxmlformats.org/drawingml/2006/main" xmlns:r="http://schemas.openxmlformats.org/officeDocument/2006/relationships" xmlns:p="http://schemas.openxmlformats.org/presentationml/2006/main">
   <p:cSld>
     <p:bg>
       <p:bgPr>
@@ -8474,7 +8670,14 @@
         <p:cNvGrpSpPr/>
         <p:nvPr/>
       </p:nvGrpSpPr>
-      <p:grpSpPr/>
+      <p:grpSpPr>
+        <a:xfrm>
+          <a:off x="0" y="0"/>
+          <a:ext cx="0" cy="0"/>
+          <a:chOff x="0" y="0"/>
+          <a:chExt cx="0" cy="0"/>
+        </a:xfrm>
+      </p:grpSpPr>
       <p:sp>
         <p:nvSpPr>
           <p:cNvPr id="2" name="Title 1"/>
@@ -8497,38 +8700,21 @@
                 </a:solidFill>
                 <a:latin typeface="Space Grotesk"/>
               </a:rPr>
-              <a:t>網站架構（Site Map）</a:t>
-            </a:r>
-          </a:p>
-        </p:txBody>
-      </p:sp>
-      <p:sp>
-        <p:nvSpPr>
-          <p:cNvPr id="3" name="Content Placeholder 2"/>
-          <p:cNvSpPr>
-            <a:spLocks noGrp="1"/>
-          </p:cNvSpPr>
-          <p:nvPr>
-            <p:ph idx="1"/>
-          </p:nvPr>
-        </p:nvSpPr>
-        <p:spPr/>
-        <p:txBody>
-          <a:bodyPr/>
-          <a:lstStyle/>
-          <a:p/>
-        </p:txBody>
-      </p:sp>
-      <p:sp>
-        <p:nvSpPr>
-          <p:cNvPr id="4" name="Rectangle 3"/>
+              <a:t>地圖截圖全覽</a:t>
+            </a:r>
+          </a:p>
+        </p:txBody>
+      </p:sp>
+      <p:sp>
+        <p:nvSpPr>
+          <p:cNvPr id="3" name="Rectangle 2"/>
           <p:cNvSpPr/>
           <p:nvPr/>
         </p:nvSpPr>
         <p:spPr>
           <a:xfrm>
             <a:off x="0" y="0"/>
-            <a:ext cx="12188952" cy="502920"/>
+            <a:ext cx="9144000" cy="429768"/>
           </a:xfrm>
           <a:prstGeom prst="rect">
             <a:avLst/>
@@ -8559,19 +8745,20 @@
           <a:lstStyle/>
           <a:p>
             <a:pPr algn="ctr"/>
-          </a:p>
-        </p:txBody>
-      </p:sp>
-      <p:sp>
-        <p:nvSpPr>
-          <p:cNvPr id="5" name="Rectangle 4"/>
+            <a:endParaRPr/>
+          </a:p>
+        </p:txBody>
+      </p:sp>
+      <p:sp>
+        <p:nvSpPr>
+          <p:cNvPr id="4" name="Rectangle 3"/>
           <p:cNvSpPr/>
           <p:nvPr/>
         </p:nvSpPr>
         <p:spPr>
           <a:xfrm>
             <a:off x="0" y="429768"/>
-            <a:ext cx="12188952" cy="73152"/>
+            <a:ext cx="9144000" cy="62512"/>
           </a:xfrm>
           <a:prstGeom prst="rect">
             <a:avLst/>
@@ -8602,12 +8789,13 @@
           <a:lstStyle/>
           <a:p>
             <a:pPr algn="ctr"/>
-          </a:p>
-        </p:txBody>
-      </p:sp>
-      <p:sp>
-        <p:nvSpPr>
-          <p:cNvPr id="6" name="Rectangle 5"/>
+            <a:endParaRPr/>
+          </a:p>
+        </p:txBody>
+      </p:sp>
+      <p:sp>
+        <p:nvSpPr>
+          <p:cNvPr id="5" name="Rectangle 4"/>
           <p:cNvSpPr/>
           <p:nvPr/>
         </p:nvSpPr>
@@ -8645,12 +8833,13 @@
           <a:lstStyle/>
           <a:p>
             <a:pPr algn="ctr"/>
-          </a:p>
-        </p:txBody>
-      </p:sp>
-      <p:sp>
-        <p:nvSpPr>
-          <p:cNvPr id="7" name="TextBox 6"/>
+            <a:endParaRPr/>
+          </a:p>
+        </p:txBody>
+      </p:sp>
+      <p:sp>
+        <p:nvSpPr>
+          <p:cNvPr id="6" name="TextBox 5"/>
           <p:cNvSpPr txBox="1"/>
           <p:nvPr/>
         </p:nvSpPr>
@@ -8679,20 +8868,20 @@
               </a:defRPr>
             </a:pPr>
             <a:r>
-              <a:t>網站架構（Site Map）</a:t>
-            </a:r>
-          </a:p>
-        </p:txBody>
-      </p:sp>
-      <p:sp>
-        <p:nvSpPr>
-          <p:cNvPr id="8" name="TextBox 7"/>
+              <a:t>地圖截圖全覽</a:t>
+            </a:r>
+          </a:p>
+        </p:txBody>
+      </p:sp>
+      <p:sp>
+        <p:nvSpPr>
+          <p:cNvPr id="7" name="TextBox 6"/>
           <p:cNvSpPr txBox="1"/>
           <p:nvPr/>
         </p:nvSpPr>
         <p:spPr>
           <a:xfrm>
-            <a:off x="9326880" y="73152"/>
+            <a:off x="6309360" y="103534"/>
             <a:ext cx="2377440" cy="274320"/>
           </a:xfrm>
           <a:prstGeom prst="rect">
@@ -8701,7 +8890,7 @@
           <a:noFill/>
         </p:spPr>
         <p:txBody>
-          <a:bodyPr wrap="none">
+          <a:bodyPr wrap="square">
             <a:spAutoFit/>
           </a:bodyPr>
           <a:lstStyle/>
@@ -8715,6 +8904,7 @@
               </a:defRPr>
             </a:pPr>
             <a:r>
+              <a:rPr dirty="0"/>
               <a:t>AI Explorer</a:t>
             </a:r>
           </a:p>
@@ -8722,14 +8912,14 @@
       </p:sp>
       <p:sp>
         <p:nvSpPr>
-          <p:cNvPr id="9" name="Rounded Rectangle 8"/>
+          <p:cNvPr id="8" name="Rounded Rectangle 7"/>
           <p:cNvSpPr/>
           <p:nvPr/>
         </p:nvSpPr>
         <p:spPr>
           <a:xfrm>
-            <a:off x="685800" y="1554480"/>
-            <a:ext cx="10881360" cy="4526280"/>
+            <a:off x="924232" y="2806874"/>
+            <a:ext cx="7167716" cy="3365961"/>
           </a:xfrm>
           <a:prstGeom prst="roundRect">
             <a:avLst/>
@@ -8762,19 +8952,176 @@
           <a:lstStyle/>
           <a:p>
             <a:pPr algn="ctr"/>
-          </a:p>
-        </p:txBody>
-      </p:sp>
-      <p:sp>
-        <p:nvSpPr>
-          <p:cNvPr id="10" name="TextBox 9"/>
+            <a:endParaRPr/>
+          </a:p>
+        </p:txBody>
+      </p:sp>
+      <p:sp>
+        <p:nvSpPr>
+          <p:cNvPr id="10" name="Rounded Rectangle 9"/>
+          <p:cNvSpPr/>
+          <p:nvPr/>
+        </p:nvSpPr>
+        <p:spPr>
+          <a:xfrm>
+            <a:off x="2468880" y="1248031"/>
+            <a:ext cx="4240653" cy="1472971"/>
+          </a:xfrm>
+          <a:prstGeom prst="roundRect">
+            <a:avLst/>
+          </a:prstGeom>
+          <a:solidFill>
+            <a:srgbClr val="0D223D"/>
+          </a:solidFill>
+          <a:ln w="12700">
+            <a:solidFill>
+              <a:srgbClr val="79F0C6"/>
+            </a:solidFill>
+          </a:ln>
+        </p:spPr>
+        <p:style>
+          <a:lnRef idx="1">
+            <a:schemeClr val="accent1"/>
+          </a:lnRef>
+          <a:fillRef idx="3">
+            <a:schemeClr val="accent1"/>
+          </a:fillRef>
+          <a:effectRef idx="2">
+            <a:schemeClr val="accent1"/>
+          </a:effectRef>
+          <a:fontRef idx="minor">
+            <a:schemeClr val="lt1"/>
+          </a:fontRef>
+        </p:style>
+        <p:txBody>
+          <a:bodyPr rtlCol="0" anchor="ctr"/>
+          <a:lstStyle/>
+          <a:p>
+            <a:pPr algn="ctr"/>
+            <a:endParaRPr/>
+          </a:p>
+        </p:txBody>
+      </p:sp>
+      <p:sp>
+        <p:nvSpPr>
+          <p:cNvPr id="11" name="TextBox 10"/>
           <p:cNvSpPr txBox="1"/>
           <p:nvPr/>
         </p:nvSpPr>
         <p:spPr>
           <a:xfrm>
-            <a:off x="960120" y="1828800"/>
-            <a:ext cx="10241280" cy="4023360"/>
+            <a:off x="2760405" y="1333904"/>
+            <a:ext cx="3866537" cy="1077218"/>
+          </a:xfrm>
+          <a:prstGeom prst="rect">
+            <a:avLst/>
+          </a:prstGeom>
+          <a:noFill/>
+        </p:spPr>
+        <p:txBody>
+          <a:bodyPr wrap="square">
+            <a:spAutoFit/>
+          </a:bodyPr>
+          <a:lstStyle/>
+          <a:p>
+            <a:pPr>
+              <a:defRPr sz="1600">
+                <a:solidFill>
+                  <a:srgbClr val="ECF4FF"/>
+                </a:solidFill>
+                <a:latin typeface="Noto Sans TC"/>
+              </a:defRPr>
+            </a:pPr>
+            <a:r>
+              <a:rPr dirty="0"/>
+              <a:t>• </a:t>
+            </a:r>
+            <a:r>
+              <a:rPr dirty="0" err="1"/>
+              <a:t>左側</a:t>
+            </a:r>
+            <a:r>
+              <a:rPr dirty="0"/>
+              <a:t> 65%：SVG </a:t>
+            </a:r>
+            <a:r>
+              <a:rPr dirty="0" err="1"/>
+              <a:t>互動地圖</a:t>
+            </a:r>
+            <a:endParaRPr dirty="0"/>
+          </a:p>
+          <a:p>
+            <a:pPr>
+              <a:defRPr sz="1600">
+                <a:solidFill>
+                  <a:srgbClr val="ECF4FF"/>
+                </a:solidFill>
+                <a:latin typeface="Noto Sans TC"/>
+              </a:defRPr>
+            </a:pPr>
+            <a:r>
+              <a:rPr dirty="0"/>
+              <a:t>• </a:t>
+            </a:r>
+            <a:r>
+              <a:rPr dirty="0" err="1"/>
+              <a:t>右側</a:t>
+            </a:r>
+            <a:r>
+              <a:rPr dirty="0"/>
+              <a:t> 35%：</a:t>
+            </a:r>
+            <a:r>
+              <a:rPr dirty="0" err="1"/>
+              <a:t>節點詳情面板</a:t>
+            </a:r>
+            <a:endParaRPr dirty="0"/>
+          </a:p>
+          <a:p>
+            <a:pPr>
+              <a:defRPr sz="1600">
+                <a:solidFill>
+                  <a:srgbClr val="ECF4FF"/>
+                </a:solidFill>
+                <a:latin typeface="Noto Sans TC"/>
+              </a:defRPr>
+            </a:pPr>
+            <a:r>
+              <a:rPr dirty="0"/>
+              <a:t>• 上方：年代篩選（1950s -&gt; 2020s+）</a:t>
+            </a:r>
+          </a:p>
+          <a:p>
+            <a:pPr>
+              <a:defRPr sz="1600">
+                <a:solidFill>
+                  <a:srgbClr val="ECF4FF"/>
+                </a:solidFill>
+                <a:latin typeface="Noto Sans TC"/>
+              </a:defRPr>
+            </a:pPr>
+            <a:r>
+              <a:rPr dirty="0"/>
+              <a:t>• </a:t>
+            </a:r>
+            <a:r>
+              <a:rPr dirty="0" err="1"/>
+              <a:t>面板內容：摘要、影片、來源、測驗</a:t>
+            </a:r>
+            <a:endParaRPr dirty="0"/>
+          </a:p>
+        </p:txBody>
+      </p:sp>
+      <p:sp>
+        <p:nvSpPr>
+          <p:cNvPr id="12" name="TextBox 11"/>
+          <p:cNvSpPr txBox="1"/>
+          <p:nvPr/>
+        </p:nvSpPr>
+        <p:spPr>
+          <a:xfrm>
+            <a:off x="11155680" y="6473952"/>
+            <a:ext cx="731520" cy="219456"/>
           </a:xfrm>
           <a:prstGeom prst="rect">
             <a:avLst/>
@@ -8787,81 +9134,6 @@
           </a:bodyPr>
           <a:lstStyle/>
           <a:p>
-            <a:pPr>
-              <a:defRPr sz="1800">
-                <a:solidFill>
-                  <a:srgbClr val="ECF4FF"/>
-                </a:solidFill>
-                <a:latin typeface="Noto Sans TC"/>
-              </a:defRPr>
-            </a:pPr>
-            <a:r>
-              <a:t>• Home：專案入口與 CTA</a:t>
-            </a:r>
-          </a:p>
-          <a:p>
-            <a:pPr>
-              <a:defRPr sz="1800">
-                <a:solidFill>
-                  <a:srgbClr val="ECF4FF"/>
-                </a:solidFill>
-                <a:latin typeface="Noto Sans TC"/>
-              </a:defRPr>
-            </a:pPr>
-            <a:r>
-              <a:t>• Map：互動 AI 地圖核心頁（左地圖右面板）</a:t>
-            </a:r>
-          </a:p>
-          <a:p>
-            <a:pPr>
-              <a:defRPr sz="1800">
-                <a:solidFill>
-                  <a:srgbClr val="ECF4FF"/>
-                </a:solidFill>
-                <a:latin typeface="Noto Sans TC"/>
-              </a:defRPr>
-            </a:pPr>
-            <a:r>
-              <a:t>• Topics：22 節點主題索引</a:t>
-            </a:r>
-          </a:p>
-          <a:p>
-            <a:pPr>
-              <a:defRPr sz="1800">
-                <a:solidFill>
-                  <a:srgbClr val="ECF4FF"/>
-                </a:solidFill>
-                <a:latin typeface="Noto Sans TC"/>
-              </a:defRPr>
-            </a:pPr>
-            <a:r>
-              <a:t>• About：專案與資料來源說明</a:t>
-            </a:r>
-          </a:p>
-        </p:txBody>
-      </p:sp>
-      <p:sp>
-        <p:nvSpPr>
-          <p:cNvPr id="11" name="TextBox 10"/>
-          <p:cNvSpPr txBox="1"/>
-          <p:nvPr/>
-        </p:nvSpPr>
-        <p:spPr>
-          <a:xfrm>
-            <a:off x="11155680" y="6473952"/>
-            <a:ext cx="731520" cy="219456"/>
-          </a:xfrm>
-          <a:prstGeom prst="rect">
-            <a:avLst/>
-          </a:prstGeom>
-          <a:noFill/>
-        </p:spPr>
-        <p:txBody>
-          <a:bodyPr wrap="none">
-            <a:spAutoFit/>
-          </a:bodyPr>
-          <a:lstStyle/>
-          <a:p>
             <a:pPr algn="r">
               <a:defRPr sz="1000">
                 <a:solidFill>
@@ -8871,7 +9143,7 @@
               </a:defRPr>
             </a:pPr>
             <a:r>
-              <a:t>6</a:t>
+              <a:t>8</a:t>
             </a:r>
           </a:p>
         </p:txBody>
@@ -8884,8 +9156,8 @@
 </p:sld>
 </file>
 
-<file path=ppt/slides/slide7.xml><?xml version="1.0" encoding="utf-8"?>
-<p:sld xmlns:a="http://schemas.openxmlformats.org/drawingml/2006/main" xmlns:p="http://schemas.openxmlformats.org/presentationml/2006/main" xmlns:r="http://schemas.openxmlformats.org/officeDocument/2006/relationships">
+<file path=ppt/slides/slide9.xml><?xml version="1.0" encoding="utf-8"?>
+<p:sld xmlns:a="http://schemas.openxmlformats.org/drawingml/2006/main" xmlns:r="http://schemas.openxmlformats.org/officeDocument/2006/relationships" xmlns:p="http://schemas.openxmlformats.org/presentationml/2006/main">
   <p:cSld>
     <p:bg>
       <p:bgPr>
@@ -8901,7 +9173,14 @@
         <p:cNvGrpSpPr/>
         <p:nvPr/>
       </p:nvGrpSpPr>
-      <p:grpSpPr/>
+      <p:grpSpPr>
+        <a:xfrm>
+          <a:off x="0" y="0"/>
+          <a:ext cx="0" cy="0"/>
+          <a:chOff x="0" y="0"/>
+          <a:chExt cx="0" cy="0"/>
+        </a:xfrm>
+      </p:grpSpPr>
       <p:sp>
         <p:nvSpPr>
           <p:cNvPr id="2" name="Title 1"/>
@@ -8924,38 +9203,21 @@
                 </a:solidFill>
                 <a:latin typeface="Space Grotesk"/>
               </a:rPr>
-              <a:t>AI 地圖設計概念</a:t>
-            </a:r>
-          </a:p>
-        </p:txBody>
-      </p:sp>
-      <p:sp>
-        <p:nvSpPr>
-          <p:cNvPr id="3" name="Content Placeholder 2"/>
-          <p:cNvSpPr>
-            <a:spLocks noGrp="1"/>
-          </p:cNvSpPr>
-          <p:nvPr>
-            <p:ph idx="1"/>
-          </p:nvPr>
-        </p:nvSpPr>
-        <p:spPr/>
-        <p:txBody>
-          <a:bodyPr/>
-          <a:lstStyle/>
-          <a:p/>
-        </p:txBody>
-      </p:sp>
-      <p:sp>
-        <p:nvSpPr>
-          <p:cNvPr id="4" name="Rectangle 3"/>
+              <a:t>節點 Demo 1 — 圖靈測試</a:t>
+            </a:r>
+          </a:p>
+        </p:txBody>
+      </p:sp>
+      <p:sp>
+        <p:nvSpPr>
+          <p:cNvPr id="3" name="Rectangle 2"/>
           <p:cNvSpPr/>
           <p:nvPr/>
         </p:nvSpPr>
         <p:spPr>
           <a:xfrm>
             <a:off x="0" y="0"/>
-            <a:ext cx="12188952" cy="502920"/>
+            <a:ext cx="9144000" cy="502920"/>
           </a:xfrm>
           <a:prstGeom prst="rect">
             <a:avLst/>
@@ -8986,19 +9248,20 @@
           <a:lstStyle/>
           <a:p>
             <a:pPr algn="ctr"/>
-          </a:p>
-        </p:txBody>
-      </p:sp>
-      <p:sp>
-        <p:nvSpPr>
-          <p:cNvPr id="5" name="Rectangle 4"/>
+            <a:endParaRPr/>
+          </a:p>
+        </p:txBody>
+      </p:sp>
+      <p:sp>
+        <p:nvSpPr>
+          <p:cNvPr id="4" name="Rectangle 3"/>
           <p:cNvSpPr/>
           <p:nvPr/>
         </p:nvSpPr>
         <p:spPr>
           <a:xfrm>
             <a:off x="0" y="429768"/>
-            <a:ext cx="12188952" cy="73152"/>
+            <a:ext cx="9144000" cy="73152"/>
           </a:xfrm>
           <a:prstGeom prst="rect">
             <a:avLst/>
@@ -9029,12 +9292,13 @@
           <a:lstStyle/>
           <a:p>
             <a:pPr algn="ctr"/>
-          </a:p>
-        </p:txBody>
-      </p:sp>
-      <p:sp>
-        <p:nvSpPr>
-          <p:cNvPr id="6" name="Rectangle 5"/>
+            <a:endParaRPr/>
+          </a:p>
+        </p:txBody>
+      </p:sp>
+      <p:sp>
+        <p:nvSpPr>
+          <p:cNvPr id="5" name="Rectangle 4"/>
           <p:cNvSpPr/>
           <p:nvPr/>
         </p:nvSpPr>
@@ -9072,12 +9336,13 @@
           <a:lstStyle/>
           <a:p>
             <a:pPr algn="ctr"/>
-          </a:p>
-        </p:txBody>
-      </p:sp>
-      <p:sp>
-        <p:nvSpPr>
-          <p:cNvPr id="7" name="TextBox 6"/>
+            <a:endParaRPr/>
+          </a:p>
+        </p:txBody>
+      </p:sp>
+      <p:sp>
+        <p:nvSpPr>
+          <p:cNvPr id="6" name="TextBox 5"/>
           <p:cNvSpPr txBox="1"/>
           <p:nvPr/>
         </p:nvSpPr>
@@ -9106,20 +9371,20 @@
               </a:defRPr>
             </a:pPr>
             <a:r>
-              <a:t>AI 地圖設計概念</a:t>
-            </a:r>
-          </a:p>
-        </p:txBody>
-      </p:sp>
-      <p:sp>
-        <p:nvSpPr>
-          <p:cNvPr id="8" name="TextBox 7"/>
+              <a:t>節點 Demo 1 — 圖靈測試</a:t>
+            </a:r>
+          </a:p>
+        </p:txBody>
+      </p:sp>
+      <p:sp>
+        <p:nvSpPr>
+          <p:cNvPr id="7" name="TextBox 6"/>
           <p:cNvSpPr txBox="1"/>
           <p:nvPr/>
         </p:nvSpPr>
         <p:spPr>
           <a:xfrm>
-            <a:off x="9326880" y="73152"/>
+            <a:off x="5393977" y="86570"/>
             <a:ext cx="2377440" cy="274320"/>
           </a:xfrm>
           <a:prstGeom prst="rect">
@@ -9149,14 +9414,14 @@
       </p:sp>
       <p:sp>
         <p:nvSpPr>
-          <p:cNvPr id="9" name="Rounded Rectangle 8"/>
+          <p:cNvPr id="8" name="Rounded Rectangle 7"/>
           <p:cNvSpPr/>
           <p:nvPr/>
         </p:nvSpPr>
         <p:spPr>
           <a:xfrm>
-            <a:off x="685800" y="1554480"/>
-            <a:ext cx="10881360" cy="4526280"/>
+            <a:off x="725866" y="2937443"/>
+            <a:ext cx="7692267" cy="3353629"/>
           </a:xfrm>
           <a:prstGeom prst="roundRect">
             <a:avLst/>
@@ -9189,443 +9454,10 @@
           <a:lstStyle/>
           <a:p>
             <a:pPr algn="ctr"/>
-          </a:p>
-        </p:txBody>
-      </p:sp>
-      <p:sp>
-        <p:nvSpPr>
-          <p:cNvPr id="10" name="TextBox 9"/>
-          <p:cNvSpPr txBox="1"/>
-          <p:nvPr/>
-        </p:nvSpPr>
-        <p:spPr>
-          <a:xfrm>
-            <a:off x="960120" y="1828800"/>
-            <a:ext cx="10241280" cy="4023360"/>
-          </a:xfrm>
-          <a:prstGeom prst="rect">
-            <a:avLst/>
-          </a:prstGeom>
-          <a:noFill/>
-        </p:spPr>
-        <p:txBody>
-          <a:bodyPr wrap="none">
-            <a:spAutoFit/>
-          </a:bodyPr>
-          <a:lstStyle/>
-          <a:p>
-            <a:pPr>
-              <a:defRPr sz="1800">
-                <a:solidFill>
-                  <a:srgbClr val="ECF4FF"/>
-                </a:solidFill>
-                <a:latin typeface="Noto Sans TC"/>
-              </a:defRPr>
-            </a:pPr>
-            <a:r>
-              <a:t>• 橫軸：時間（1950 -&gt; 2023）</a:t>
-            </a:r>
-          </a:p>
-          <a:p>
-            <a:pPr>
-              <a:defRPr sz="1800">
-                <a:solidFill>
-                  <a:srgbClr val="ECF4FF"/>
-                </a:solidFill>
-                <a:latin typeface="Noto Sans TC"/>
-              </a:defRPr>
-            </a:pPr>
-            <a:r>
-              <a:t>• 縱向：技術類別（理論、模型、訓練、突破、寒冬）</a:t>
-            </a:r>
-          </a:p>
-          <a:p>
-            <a:pPr>
-              <a:defRPr sz="1800">
-                <a:solidFill>
-                  <a:srgbClr val="ECF4FF"/>
-                </a:solidFill>
-                <a:latin typeface="Noto Sans TC"/>
-              </a:defRPr>
-            </a:pPr>
-            <a:r>
-              <a:t>• 節點連線：表示技術影響關係</a:t>
-            </a:r>
-          </a:p>
-          <a:p>
-            <a:pPr>
-              <a:defRPr sz="1800">
-                <a:solidFill>
-                  <a:srgbClr val="ECF4FF"/>
-                </a:solidFill>
-                <a:latin typeface="Noto Sans TC"/>
-              </a:defRPr>
-            </a:pPr>
-            <a:r>
-              <a:t>• 互動：點擊、縮放、拖曳、年代篩選</a:t>
-            </a:r>
-          </a:p>
-        </p:txBody>
-      </p:sp>
-      <p:sp>
-        <p:nvSpPr>
-          <p:cNvPr id="11" name="TextBox 10"/>
-          <p:cNvSpPr txBox="1"/>
-          <p:nvPr/>
-        </p:nvSpPr>
-        <p:spPr>
-          <a:xfrm>
-            <a:off x="11155680" y="6473952"/>
-            <a:ext cx="731520" cy="219456"/>
-          </a:xfrm>
-          <a:prstGeom prst="rect">
-            <a:avLst/>
-          </a:prstGeom>
-          <a:noFill/>
-        </p:spPr>
-        <p:txBody>
-          <a:bodyPr wrap="none">
-            <a:spAutoFit/>
-          </a:bodyPr>
-          <a:lstStyle/>
-          <a:p>
-            <a:pPr algn="r">
-              <a:defRPr sz="1000">
-                <a:solidFill>
-                  <a:srgbClr val="9DB3CF"/>
-                </a:solidFill>
-                <a:latin typeface="Space Grotesk"/>
-              </a:defRPr>
-            </a:pPr>
-            <a:r>
-              <a:t>7</a:t>
-            </a:r>
-          </a:p>
-        </p:txBody>
-      </p:sp>
-    </p:spTree>
-  </p:cSld>
-  <p:clrMapOvr>
-    <a:masterClrMapping/>
-  </p:clrMapOvr>
-</p:sld>
-</file>
-
-<file path=ppt/slides/slide8.xml><?xml version="1.0" encoding="utf-8"?>
-<p:sld xmlns:a="http://schemas.openxmlformats.org/drawingml/2006/main" xmlns:p="http://schemas.openxmlformats.org/presentationml/2006/main" xmlns:r="http://schemas.openxmlformats.org/officeDocument/2006/relationships">
-  <p:cSld>
-    <p:bg>
-      <p:bgPr>
-        <a:solidFill>
-          <a:srgbClr val="071226"/>
-        </a:solidFill>
-        <a:effectLst/>
-      </p:bgPr>
-    </p:bg>
-    <p:spTree>
-      <p:nvGrpSpPr>
-        <p:cNvPr id="1" name=""/>
-        <p:cNvGrpSpPr/>
-        <p:nvPr/>
-      </p:nvGrpSpPr>
-      <p:grpSpPr/>
-      <p:sp>
-        <p:nvSpPr>
-          <p:cNvPr id="2" name="Title 1"/>
-          <p:cNvSpPr>
-            <a:spLocks noGrp="1"/>
-          </p:cNvSpPr>
-          <p:nvPr>
-            <p:ph type="title"/>
-          </p:nvPr>
-        </p:nvSpPr>
-        <p:spPr/>
-        <p:txBody>
-          <a:bodyPr/>
-          <a:lstStyle/>
-          <a:p>
-            <a:r>
-              <a:rPr sz="3200" b="1">
-                <a:solidFill>
-                  <a:srgbClr val="ECF4FF"/>
-                </a:solidFill>
-                <a:latin typeface="Space Grotesk"/>
-              </a:rPr>
-              <a:t>地圖截圖全覽</a:t>
-            </a:r>
-          </a:p>
-        </p:txBody>
-      </p:sp>
-      <p:sp>
-        <p:nvSpPr>
-          <p:cNvPr id="3" name="Rectangle 2"/>
-          <p:cNvSpPr/>
-          <p:nvPr/>
-        </p:nvSpPr>
-        <p:spPr>
-          <a:xfrm>
-            <a:off x="0" y="0"/>
-            <a:ext cx="12188952" cy="502920"/>
-          </a:xfrm>
-          <a:prstGeom prst="rect">
-            <a:avLst/>
-          </a:prstGeom>
-          <a:solidFill>
-            <a:srgbClr val="0D223D"/>
-          </a:solidFill>
-          <a:ln>
-            <a:noFill/>
-          </a:ln>
-        </p:spPr>
-        <p:style>
-          <a:lnRef idx="1">
-            <a:schemeClr val="accent1"/>
-          </a:lnRef>
-          <a:fillRef idx="3">
-            <a:schemeClr val="accent1"/>
-          </a:fillRef>
-          <a:effectRef idx="2">
-            <a:schemeClr val="accent1"/>
-          </a:effectRef>
-          <a:fontRef idx="minor">
-            <a:schemeClr val="lt1"/>
-          </a:fontRef>
-        </p:style>
-        <p:txBody>
-          <a:bodyPr rtlCol="0" anchor="ctr"/>
-          <a:lstStyle/>
-          <a:p>
-            <a:pPr algn="ctr"/>
-          </a:p>
-        </p:txBody>
-      </p:sp>
-      <p:sp>
-        <p:nvSpPr>
-          <p:cNvPr id="4" name="Rectangle 3"/>
-          <p:cNvSpPr/>
-          <p:nvPr/>
-        </p:nvSpPr>
-        <p:spPr>
-          <a:xfrm>
-            <a:off x="0" y="429768"/>
-            <a:ext cx="12188952" cy="73152"/>
-          </a:xfrm>
-          <a:prstGeom prst="rect">
-            <a:avLst/>
-          </a:prstGeom>
-          <a:solidFill>
-            <a:srgbClr val="32C5FF"/>
-          </a:solidFill>
-          <a:ln>
-            <a:noFill/>
-          </a:ln>
-        </p:spPr>
-        <p:style>
-          <a:lnRef idx="1">
-            <a:schemeClr val="accent1"/>
-          </a:lnRef>
-          <a:fillRef idx="3">
-            <a:schemeClr val="accent1"/>
-          </a:fillRef>
-          <a:effectRef idx="2">
-            <a:schemeClr val="accent1"/>
-          </a:effectRef>
-          <a:fontRef idx="minor">
-            <a:schemeClr val="lt1"/>
-          </a:fontRef>
-        </p:style>
-        <p:txBody>
-          <a:bodyPr rtlCol="0" anchor="ctr"/>
-          <a:lstStyle/>
-          <a:p>
-            <a:pPr algn="ctr"/>
-          </a:p>
-        </p:txBody>
-      </p:sp>
-      <p:sp>
-        <p:nvSpPr>
-          <p:cNvPr id="5" name="Rectangle 4"/>
-          <p:cNvSpPr/>
-          <p:nvPr/>
-        </p:nvSpPr>
-        <p:spPr>
-          <a:xfrm>
-            <a:off x="0" y="6720840"/>
-            <a:ext cx="12188952" cy="137160"/>
-          </a:xfrm>
-          <a:prstGeom prst="rect">
-            <a:avLst/>
-          </a:prstGeom>
-          <a:solidFill>
-            <a:srgbClr val="0D223D"/>
-          </a:solidFill>
-          <a:ln>
-            <a:noFill/>
-          </a:ln>
-        </p:spPr>
-        <p:style>
-          <a:lnRef idx="1">
-            <a:schemeClr val="accent1"/>
-          </a:lnRef>
-          <a:fillRef idx="3">
-            <a:schemeClr val="accent1"/>
-          </a:fillRef>
-          <a:effectRef idx="2">
-            <a:schemeClr val="accent1"/>
-          </a:effectRef>
-          <a:fontRef idx="minor">
-            <a:schemeClr val="lt1"/>
-          </a:fontRef>
-        </p:style>
-        <p:txBody>
-          <a:bodyPr rtlCol="0" anchor="ctr"/>
-          <a:lstStyle/>
-          <a:p>
-            <a:pPr algn="ctr"/>
-          </a:p>
-        </p:txBody>
-      </p:sp>
-      <p:sp>
-        <p:nvSpPr>
-          <p:cNvPr id="6" name="TextBox 5"/>
-          <p:cNvSpPr txBox="1"/>
-          <p:nvPr/>
-        </p:nvSpPr>
-        <p:spPr>
-          <a:xfrm>
-            <a:off x="502920" y="73152"/>
-            <a:ext cx="8046720" cy="320040"/>
-          </a:xfrm>
-          <a:prstGeom prst="rect">
-            <a:avLst/>
-          </a:prstGeom>
-          <a:noFill/>
-        </p:spPr>
-        <p:txBody>
-          <a:bodyPr wrap="none">
-            <a:spAutoFit/>
-          </a:bodyPr>
-          <a:lstStyle/>
-          <a:p>
-            <a:pPr>
-              <a:defRPr sz="1600" b="1">
-                <a:solidFill>
-                  <a:srgbClr val="32C5FF"/>
-                </a:solidFill>
-                <a:latin typeface="Noto Sans TC"/>
-              </a:defRPr>
-            </a:pPr>
-            <a:r>
-              <a:t>地圖截圖全覽</a:t>
-            </a:r>
-          </a:p>
-        </p:txBody>
-      </p:sp>
-      <p:sp>
-        <p:nvSpPr>
-          <p:cNvPr id="7" name="TextBox 6"/>
-          <p:cNvSpPr txBox="1"/>
-          <p:nvPr/>
-        </p:nvSpPr>
-        <p:spPr>
-          <a:xfrm>
-            <a:off x="9326880" y="73152"/>
-            <a:ext cx="2377440" cy="274320"/>
-          </a:xfrm>
-          <a:prstGeom prst="rect">
-            <a:avLst/>
-          </a:prstGeom>
-          <a:noFill/>
-        </p:spPr>
-        <p:txBody>
-          <a:bodyPr wrap="none">
-            <a:spAutoFit/>
-          </a:bodyPr>
-          <a:lstStyle/>
-          <a:p>
-            <a:pPr algn="r">
-              <a:defRPr sz="1200" b="1">
-                <a:solidFill>
-                  <a:srgbClr val="9DB3CF"/>
-                </a:solidFill>
-                <a:latin typeface="Space Grotesk"/>
-              </a:defRPr>
-            </a:pPr>
-            <a:r>
-              <a:t>AI Explorer</a:t>
-            </a:r>
-          </a:p>
-        </p:txBody>
-      </p:sp>
-      <p:sp>
-        <p:nvSpPr>
-          <p:cNvPr id="8" name="Rounded Rectangle 7"/>
-          <p:cNvSpPr/>
-          <p:nvPr/>
-        </p:nvSpPr>
-        <p:spPr>
-          <a:xfrm>
-            <a:off x="640080" y="1600200"/>
-            <a:ext cx="6400800" cy="4480560"/>
-          </a:xfrm>
-          <a:prstGeom prst="roundRect">
-            <a:avLst/>
-          </a:prstGeom>
-          <a:solidFill>
-            <a:srgbClr val="0D223D"/>
-          </a:solidFill>
-          <a:ln w="12700">
-            <a:solidFill>
-              <a:srgbClr val="32C5FF"/>
-            </a:solidFill>
-          </a:ln>
-        </p:spPr>
-        <p:style>
-          <a:lnRef idx="1">
-            <a:schemeClr val="accent1"/>
-          </a:lnRef>
-          <a:fillRef idx="3">
-            <a:schemeClr val="accent1"/>
-          </a:fillRef>
-          <a:effectRef idx="2">
-            <a:schemeClr val="accent1"/>
-          </a:effectRef>
-          <a:fontRef idx="minor">
-            <a:schemeClr val="lt1"/>
-          </a:fontRef>
-        </p:style>
-        <p:txBody>
-          <a:bodyPr rtlCol="0" anchor="ctr"/>
-          <a:lstStyle/>
-          <a:p>
-            <a:pPr algn="ctr"/>
-          </a:p>
-        </p:txBody>
-      </p:sp>
-      <p:pic>
-        <p:nvPicPr>
-          <p:cNvPr id="9" name="Picture 8" descr="map-overview.png"/>
-          <p:cNvPicPr>
-            <a:picLocks noChangeAspect="1"/>
-          </p:cNvPicPr>
-          <p:nvPr/>
-        </p:nvPicPr>
-        <p:blipFill>
-          <a:blip r:embed="rId2"/>
-          <a:stretch>
-            <a:fillRect/>
-          </a:stretch>
-        </p:blipFill>
-        <p:spPr>
-          <a:xfrm>
-            <a:off x="868680" y="1847088"/>
-            <a:ext cx="5943600" cy="3977639"/>
-          </a:xfrm>
-          <a:prstGeom prst="rect">
-            <a:avLst/>
-          </a:prstGeom>
-        </p:spPr>
-      </p:pic>
+            <a:endParaRPr/>
+          </a:p>
+        </p:txBody>
+      </p:sp>
       <p:sp>
         <p:nvSpPr>
           <p:cNvPr id="10" name="Rounded Rectangle 9"/>
@@ -9634,8 +9466,8 @@
         </p:nvSpPr>
         <p:spPr>
           <a:xfrm>
-            <a:off x="7223760" y="1600200"/>
-            <a:ext cx="4343400" cy="4480560"/>
+            <a:off x="2523941" y="1422234"/>
+            <a:ext cx="3931920" cy="1487129"/>
           </a:xfrm>
           <a:prstGeom prst="roundRect">
             <a:avLst/>
@@ -9668,6 +9500,7 @@
           <a:lstStyle/>
           <a:p>
             <a:pPr algn="ctr"/>
+            <a:endParaRPr/>
           </a:p>
         </p:txBody>
       </p:sp>
@@ -9679,8 +9512,8 @@
         </p:nvSpPr>
         <p:spPr>
           <a:xfrm>
-            <a:off x="7498079" y="1874519"/>
-            <a:ext cx="3840480" cy="3977639"/>
+            <a:off x="2798260" y="1696553"/>
+            <a:ext cx="3759856" cy="1077218"/>
           </a:xfrm>
           <a:prstGeom prst="rect">
             <a:avLst/>
@@ -9688,7 +9521,7 @@
           <a:noFill/>
         </p:spPr>
         <p:txBody>
-          <a:bodyPr wrap="none">
+          <a:bodyPr wrap="square">
             <a:spAutoFit/>
           </a:bodyPr>
           <a:lstStyle/>
@@ -9702,7 +9535,8 @@
               </a:defRPr>
             </a:pPr>
             <a:r>
-              <a:t>• 左側 65%：SVG 互動地圖</a:t>
+              <a:rPr dirty="0"/>
+              <a:t>• 年份：1950，類別：理論基礎</a:t>
             </a:r>
           </a:p>
           <a:p>
@@ -9715,8 +9549,30 @@
               </a:defRPr>
             </a:pPr>
             <a:r>
-              <a:t>• 右側 35%：節點詳情面板</a:t>
-            </a:r>
+              <a:rPr dirty="0"/>
+              <a:t>• </a:t>
+            </a:r>
+            <a:r>
+              <a:rPr dirty="0" err="1"/>
+              <a:t>已接</a:t>
+            </a:r>
+            <a:r>
+              <a:rPr dirty="0"/>
+              <a:t> </a:t>
+            </a:r>
+            <a:r>
+              <a:rPr dirty="0" err="1"/>
+              <a:t>NotebookLM</a:t>
+            </a:r>
+            <a:r>
+              <a:rPr dirty="0"/>
+              <a:t> </a:t>
+            </a:r>
+            <a:r>
+              <a:rPr dirty="0" err="1"/>
+              <a:t>摘要與來源連結</a:t>
+            </a:r>
+            <a:endParaRPr dirty="0"/>
           </a:p>
           <a:p>
             <a:pPr>
@@ -9728,8 +9584,22 @@
               </a:defRPr>
             </a:pPr>
             <a:r>
-              <a:t>• 上方：年代篩選（1950s -&gt; 2020s+）</a:t>
-            </a:r>
+              <a:rPr dirty="0"/>
+              <a:t>• </a:t>
+            </a:r>
+            <a:r>
+              <a:rPr dirty="0" err="1"/>
+              <a:t>本地</a:t>
+            </a:r>
+            <a:r>
+              <a:rPr dirty="0"/>
+              <a:t> mp4 </a:t>
+            </a:r>
+            <a:r>
+              <a:rPr dirty="0" err="1"/>
+              <a:t>影片可直接在面板播放</a:t>
+            </a:r>
+            <a:endParaRPr dirty="0"/>
           </a:p>
           <a:p>
             <a:pPr>
@@ -9741,487 +9611,14 @@
               </a:defRPr>
             </a:pPr>
             <a:r>
-              <a:t>• 面板內容：摘要、影片、來源、測驗</a:t>
-            </a:r>
-          </a:p>
-        </p:txBody>
-      </p:sp>
-      <p:sp>
-        <p:nvSpPr>
-          <p:cNvPr id="12" name="TextBox 11"/>
-          <p:cNvSpPr txBox="1"/>
-          <p:nvPr/>
-        </p:nvSpPr>
-        <p:spPr>
-          <a:xfrm>
-            <a:off x="11155680" y="6473952"/>
-            <a:ext cx="731520" cy="219456"/>
-          </a:xfrm>
-          <a:prstGeom prst="rect">
-            <a:avLst/>
-          </a:prstGeom>
-          <a:noFill/>
-        </p:spPr>
-        <p:txBody>
-          <a:bodyPr wrap="none">
-            <a:spAutoFit/>
-          </a:bodyPr>
-          <a:lstStyle/>
-          <a:p>
-            <a:pPr algn="r">
-              <a:defRPr sz="1000">
-                <a:solidFill>
-                  <a:srgbClr val="9DB3CF"/>
-                </a:solidFill>
-                <a:latin typeface="Space Grotesk"/>
-              </a:defRPr>
-            </a:pPr>
-            <a:r>
-              <a:t>8</a:t>
-            </a:r>
-          </a:p>
-        </p:txBody>
-      </p:sp>
-    </p:spTree>
-  </p:cSld>
-  <p:clrMapOvr>
-    <a:masterClrMapping/>
-  </p:clrMapOvr>
-</p:sld>
-</file>
-
-<file path=ppt/slides/slide9.xml><?xml version="1.0" encoding="utf-8"?>
-<p:sld xmlns:a="http://schemas.openxmlformats.org/drawingml/2006/main" xmlns:p="http://schemas.openxmlformats.org/presentationml/2006/main" xmlns:r="http://schemas.openxmlformats.org/officeDocument/2006/relationships">
-  <p:cSld>
-    <p:bg>
-      <p:bgPr>
-        <a:solidFill>
-          <a:srgbClr val="071226"/>
-        </a:solidFill>
-        <a:effectLst/>
-      </p:bgPr>
-    </p:bg>
-    <p:spTree>
-      <p:nvGrpSpPr>
-        <p:cNvPr id="1" name=""/>
-        <p:cNvGrpSpPr/>
-        <p:nvPr/>
-      </p:nvGrpSpPr>
-      <p:grpSpPr/>
-      <p:sp>
-        <p:nvSpPr>
-          <p:cNvPr id="2" name="Title 1"/>
-          <p:cNvSpPr>
-            <a:spLocks noGrp="1"/>
-          </p:cNvSpPr>
-          <p:nvPr>
-            <p:ph type="title"/>
-          </p:nvPr>
-        </p:nvSpPr>
-        <p:spPr/>
-        <p:txBody>
-          <a:bodyPr/>
-          <a:lstStyle/>
-          <a:p>
-            <a:r>
-              <a:rPr sz="3200" b="1">
-                <a:solidFill>
-                  <a:srgbClr val="ECF4FF"/>
-                </a:solidFill>
-                <a:latin typeface="Space Grotesk"/>
-              </a:rPr>
-              <a:t>節點 Demo 1 — 圖靈測試</a:t>
-            </a:r>
-          </a:p>
-        </p:txBody>
-      </p:sp>
-      <p:sp>
-        <p:nvSpPr>
-          <p:cNvPr id="3" name="Rectangle 2"/>
-          <p:cNvSpPr/>
-          <p:nvPr/>
-        </p:nvSpPr>
-        <p:spPr>
-          <a:xfrm>
-            <a:off x="0" y="0"/>
-            <a:ext cx="12188952" cy="502920"/>
-          </a:xfrm>
-          <a:prstGeom prst="rect">
-            <a:avLst/>
-          </a:prstGeom>
-          <a:solidFill>
-            <a:srgbClr val="0D223D"/>
-          </a:solidFill>
-          <a:ln>
-            <a:noFill/>
-          </a:ln>
-        </p:spPr>
-        <p:style>
-          <a:lnRef idx="1">
-            <a:schemeClr val="accent1"/>
-          </a:lnRef>
-          <a:fillRef idx="3">
-            <a:schemeClr val="accent1"/>
-          </a:fillRef>
-          <a:effectRef idx="2">
-            <a:schemeClr val="accent1"/>
-          </a:effectRef>
-          <a:fontRef idx="minor">
-            <a:schemeClr val="lt1"/>
-          </a:fontRef>
-        </p:style>
-        <p:txBody>
-          <a:bodyPr rtlCol="0" anchor="ctr"/>
-          <a:lstStyle/>
-          <a:p>
-            <a:pPr algn="ctr"/>
-          </a:p>
-        </p:txBody>
-      </p:sp>
-      <p:sp>
-        <p:nvSpPr>
-          <p:cNvPr id="4" name="Rectangle 3"/>
-          <p:cNvSpPr/>
-          <p:nvPr/>
-        </p:nvSpPr>
-        <p:spPr>
-          <a:xfrm>
-            <a:off x="0" y="429768"/>
-            <a:ext cx="12188952" cy="73152"/>
-          </a:xfrm>
-          <a:prstGeom prst="rect">
-            <a:avLst/>
-          </a:prstGeom>
-          <a:solidFill>
-            <a:srgbClr val="32C5FF"/>
-          </a:solidFill>
-          <a:ln>
-            <a:noFill/>
-          </a:ln>
-        </p:spPr>
-        <p:style>
-          <a:lnRef idx="1">
-            <a:schemeClr val="accent1"/>
-          </a:lnRef>
-          <a:fillRef idx="3">
-            <a:schemeClr val="accent1"/>
-          </a:fillRef>
-          <a:effectRef idx="2">
-            <a:schemeClr val="accent1"/>
-          </a:effectRef>
-          <a:fontRef idx="minor">
-            <a:schemeClr val="lt1"/>
-          </a:fontRef>
-        </p:style>
-        <p:txBody>
-          <a:bodyPr rtlCol="0" anchor="ctr"/>
-          <a:lstStyle/>
-          <a:p>
-            <a:pPr algn="ctr"/>
-          </a:p>
-        </p:txBody>
-      </p:sp>
-      <p:sp>
-        <p:nvSpPr>
-          <p:cNvPr id="5" name="Rectangle 4"/>
-          <p:cNvSpPr/>
-          <p:nvPr/>
-        </p:nvSpPr>
-        <p:spPr>
-          <a:xfrm>
-            <a:off x="0" y="6720840"/>
-            <a:ext cx="12188952" cy="137160"/>
-          </a:xfrm>
-          <a:prstGeom prst="rect">
-            <a:avLst/>
-          </a:prstGeom>
-          <a:solidFill>
-            <a:srgbClr val="0D223D"/>
-          </a:solidFill>
-          <a:ln>
-            <a:noFill/>
-          </a:ln>
-        </p:spPr>
-        <p:style>
-          <a:lnRef idx="1">
-            <a:schemeClr val="accent1"/>
-          </a:lnRef>
-          <a:fillRef idx="3">
-            <a:schemeClr val="accent1"/>
-          </a:fillRef>
-          <a:effectRef idx="2">
-            <a:schemeClr val="accent1"/>
-          </a:effectRef>
-          <a:fontRef idx="minor">
-            <a:schemeClr val="lt1"/>
-          </a:fontRef>
-        </p:style>
-        <p:txBody>
-          <a:bodyPr rtlCol="0" anchor="ctr"/>
-          <a:lstStyle/>
-          <a:p>
-            <a:pPr algn="ctr"/>
-          </a:p>
-        </p:txBody>
-      </p:sp>
-      <p:sp>
-        <p:nvSpPr>
-          <p:cNvPr id="6" name="TextBox 5"/>
-          <p:cNvSpPr txBox="1"/>
-          <p:nvPr/>
-        </p:nvSpPr>
-        <p:spPr>
-          <a:xfrm>
-            <a:off x="502920" y="73152"/>
-            <a:ext cx="8046720" cy="320040"/>
-          </a:xfrm>
-          <a:prstGeom prst="rect">
-            <a:avLst/>
-          </a:prstGeom>
-          <a:noFill/>
-        </p:spPr>
-        <p:txBody>
-          <a:bodyPr wrap="none">
-            <a:spAutoFit/>
-          </a:bodyPr>
-          <a:lstStyle/>
-          <a:p>
-            <a:pPr>
-              <a:defRPr sz="1600" b="1">
-                <a:solidFill>
-                  <a:srgbClr val="32C5FF"/>
-                </a:solidFill>
-                <a:latin typeface="Noto Sans TC"/>
-              </a:defRPr>
-            </a:pPr>
-            <a:r>
-              <a:t>節點 Demo 1 — 圖靈測試</a:t>
-            </a:r>
-          </a:p>
-        </p:txBody>
-      </p:sp>
-      <p:sp>
-        <p:nvSpPr>
-          <p:cNvPr id="7" name="TextBox 6"/>
-          <p:cNvSpPr txBox="1"/>
-          <p:nvPr/>
-        </p:nvSpPr>
-        <p:spPr>
-          <a:xfrm>
-            <a:off x="9326880" y="73152"/>
-            <a:ext cx="2377440" cy="274320"/>
-          </a:xfrm>
-          <a:prstGeom prst="rect">
-            <a:avLst/>
-          </a:prstGeom>
-          <a:noFill/>
-        </p:spPr>
-        <p:txBody>
-          <a:bodyPr wrap="none">
-            <a:spAutoFit/>
-          </a:bodyPr>
-          <a:lstStyle/>
-          <a:p>
-            <a:pPr algn="r">
-              <a:defRPr sz="1200" b="1">
-                <a:solidFill>
-                  <a:srgbClr val="9DB3CF"/>
-                </a:solidFill>
-                <a:latin typeface="Space Grotesk"/>
-              </a:defRPr>
-            </a:pPr>
-            <a:r>
-              <a:t>AI Explorer</a:t>
-            </a:r>
-          </a:p>
-        </p:txBody>
-      </p:sp>
-      <p:sp>
-        <p:nvSpPr>
-          <p:cNvPr id="8" name="Rounded Rectangle 7"/>
-          <p:cNvSpPr/>
-          <p:nvPr/>
-        </p:nvSpPr>
-        <p:spPr>
-          <a:xfrm>
-            <a:off x="640080" y="1600200"/>
-            <a:ext cx="6400800" cy="4480560"/>
-          </a:xfrm>
-          <a:prstGeom prst="roundRect">
-            <a:avLst/>
-          </a:prstGeom>
-          <a:solidFill>
-            <a:srgbClr val="0D223D"/>
-          </a:solidFill>
-          <a:ln w="12700">
-            <a:solidFill>
-              <a:srgbClr val="32C5FF"/>
-            </a:solidFill>
-          </a:ln>
-        </p:spPr>
-        <p:style>
-          <a:lnRef idx="1">
-            <a:schemeClr val="accent1"/>
-          </a:lnRef>
-          <a:fillRef idx="3">
-            <a:schemeClr val="accent1"/>
-          </a:fillRef>
-          <a:effectRef idx="2">
-            <a:schemeClr val="accent1"/>
-          </a:effectRef>
-          <a:fontRef idx="minor">
-            <a:schemeClr val="lt1"/>
-          </a:fontRef>
-        </p:style>
-        <p:txBody>
-          <a:bodyPr rtlCol="0" anchor="ctr"/>
-          <a:lstStyle/>
-          <a:p>
-            <a:pPr algn="ctr"/>
-          </a:p>
-        </p:txBody>
-      </p:sp>
-      <p:pic>
-        <p:nvPicPr>
-          <p:cNvPr id="9" name="Picture 8" descr="demo-turing.png"/>
-          <p:cNvPicPr>
-            <a:picLocks noChangeAspect="1"/>
-          </p:cNvPicPr>
-          <p:nvPr/>
-        </p:nvPicPr>
-        <p:blipFill>
-          <a:blip r:embed="rId2"/>
-          <a:stretch>
-            <a:fillRect/>
-          </a:stretch>
-        </p:blipFill>
-        <p:spPr>
-          <a:xfrm>
-            <a:off x="868680" y="1847088"/>
-            <a:ext cx="5943600" cy="3977639"/>
-          </a:xfrm>
-          <a:prstGeom prst="rect">
-            <a:avLst/>
-          </a:prstGeom>
-        </p:spPr>
-      </p:pic>
-      <p:sp>
-        <p:nvSpPr>
-          <p:cNvPr id="10" name="Rounded Rectangle 9"/>
-          <p:cNvSpPr/>
-          <p:nvPr/>
-        </p:nvSpPr>
-        <p:spPr>
-          <a:xfrm>
-            <a:off x="7223760" y="1600200"/>
-            <a:ext cx="4343400" cy="4480560"/>
-          </a:xfrm>
-          <a:prstGeom prst="roundRect">
-            <a:avLst/>
-          </a:prstGeom>
-          <a:solidFill>
-            <a:srgbClr val="0D223D"/>
-          </a:solidFill>
-          <a:ln w="12700">
-            <a:solidFill>
-              <a:srgbClr val="79F0C6"/>
-            </a:solidFill>
-          </a:ln>
-        </p:spPr>
-        <p:style>
-          <a:lnRef idx="1">
-            <a:schemeClr val="accent1"/>
-          </a:lnRef>
-          <a:fillRef idx="3">
-            <a:schemeClr val="accent1"/>
-          </a:fillRef>
-          <a:effectRef idx="2">
-            <a:schemeClr val="accent1"/>
-          </a:effectRef>
-          <a:fontRef idx="minor">
-            <a:schemeClr val="lt1"/>
-          </a:fontRef>
-        </p:style>
-        <p:txBody>
-          <a:bodyPr rtlCol="0" anchor="ctr"/>
-          <a:lstStyle/>
-          <a:p>
-            <a:pPr algn="ctr"/>
-          </a:p>
-        </p:txBody>
-      </p:sp>
-      <p:sp>
-        <p:nvSpPr>
-          <p:cNvPr id="11" name="TextBox 10"/>
-          <p:cNvSpPr txBox="1"/>
-          <p:nvPr/>
-        </p:nvSpPr>
-        <p:spPr>
-          <a:xfrm>
-            <a:off x="7498079" y="1874519"/>
-            <a:ext cx="3840480" cy="3977639"/>
-          </a:xfrm>
-          <a:prstGeom prst="rect">
-            <a:avLst/>
-          </a:prstGeom>
-          <a:noFill/>
-        </p:spPr>
-        <p:txBody>
-          <a:bodyPr wrap="none">
-            <a:spAutoFit/>
-          </a:bodyPr>
-          <a:lstStyle/>
-          <a:p>
-            <a:pPr>
-              <a:defRPr sz="1600">
-                <a:solidFill>
-                  <a:srgbClr val="ECF4FF"/>
-                </a:solidFill>
-                <a:latin typeface="Noto Sans TC"/>
-              </a:defRPr>
-            </a:pPr>
-            <a:r>
-              <a:t>• 年份：1950，類別：理論基礎</a:t>
-            </a:r>
-          </a:p>
-          <a:p>
-            <a:pPr>
-              <a:defRPr sz="1600">
-                <a:solidFill>
-                  <a:srgbClr val="ECF4FF"/>
-                </a:solidFill>
-                <a:latin typeface="Noto Sans TC"/>
-              </a:defRPr>
-            </a:pPr>
-            <a:r>
-              <a:t>• 已接 NotebookLM 摘要與來源連結</a:t>
-            </a:r>
-          </a:p>
-          <a:p>
-            <a:pPr>
-              <a:defRPr sz="1600">
-                <a:solidFill>
-                  <a:srgbClr val="ECF4FF"/>
-                </a:solidFill>
-                <a:latin typeface="Noto Sans TC"/>
-              </a:defRPr>
-            </a:pPr>
-            <a:r>
-              <a:t>• 本地 mp4 影片可直接在面板播放</a:t>
-            </a:r>
-          </a:p>
-          <a:p>
-            <a:pPr>
-              <a:defRPr sz="1600">
-                <a:solidFill>
-                  <a:srgbClr val="ECF4FF"/>
-                </a:solidFill>
-                <a:latin typeface="Noto Sans TC"/>
-              </a:defRPr>
-            </a:pPr>
-            <a:r>
-              <a:t>• 小測驗可即時回饋答案</a:t>
-            </a:r>
+              <a:rPr dirty="0"/>
+              <a:t>• </a:t>
+            </a:r>
+            <a:r>
+              <a:rPr dirty="0" err="1"/>
+              <a:t>小測驗可即時回饋答案</a:t>
+            </a:r>
+            <a:endParaRPr dirty="0"/>
           </a:p>
         </p:txBody>
       </p:sp>
